--- a/docs/new-user-procedure/New-User-Procedure.pptx
+++ b/docs/new-user-procedure/New-User-Procedure.pptx
@@ -12,6 +12,26 @@
     <p:sldId id="260" r:id="rId11"/>
     <p:sldId id="261" r:id="rId12"/>
     <p:sldId id="262" r:id="rId13"/>
+    <p:sldId id="263" r:id="rId14"/>
+    <p:sldId id="264" r:id="rId15"/>
+    <p:sldId id="265" r:id="rId16"/>
+    <p:sldId id="266" r:id="rId17"/>
+    <p:sldId id="267" r:id="rId18"/>
+    <p:sldId id="268" r:id="rId19"/>
+    <p:sldId id="269" r:id="rId20"/>
+    <p:sldId id="270" r:id="rId21"/>
+    <p:sldId id="271" r:id="rId22"/>
+    <p:sldId id="272" r:id="rId23"/>
+    <p:sldId id="273" r:id="rId24"/>
+    <p:sldId id="274" r:id="rId25"/>
+    <p:sldId id="275" r:id="rId26"/>
+    <p:sldId id="276" r:id="rId27"/>
+    <p:sldId id="277" r:id="rId28"/>
+    <p:sldId id="278" r:id="rId29"/>
+    <p:sldId id="279" r:id="rId30"/>
+    <p:sldId id="280" r:id="rId31"/>
+    <p:sldId id="281" r:id="rId32"/>
+    <p:sldId id="282" r:id="rId33"/>
   </p:sldIdLst>
   <p:sldSz cx="12191695" cy="6858000" type="screen4x3"/>
   <p:notesSz cx="6858000" cy="9144000"/>
@@ -3136,14 +3156,14 @@
                 </a:solidFill>
                 <a:latin typeface="Cambria"/>
               </a:rPr>
-              <a:t>Step 1 — The window opens</a:t>
+              <a:t>Step 1 — Open Releases</a:t>
             </a:r>
           </a:p>
         </p:txBody>
       </p:sp>
       <p:pic>
         <p:nvPicPr>
-          <p:cNvPr id="3" name="Picture 2" descr="step-1-window-opens.png"/>
+          <p:cNvPr id="3" name="Picture 2" descr="step-1-open-releases.png"/>
           <p:cNvPicPr>
             <a:picLocks noChangeAspect="1"/>
           </p:cNvPicPr>
@@ -3157,8 +3177,8 @@
         </p:blipFill>
         <p:spPr>
           <a:xfrm>
-            <a:off x="548640" y="2773087"/>
-            <a:ext cx="11094415" cy="1220385"/>
+            <a:off x="3305022" y="1621155"/>
+            <a:ext cx="5581650" cy="3524250"/>
           </a:xfrm>
           <a:prstGeom prst="rect">
             <a:avLst/>
@@ -3199,7 +3219,1287 @@
                 </a:solidFill>
                 <a:latin typeface="Calibri"/>
               </a:rPr>
-              <a:t>Acervator opens on Status. Press Live.</a:t>
+              <a:t>Open Releases in the right column of the repository page.</a:t>
+            </a:r>
+          </a:p>
+        </p:txBody>
+      </p:sp>
+    </p:spTree>
+  </p:cSld>
+  <p:clrMapOvr>
+    <a:masterClrMapping/>
+  </p:clrMapOvr>
+</p:sld>
+</file>
+
+<file path=ppt/slides/slide10.xml><?xml version="1.0" encoding="utf-8"?>
+<p:sld xmlns:a="http://schemas.openxmlformats.org/drawingml/2006/main" xmlns:p="http://schemas.openxmlformats.org/presentationml/2006/main" xmlns:r="http://schemas.openxmlformats.org/officeDocument/2006/relationships">
+  <p:cSld>
+    <p:bg>
+      <p:bgPr>
+        <a:solidFill>
+          <a:srgbClr val="121216"/>
+        </a:solidFill>
+        <a:effectLst/>
+      </p:bgPr>
+    </p:bg>
+    <p:spTree>
+      <p:nvGrpSpPr>
+        <p:cNvPr id="1" name=""/>
+        <p:cNvGrpSpPr/>
+        <p:nvPr/>
+      </p:nvGrpSpPr>
+      <p:grpSpPr/>
+      <p:sp>
+        <p:nvSpPr>
+          <p:cNvPr id="2" name="TextBox 1"/>
+          <p:cNvSpPr txBox="1"/>
+          <p:nvPr/>
+        </p:nvSpPr>
+        <p:spPr>
+          <a:xfrm>
+            <a:off x="548640" y="457200"/>
+            <a:ext cx="11094415" cy="914400"/>
+          </a:xfrm>
+          <a:prstGeom prst="rect">
+            <a:avLst/>
+          </a:prstGeom>
+          <a:noFill/>
+        </p:spPr>
+        <p:txBody>
+          <a:bodyPr wrap="square" lIns="0" rIns="0" tIns="0" bIns="0">
+            <a:spAutoFit/>
+          </a:bodyPr>
+          <a:lstStyle/>
+          <a:p>
+            <a:pPr>
+              <a:spcAft>
+                <a:spcPts val="1600"/>
+              </a:spcAft>
+            </a:pPr>
+            <a:r>
+              <a:rPr sz="3600" b="1">
+                <a:solidFill>
+                  <a:srgbClr val="FFFFFF"/>
+                </a:solidFill>
+                <a:latin typeface="Cambria"/>
+              </a:rPr>
+              <a:t>Step 10 — Name what it trades</a:t>
+            </a:r>
+          </a:p>
+        </p:txBody>
+      </p:sp>
+      <p:pic>
+        <p:nvPicPr>
+          <p:cNvPr id="3" name="Picture 2" descr="step-10-name-what-it-trades.png"/>
+          <p:cNvPicPr>
+            <a:picLocks noChangeAspect="1"/>
+          </p:cNvPicPr>
+          <p:nvPr/>
+        </p:nvPicPr>
+        <p:blipFill>
+          <a:blip r:embed="rId2"/>
+          <a:stretch>
+            <a:fillRect/>
+          </a:stretch>
+        </p:blipFill>
+        <p:spPr>
+          <a:xfrm>
+            <a:off x="2627434" y="1554480"/>
+            <a:ext cx="6936827" cy="3657599"/>
+          </a:xfrm>
+          <a:prstGeom prst="rect">
+            <a:avLst/>
+          </a:prstGeom>
+        </p:spPr>
+      </p:pic>
+      <p:sp>
+        <p:nvSpPr>
+          <p:cNvPr id="4" name="TextBox 3"/>
+          <p:cNvSpPr txBox="1"/>
+          <p:nvPr/>
+        </p:nvSpPr>
+        <p:spPr>
+          <a:xfrm>
+            <a:off x="548640" y="5440680"/>
+            <a:ext cx="11094415" cy="914400"/>
+          </a:xfrm>
+          <a:prstGeom prst="rect">
+            <a:avLst/>
+          </a:prstGeom>
+          <a:noFill/>
+        </p:spPr>
+        <p:txBody>
+          <a:bodyPr wrap="square" lIns="0" rIns="0" tIns="0" bIns="0">
+            <a:spAutoFit/>
+          </a:bodyPr>
+          <a:lstStyle/>
+          <a:p>
+            <a:pPr>
+              <a:spcAft>
+                <a:spcPts val="1600"/>
+              </a:spcAft>
+            </a:pPr>
+            <a:r>
+              <a:rPr sz="2200" b="1">
+                <a:solidFill>
+                  <a:srgbClr val="FFB000"/>
+                </a:solidFill>
+                <a:latin typeface="Calibri"/>
+              </a:rPr>
+              <a:t>Pick the venue, then the pair. Press Next.</a:t>
+            </a:r>
+          </a:p>
+        </p:txBody>
+      </p:sp>
+    </p:spTree>
+  </p:cSld>
+  <p:clrMapOvr>
+    <a:masterClrMapping/>
+  </p:clrMapOvr>
+</p:sld>
+</file>
+
+<file path=ppt/slides/slide11.xml><?xml version="1.0" encoding="utf-8"?>
+<p:sld xmlns:a="http://schemas.openxmlformats.org/drawingml/2006/main" xmlns:p="http://schemas.openxmlformats.org/presentationml/2006/main" xmlns:r="http://schemas.openxmlformats.org/officeDocument/2006/relationships">
+  <p:cSld>
+    <p:bg>
+      <p:bgPr>
+        <a:solidFill>
+          <a:srgbClr val="121216"/>
+        </a:solidFill>
+        <a:effectLst/>
+      </p:bgPr>
+    </p:bg>
+    <p:spTree>
+      <p:nvGrpSpPr>
+        <p:cNvPr id="1" name=""/>
+        <p:cNvGrpSpPr/>
+        <p:nvPr/>
+      </p:nvGrpSpPr>
+      <p:grpSpPr/>
+      <p:sp>
+        <p:nvSpPr>
+          <p:cNvPr id="2" name="TextBox 1"/>
+          <p:cNvSpPr txBox="1"/>
+          <p:nvPr/>
+        </p:nvSpPr>
+        <p:spPr>
+          <a:xfrm>
+            <a:off x="548640" y="457200"/>
+            <a:ext cx="11094415" cy="914400"/>
+          </a:xfrm>
+          <a:prstGeom prst="rect">
+            <a:avLst/>
+          </a:prstGeom>
+          <a:noFill/>
+        </p:spPr>
+        <p:txBody>
+          <a:bodyPr wrap="square" lIns="0" rIns="0" tIns="0" bIns="0">
+            <a:spAutoFit/>
+          </a:bodyPr>
+          <a:lstStyle/>
+          <a:p>
+            <a:pPr>
+              <a:spcAft>
+                <a:spcPts val="1600"/>
+              </a:spcAft>
+            </a:pPr>
+            <a:r>
+              <a:rPr sz="3600" b="1">
+                <a:solidFill>
+                  <a:srgbClr val="FFFFFF"/>
+                </a:solidFill>
+                <a:latin typeface="Cambria"/>
+              </a:rPr>
+              <a:t>Step 11 — How far price must move</a:t>
+            </a:r>
+          </a:p>
+        </p:txBody>
+      </p:sp>
+      <p:pic>
+        <p:nvPicPr>
+          <p:cNvPr id="3" name="Picture 2" descr="step-11-how-far-price-must-move.png"/>
+          <p:cNvPicPr>
+            <a:picLocks noChangeAspect="1"/>
+          </p:cNvPicPr>
+          <p:nvPr/>
+        </p:nvPicPr>
+        <p:blipFill>
+          <a:blip r:embed="rId2"/>
+          <a:stretch>
+            <a:fillRect/>
+          </a:stretch>
+        </p:blipFill>
+        <p:spPr>
+          <a:xfrm>
+            <a:off x="2792596" y="1554480"/>
+            <a:ext cx="6606502" cy="3657600"/>
+          </a:xfrm>
+          <a:prstGeom prst="rect">
+            <a:avLst/>
+          </a:prstGeom>
+        </p:spPr>
+      </p:pic>
+      <p:sp>
+        <p:nvSpPr>
+          <p:cNvPr id="4" name="TextBox 3"/>
+          <p:cNvSpPr txBox="1"/>
+          <p:nvPr/>
+        </p:nvSpPr>
+        <p:spPr>
+          <a:xfrm>
+            <a:off x="548640" y="5440680"/>
+            <a:ext cx="11094415" cy="914400"/>
+          </a:xfrm>
+          <a:prstGeom prst="rect">
+            <a:avLst/>
+          </a:prstGeom>
+          <a:noFill/>
+        </p:spPr>
+        <p:txBody>
+          <a:bodyPr wrap="square" lIns="0" rIns="0" tIns="0" bIns="0">
+            <a:spAutoFit/>
+          </a:bodyPr>
+          <a:lstStyle/>
+          <a:p>
+            <a:pPr>
+              <a:spcAft>
+                <a:spcPts val="1600"/>
+              </a:spcAft>
+            </a:pPr>
+            <a:r>
+              <a:rPr sz="2200" b="1">
+                <a:solidFill>
+                  <a:srgbClr val="FFB000"/>
+                </a:solidFill>
+                <a:latin typeface="Calibri"/>
+              </a:rPr>
+              <a:t>Leave Opposing Trade Interval at 1.00 %.</a:t>
+            </a:r>
+          </a:p>
+        </p:txBody>
+      </p:sp>
+    </p:spTree>
+  </p:cSld>
+  <p:clrMapOvr>
+    <a:masterClrMapping/>
+  </p:clrMapOvr>
+</p:sld>
+</file>
+
+<file path=ppt/slides/slide12.xml><?xml version="1.0" encoding="utf-8"?>
+<p:sld xmlns:a="http://schemas.openxmlformats.org/drawingml/2006/main" xmlns:p="http://schemas.openxmlformats.org/presentationml/2006/main" xmlns:r="http://schemas.openxmlformats.org/officeDocument/2006/relationships">
+  <p:cSld>
+    <p:bg>
+      <p:bgPr>
+        <a:solidFill>
+          <a:srgbClr val="121216"/>
+        </a:solidFill>
+        <a:effectLst/>
+      </p:bgPr>
+    </p:bg>
+    <p:spTree>
+      <p:nvGrpSpPr>
+        <p:cNvPr id="1" name=""/>
+        <p:cNvGrpSpPr/>
+        <p:nvPr/>
+      </p:nvGrpSpPr>
+      <p:grpSpPr/>
+      <p:sp>
+        <p:nvSpPr>
+          <p:cNvPr id="2" name="TextBox 1"/>
+          <p:cNvSpPr txBox="1"/>
+          <p:nvPr/>
+        </p:nvSpPr>
+        <p:spPr>
+          <a:xfrm>
+            <a:off x="548640" y="457200"/>
+            <a:ext cx="11094415" cy="914400"/>
+          </a:xfrm>
+          <a:prstGeom prst="rect">
+            <a:avLst/>
+          </a:prstGeom>
+          <a:noFill/>
+        </p:spPr>
+        <p:txBody>
+          <a:bodyPr wrap="square" lIns="0" rIns="0" tIns="0" bIns="0">
+            <a:spAutoFit/>
+          </a:bodyPr>
+          <a:lstStyle/>
+          <a:p>
+            <a:pPr>
+              <a:spcAft>
+                <a:spcPts val="1600"/>
+              </a:spcAft>
+            </a:pPr>
+            <a:r>
+              <a:rPr sz="3600" b="1">
+                <a:solidFill>
+                  <a:srgbClr val="FFFFFF"/>
+                </a:solidFill>
+                <a:latin typeface="Cambria"/>
+              </a:rPr>
+              <a:t>Step 12 — What it watches</a:t>
+            </a:r>
+          </a:p>
+        </p:txBody>
+      </p:sp>
+      <p:pic>
+        <p:nvPicPr>
+          <p:cNvPr id="3" name="Picture 2" descr="step-12-what-it-watches.png"/>
+          <p:cNvPicPr>
+            <a:picLocks noChangeAspect="1"/>
+          </p:cNvPicPr>
+          <p:nvPr/>
+        </p:nvPicPr>
+        <p:blipFill>
+          <a:blip r:embed="rId2"/>
+          <a:stretch>
+            <a:fillRect/>
+          </a:stretch>
+        </p:blipFill>
+        <p:spPr>
+          <a:xfrm>
+            <a:off x="857097" y="2083117"/>
+            <a:ext cx="10477500" cy="2600325"/>
+          </a:xfrm>
+          <a:prstGeom prst="rect">
+            <a:avLst/>
+          </a:prstGeom>
+        </p:spPr>
+      </p:pic>
+      <p:sp>
+        <p:nvSpPr>
+          <p:cNvPr id="4" name="TextBox 3"/>
+          <p:cNvSpPr txBox="1"/>
+          <p:nvPr/>
+        </p:nvSpPr>
+        <p:spPr>
+          <a:xfrm>
+            <a:off x="548640" y="5440680"/>
+            <a:ext cx="11094415" cy="914400"/>
+          </a:xfrm>
+          <a:prstGeom prst="rect">
+            <a:avLst/>
+          </a:prstGeom>
+          <a:noFill/>
+        </p:spPr>
+        <p:txBody>
+          <a:bodyPr wrap="square" lIns="0" rIns="0" tIns="0" bIns="0">
+            <a:spAutoFit/>
+          </a:bodyPr>
+          <a:lstStyle/>
+          <a:p>
+            <a:pPr>
+              <a:spcAft>
+                <a:spcPts val="1600"/>
+              </a:spcAft>
+            </a:pPr>
+            <a:r>
+              <a:rPr sz="2200" b="1">
+                <a:solidFill>
+                  <a:srgbClr val="FFB000"/>
+                </a:solidFill>
+                <a:latin typeface="Calibri"/>
+              </a:rPr>
+              <a:t>Leave TA Timeframe on 1h.</a:t>
+            </a:r>
+          </a:p>
+        </p:txBody>
+      </p:sp>
+    </p:spTree>
+  </p:cSld>
+  <p:clrMapOvr>
+    <a:masterClrMapping/>
+  </p:clrMapOvr>
+</p:sld>
+</file>
+
+<file path=ppt/slides/slide13.xml><?xml version="1.0" encoding="utf-8"?>
+<p:sld xmlns:a="http://schemas.openxmlformats.org/drawingml/2006/main" xmlns:p="http://schemas.openxmlformats.org/presentationml/2006/main" xmlns:r="http://schemas.openxmlformats.org/officeDocument/2006/relationships">
+  <p:cSld>
+    <p:bg>
+      <p:bgPr>
+        <a:solidFill>
+          <a:srgbClr val="121216"/>
+        </a:solidFill>
+        <a:effectLst/>
+      </p:bgPr>
+    </p:bg>
+    <p:spTree>
+      <p:nvGrpSpPr>
+        <p:cNvPr id="1" name=""/>
+        <p:cNvGrpSpPr/>
+        <p:nvPr/>
+      </p:nvGrpSpPr>
+      <p:grpSpPr/>
+      <p:sp>
+        <p:nvSpPr>
+          <p:cNvPr id="2" name="TextBox 1"/>
+          <p:cNvSpPr txBox="1"/>
+          <p:nvPr/>
+        </p:nvSpPr>
+        <p:spPr>
+          <a:xfrm>
+            <a:off x="548640" y="457200"/>
+            <a:ext cx="11094415" cy="914400"/>
+          </a:xfrm>
+          <a:prstGeom prst="rect">
+            <a:avLst/>
+          </a:prstGeom>
+          <a:noFill/>
+        </p:spPr>
+        <p:txBody>
+          <a:bodyPr wrap="square" lIns="0" rIns="0" tIns="0" bIns="0">
+            <a:spAutoFit/>
+          </a:bodyPr>
+          <a:lstStyle/>
+          <a:p>
+            <a:pPr>
+              <a:spcAft>
+                <a:spcPts val="1600"/>
+              </a:spcAft>
+            </a:pPr>
+            <a:r>
+              <a:rPr sz="3600" b="1">
+                <a:solidFill>
+                  <a:srgbClr val="FFFFFF"/>
+                </a:solidFill>
+                <a:latin typeface="Cambria"/>
+              </a:rPr>
+              <a:t>Step 13 — Set the Target Balance</a:t>
+            </a:r>
+          </a:p>
+        </p:txBody>
+      </p:sp>
+      <p:pic>
+        <p:nvPicPr>
+          <p:cNvPr id="3" name="Picture 2" descr="step-13-set-the-target-balance.png"/>
+          <p:cNvPicPr>
+            <a:picLocks noChangeAspect="1"/>
+          </p:cNvPicPr>
+          <p:nvPr/>
+        </p:nvPicPr>
+        <p:blipFill>
+          <a:blip r:embed="rId2"/>
+          <a:stretch>
+            <a:fillRect/>
+          </a:stretch>
+        </p:blipFill>
+        <p:spPr>
+          <a:xfrm>
+            <a:off x="2645281" y="1554480"/>
+            <a:ext cx="6901132" cy="3657600"/>
+          </a:xfrm>
+          <a:prstGeom prst="rect">
+            <a:avLst/>
+          </a:prstGeom>
+        </p:spPr>
+      </p:pic>
+      <p:sp>
+        <p:nvSpPr>
+          <p:cNvPr id="4" name="TextBox 3"/>
+          <p:cNvSpPr txBox="1"/>
+          <p:nvPr/>
+        </p:nvSpPr>
+        <p:spPr>
+          <a:xfrm>
+            <a:off x="548640" y="5440680"/>
+            <a:ext cx="11094415" cy="914400"/>
+          </a:xfrm>
+          <a:prstGeom prst="rect">
+            <a:avLst/>
+          </a:prstGeom>
+          <a:noFill/>
+        </p:spPr>
+        <p:txBody>
+          <a:bodyPr wrap="square" lIns="0" rIns="0" tIns="0" bIns="0">
+            <a:spAutoFit/>
+          </a:bodyPr>
+          <a:lstStyle/>
+          <a:p>
+            <a:pPr>
+              <a:spcAft>
+                <a:spcPts val="1600"/>
+              </a:spcAft>
+            </a:pPr>
+            <a:r>
+              <a:rPr sz="2200" b="1">
+                <a:solidFill>
+                  <a:srgbClr val="FFB000"/>
+                </a:solidFill>
+                <a:latin typeface="Calibri"/>
+              </a:rPr>
+              <a:t>Set Target Balance.</a:t>
+            </a:r>
+          </a:p>
+        </p:txBody>
+      </p:sp>
+    </p:spTree>
+  </p:cSld>
+  <p:clrMapOvr>
+    <a:masterClrMapping/>
+  </p:clrMapOvr>
+</p:sld>
+</file>
+
+<file path=ppt/slides/slide14.xml><?xml version="1.0" encoding="utf-8"?>
+<p:sld xmlns:a="http://schemas.openxmlformats.org/drawingml/2006/main" xmlns:p="http://schemas.openxmlformats.org/presentationml/2006/main" xmlns:r="http://schemas.openxmlformats.org/officeDocument/2006/relationships">
+  <p:cSld>
+    <p:bg>
+      <p:bgPr>
+        <a:solidFill>
+          <a:srgbClr val="121216"/>
+        </a:solidFill>
+        <a:effectLst/>
+      </p:bgPr>
+    </p:bg>
+    <p:spTree>
+      <p:nvGrpSpPr>
+        <p:cNvPr id="1" name=""/>
+        <p:cNvGrpSpPr/>
+        <p:nvPr/>
+      </p:nvGrpSpPr>
+      <p:grpSpPr/>
+      <p:sp>
+        <p:nvSpPr>
+          <p:cNvPr id="2" name="TextBox 1"/>
+          <p:cNvSpPr txBox="1"/>
+          <p:nvPr/>
+        </p:nvSpPr>
+        <p:spPr>
+          <a:xfrm>
+            <a:off x="548640" y="457200"/>
+            <a:ext cx="11094415" cy="914400"/>
+          </a:xfrm>
+          <a:prstGeom prst="rect">
+            <a:avLst/>
+          </a:prstGeom>
+          <a:noFill/>
+        </p:spPr>
+        <p:txBody>
+          <a:bodyPr wrap="square" lIns="0" rIns="0" tIns="0" bIns="0">
+            <a:spAutoFit/>
+          </a:bodyPr>
+          <a:lstStyle/>
+          <a:p>
+            <a:pPr>
+              <a:spcAft>
+                <a:spcPts val="1600"/>
+              </a:spcAft>
+            </a:pPr>
+            <a:r>
+              <a:rPr sz="3600" b="1">
+                <a:solidFill>
+                  <a:srgbClr val="FFFFFF"/>
+                </a:solidFill>
+                <a:latin typeface="Cambria"/>
+              </a:rPr>
+              <a:t>Step 14 — The price window</a:t>
+            </a:r>
+          </a:p>
+        </p:txBody>
+      </p:sp>
+      <p:pic>
+        <p:nvPicPr>
+          <p:cNvPr id="3" name="Picture 2" descr="step-14-the-price-window.png"/>
+          <p:cNvPicPr>
+            <a:picLocks noChangeAspect="1"/>
+          </p:cNvPicPr>
+          <p:nvPr/>
+        </p:nvPicPr>
+        <p:blipFill>
+          <a:blip r:embed="rId2"/>
+          <a:stretch>
+            <a:fillRect/>
+          </a:stretch>
+        </p:blipFill>
+        <p:spPr>
+          <a:xfrm>
+            <a:off x="2792596" y="1554480"/>
+            <a:ext cx="6606502" cy="3657600"/>
+          </a:xfrm>
+          <a:prstGeom prst="rect">
+            <a:avLst/>
+          </a:prstGeom>
+        </p:spPr>
+      </p:pic>
+      <p:sp>
+        <p:nvSpPr>
+          <p:cNvPr id="4" name="TextBox 3"/>
+          <p:cNvSpPr txBox="1"/>
+          <p:nvPr/>
+        </p:nvSpPr>
+        <p:spPr>
+          <a:xfrm>
+            <a:off x="548640" y="5440680"/>
+            <a:ext cx="11094415" cy="914400"/>
+          </a:xfrm>
+          <a:prstGeom prst="rect">
+            <a:avLst/>
+          </a:prstGeom>
+          <a:noFill/>
+        </p:spPr>
+        <p:txBody>
+          <a:bodyPr wrap="square" lIns="0" rIns="0" tIns="0" bIns="0">
+            <a:spAutoFit/>
+          </a:bodyPr>
+          <a:lstStyle/>
+          <a:p>
+            <a:pPr>
+              <a:spcAft>
+                <a:spcPts val="1600"/>
+              </a:spcAft>
+            </a:pPr>
+            <a:r>
+              <a:rPr sz="2200" b="1">
+                <a:solidFill>
+                  <a:srgbClr val="FFB000"/>
+                </a:solidFill>
+                <a:latin typeface="Calibri"/>
+              </a:rPr>
+              <a:t>Leave Max Entry Price and Min Entry Price at zero.</a:t>
+            </a:r>
+          </a:p>
+        </p:txBody>
+      </p:sp>
+    </p:spTree>
+  </p:cSld>
+  <p:clrMapOvr>
+    <a:masterClrMapping/>
+  </p:clrMapOvr>
+</p:sld>
+</file>
+
+<file path=ppt/slides/slide15.xml><?xml version="1.0" encoding="utf-8"?>
+<p:sld xmlns:a="http://schemas.openxmlformats.org/drawingml/2006/main" xmlns:p="http://schemas.openxmlformats.org/presentationml/2006/main" xmlns:r="http://schemas.openxmlformats.org/officeDocument/2006/relationships">
+  <p:cSld>
+    <p:bg>
+      <p:bgPr>
+        <a:solidFill>
+          <a:srgbClr val="121216"/>
+        </a:solidFill>
+        <a:effectLst/>
+      </p:bgPr>
+    </p:bg>
+    <p:spTree>
+      <p:nvGrpSpPr>
+        <p:cNvPr id="1" name=""/>
+        <p:cNvGrpSpPr/>
+        <p:nvPr/>
+      </p:nvGrpSpPr>
+      <p:grpSpPr/>
+      <p:sp>
+        <p:nvSpPr>
+          <p:cNvPr id="2" name="TextBox 1"/>
+          <p:cNvSpPr txBox="1"/>
+          <p:nvPr/>
+        </p:nvSpPr>
+        <p:spPr>
+          <a:xfrm>
+            <a:off x="548640" y="457200"/>
+            <a:ext cx="11094415" cy="914400"/>
+          </a:xfrm>
+          <a:prstGeom prst="rect">
+            <a:avLst/>
+          </a:prstGeom>
+          <a:noFill/>
+        </p:spPr>
+        <p:txBody>
+          <a:bodyPr wrap="square" lIns="0" rIns="0" tIns="0" bIns="0">
+            <a:spAutoFit/>
+          </a:bodyPr>
+          <a:lstStyle/>
+          <a:p>
+            <a:pPr>
+              <a:spcAft>
+                <a:spcPts val="1600"/>
+              </a:spcAft>
+            </a:pPr>
+            <a:r>
+              <a:rPr sz="3600" b="1">
+                <a:solidFill>
+                  <a:srgbClr val="FFFFFF"/>
+                </a:solidFill>
+                <a:latin typeface="Cambria"/>
+              </a:rPr>
+              <a:t>Step 15 — What a cycle keeps</a:t>
+            </a:r>
+          </a:p>
+        </p:txBody>
+      </p:sp>
+      <p:pic>
+        <p:nvPicPr>
+          <p:cNvPr id="3" name="Picture 2" descr="step-15-what-a-cycle-keeps.png"/>
+          <p:cNvPicPr>
+            <a:picLocks noChangeAspect="1"/>
+          </p:cNvPicPr>
+          <p:nvPr/>
+        </p:nvPicPr>
+        <p:blipFill>
+          <a:blip r:embed="rId2"/>
+          <a:stretch>
+            <a:fillRect/>
+          </a:stretch>
+        </p:blipFill>
+        <p:spPr>
+          <a:xfrm>
+            <a:off x="2792596" y="1554480"/>
+            <a:ext cx="6606502" cy="3657600"/>
+          </a:xfrm>
+          <a:prstGeom prst="rect">
+            <a:avLst/>
+          </a:prstGeom>
+        </p:spPr>
+      </p:pic>
+      <p:sp>
+        <p:nvSpPr>
+          <p:cNvPr id="4" name="TextBox 3"/>
+          <p:cNvSpPr txBox="1"/>
+          <p:nvPr/>
+        </p:nvSpPr>
+        <p:spPr>
+          <a:xfrm>
+            <a:off x="548640" y="5440680"/>
+            <a:ext cx="11094415" cy="914400"/>
+          </a:xfrm>
+          <a:prstGeom prst="rect">
+            <a:avLst/>
+          </a:prstGeom>
+          <a:noFill/>
+        </p:spPr>
+        <p:txBody>
+          <a:bodyPr wrap="square" lIns="0" rIns="0" tIns="0" bIns="0">
+            <a:spAutoFit/>
+          </a:bodyPr>
+          <a:lstStyle/>
+          <a:p>
+            <a:pPr>
+              <a:spcAft>
+                <a:spcPts val="1600"/>
+              </a:spcAft>
+            </a:pPr>
+            <a:r>
+              <a:rPr sz="2200" b="1">
+                <a:solidFill>
+                  <a:srgbClr val="FFB000"/>
+                </a:solidFill>
+                <a:latin typeface="Calibri"/>
+              </a:rPr>
+              <a:t>Leave the last three rows as they open.</a:t>
+            </a:r>
+          </a:p>
+        </p:txBody>
+      </p:sp>
+    </p:spTree>
+  </p:cSld>
+  <p:clrMapOvr>
+    <a:masterClrMapping/>
+  </p:clrMapOvr>
+</p:sld>
+</file>
+
+<file path=ppt/slides/slide16.xml><?xml version="1.0" encoding="utf-8"?>
+<p:sld xmlns:a="http://schemas.openxmlformats.org/drawingml/2006/main" xmlns:p="http://schemas.openxmlformats.org/presentationml/2006/main" xmlns:r="http://schemas.openxmlformats.org/officeDocument/2006/relationships">
+  <p:cSld>
+    <p:bg>
+      <p:bgPr>
+        <a:solidFill>
+          <a:srgbClr val="121216"/>
+        </a:solidFill>
+        <a:effectLst/>
+      </p:bgPr>
+    </p:bg>
+    <p:spTree>
+      <p:nvGrpSpPr>
+        <p:cNvPr id="1" name=""/>
+        <p:cNvGrpSpPr/>
+        <p:nvPr/>
+      </p:nvGrpSpPr>
+      <p:grpSpPr/>
+      <p:sp>
+        <p:nvSpPr>
+          <p:cNvPr id="2" name="TextBox 1"/>
+          <p:cNvSpPr txBox="1"/>
+          <p:nvPr/>
+        </p:nvSpPr>
+        <p:spPr>
+          <a:xfrm>
+            <a:off x="548640" y="457200"/>
+            <a:ext cx="11094415" cy="914400"/>
+          </a:xfrm>
+          <a:prstGeom prst="rect">
+            <a:avLst/>
+          </a:prstGeom>
+          <a:noFill/>
+        </p:spPr>
+        <p:txBody>
+          <a:bodyPr wrap="square" lIns="0" rIns="0" tIns="0" bIns="0">
+            <a:spAutoFit/>
+          </a:bodyPr>
+          <a:lstStyle/>
+          <a:p>
+            <a:pPr>
+              <a:spcAft>
+                <a:spcPts val="1600"/>
+              </a:spcAft>
+            </a:pPr>
+            <a:r>
+              <a:rPr sz="3600" b="1">
+                <a:solidFill>
+                  <a:srgbClr val="FFFFFF"/>
+                </a:solidFill>
+                <a:latin typeface="Cambria"/>
+              </a:rPr>
+              <a:t>Step 16 — The reserve for a dip</a:t>
+            </a:r>
+          </a:p>
+        </p:txBody>
+      </p:sp>
+      <p:pic>
+        <p:nvPicPr>
+          <p:cNvPr id="3" name="Picture 2" descr="step-16-the-reserve-for-a-dip.png"/>
+          <p:cNvPicPr>
+            <a:picLocks noChangeAspect="1"/>
+          </p:cNvPicPr>
+          <p:nvPr/>
+        </p:nvPicPr>
+        <p:blipFill>
+          <a:blip r:embed="rId2"/>
+          <a:stretch>
+            <a:fillRect/>
+          </a:stretch>
+        </p:blipFill>
+        <p:spPr>
+          <a:xfrm>
+            <a:off x="857097" y="2149792"/>
+            <a:ext cx="10477500" cy="2466975"/>
+          </a:xfrm>
+          <a:prstGeom prst="rect">
+            <a:avLst/>
+          </a:prstGeom>
+        </p:spPr>
+      </p:pic>
+      <p:sp>
+        <p:nvSpPr>
+          <p:cNvPr id="4" name="TextBox 3"/>
+          <p:cNvSpPr txBox="1"/>
+          <p:nvPr/>
+        </p:nvSpPr>
+        <p:spPr>
+          <a:xfrm>
+            <a:off x="548640" y="5440680"/>
+            <a:ext cx="11094415" cy="914400"/>
+          </a:xfrm>
+          <a:prstGeom prst="rect">
+            <a:avLst/>
+          </a:prstGeom>
+          <a:noFill/>
+        </p:spPr>
+        <p:txBody>
+          <a:bodyPr wrap="square" lIns="0" rIns="0" tIns="0" bIns="0">
+            <a:spAutoFit/>
+          </a:bodyPr>
+          <a:lstStyle/>
+          <a:p>
+            <a:pPr>
+              <a:spcAft>
+                <a:spcPts val="1600"/>
+              </a:spcAft>
+            </a:pPr>
+            <a:r>
+              <a:rPr sz="2200" b="1">
+                <a:solidFill>
+                  <a:srgbClr val="FFB000"/>
+                </a:solidFill>
+                <a:latin typeface="Calibri"/>
+              </a:rPr>
+              <a:t>Leave Hedge Rebalance Active ticked, then press Next.</a:t>
+            </a:r>
+          </a:p>
+        </p:txBody>
+      </p:sp>
+    </p:spTree>
+  </p:cSld>
+  <p:clrMapOvr>
+    <a:masterClrMapping/>
+  </p:clrMapOvr>
+</p:sld>
+</file>
+
+<file path=ppt/slides/slide17.xml><?xml version="1.0" encoding="utf-8"?>
+<p:sld xmlns:a="http://schemas.openxmlformats.org/drawingml/2006/main" xmlns:p="http://schemas.openxmlformats.org/presentationml/2006/main" xmlns:r="http://schemas.openxmlformats.org/officeDocument/2006/relationships">
+  <p:cSld>
+    <p:bg>
+      <p:bgPr>
+        <a:solidFill>
+          <a:srgbClr val="121216"/>
+        </a:solidFill>
+        <a:effectLst/>
+      </p:bgPr>
+    </p:bg>
+    <p:spTree>
+      <p:nvGrpSpPr>
+        <p:cNvPr id="1" name=""/>
+        <p:cNvGrpSpPr/>
+        <p:nvPr/>
+      </p:nvGrpSpPr>
+      <p:grpSpPr/>
+      <p:sp>
+        <p:nvSpPr>
+          <p:cNvPr id="2" name="TextBox 1"/>
+          <p:cNvSpPr txBox="1"/>
+          <p:nvPr/>
+        </p:nvSpPr>
+        <p:spPr>
+          <a:xfrm>
+            <a:off x="548640" y="457200"/>
+            <a:ext cx="11094415" cy="914400"/>
+          </a:xfrm>
+          <a:prstGeom prst="rect">
+            <a:avLst/>
+          </a:prstGeom>
+          <a:noFill/>
+        </p:spPr>
+        <p:txBody>
+          <a:bodyPr wrap="square" lIns="0" rIns="0" tIns="0" bIns="0">
+            <a:spAutoFit/>
+          </a:bodyPr>
+          <a:lstStyle/>
+          <a:p>
+            <a:pPr>
+              <a:spcAft>
+                <a:spcPts val="1600"/>
+              </a:spcAft>
+            </a:pPr>
+            <a:r>
+              <a:rPr sz="3600" b="1">
+                <a:solidFill>
+                  <a:srgbClr val="FFFFFF"/>
+                </a:solidFill>
+                <a:latin typeface="Cambria"/>
+              </a:rPr>
+              <a:t>Step 17 — Leave the shadow bot off</a:t>
+            </a:r>
+          </a:p>
+        </p:txBody>
+      </p:sp>
+      <p:pic>
+        <p:nvPicPr>
+          <p:cNvPr id="3" name="Picture 2" descr="step-17-leave-the-shadow-bot-off.png"/>
+          <p:cNvPicPr>
+            <a:picLocks noChangeAspect="1"/>
+          </p:cNvPicPr>
+          <p:nvPr/>
+        </p:nvPicPr>
+        <p:blipFill>
+          <a:blip r:embed="rId2"/>
+          <a:stretch>
+            <a:fillRect/>
+          </a:stretch>
+        </p:blipFill>
+        <p:spPr>
+          <a:xfrm>
+            <a:off x="857097" y="2154555"/>
+            <a:ext cx="10477500" cy="2457450"/>
+          </a:xfrm>
+          <a:prstGeom prst="rect">
+            <a:avLst/>
+          </a:prstGeom>
+        </p:spPr>
+      </p:pic>
+      <p:sp>
+        <p:nvSpPr>
+          <p:cNvPr id="4" name="TextBox 3"/>
+          <p:cNvSpPr txBox="1"/>
+          <p:nvPr/>
+        </p:nvSpPr>
+        <p:spPr>
+          <a:xfrm>
+            <a:off x="548640" y="5440680"/>
+            <a:ext cx="11094415" cy="914400"/>
+          </a:xfrm>
+          <a:prstGeom prst="rect">
+            <a:avLst/>
+          </a:prstGeom>
+          <a:noFill/>
+        </p:spPr>
+        <p:txBody>
+          <a:bodyPr wrap="square" lIns="0" rIns="0" tIns="0" bIns="0">
+            <a:spAutoFit/>
+          </a:bodyPr>
+          <a:lstStyle/>
+          <a:p>
+            <a:pPr>
+              <a:spcAft>
+                <a:spcPts val="1600"/>
+              </a:spcAft>
+            </a:pPr>
+            <a:r>
+              <a:rPr sz="2200" b="1">
+                <a:solidFill>
+                  <a:srgbClr val="FFB000"/>
+                </a:solidFill>
+                <a:latin typeface="Calibri"/>
+              </a:rPr>
+              <a:t>Leave Enable Phantom Bots clear.</a:t>
+            </a:r>
+          </a:p>
+        </p:txBody>
+      </p:sp>
+    </p:spTree>
+  </p:cSld>
+  <p:clrMapOvr>
+    <a:masterClrMapping/>
+  </p:clrMapOvr>
+</p:sld>
+</file>
+
+<file path=ppt/slides/slide18.xml><?xml version="1.0" encoding="utf-8"?>
+<p:sld xmlns:a="http://schemas.openxmlformats.org/drawingml/2006/main" xmlns:p="http://schemas.openxmlformats.org/presentationml/2006/main" xmlns:r="http://schemas.openxmlformats.org/officeDocument/2006/relationships">
+  <p:cSld>
+    <p:bg>
+      <p:bgPr>
+        <a:solidFill>
+          <a:srgbClr val="121216"/>
+        </a:solidFill>
+        <a:effectLst/>
+      </p:bgPr>
+    </p:bg>
+    <p:spTree>
+      <p:nvGrpSpPr>
+        <p:cNvPr id="1" name=""/>
+        <p:cNvGrpSpPr/>
+        <p:nvPr/>
+      </p:nvGrpSpPr>
+      <p:grpSpPr/>
+      <p:sp>
+        <p:nvSpPr>
+          <p:cNvPr id="2" name="TextBox 1"/>
+          <p:cNvSpPr txBox="1"/>
+          <p:nvPr/>
+        </p:nvSpPr>
+        <p:spPr>
+          <a:xfrm>
+            <a:off x="548640" y="457200"/>
+            <a:ext cx="11094415" cy="914400"/>
+          </a:xfrm>
+          <a:prstGeom prst="rect">
+            <a:avLst/>
+          </a:prstGeom>
+          <a:noFill/>
+        </p:spPr>
+        <p:txBody>
+          <a:bodyPr wrap="square" lIns="0" rIns="0" tIns="0" bIns="0">
+            <a:spAutoFit/>
+          </a:bodyPr>
+          <a:lstStyle/>
+          <a:p>
+            <a:pPr>
+              <a:spcAft>
+                <a:spcPts val="1600"/>
+              </a:spcAft>
+            </a:pPr>
+            <a:r>
+              <a:rPr sz="3600" b="1">
+                <a:solidFill>
+                  <a:srgbClr val="FFFFFF"/>
+                </a:solidFill>
+                <a:latin typeface="Cambria"/>
+              </a:rPr>
+              <a:t>Step 18 — How long a lock holds</a:t>
+            </a:r>
+          </a:p>
+        </p:txBody>
+      </p:sp>
+      <p:pic>
+        <p:nvPicPr>
+          <p:cNvPr id="3" name="Picture 2" descr="step-18-how-long-a-lock-holds.png"/>
+          <p:cNvPicPr>
+            <a:picLocks noChangeAspect="1"/>
+          </p:cNvPicPr>
+          <p:nvPr/>
+        </p:nvPicPr>
+        <p:blipFill>
+          <a:blip r:embed="rId2"/>
+          <a:stretch>
+            <a:fillRect/>
+          </a:stretch>
+        </p:blipFill>
+        <p:spPr>
+          <a:xfrm>
+            <a:off x="857097" y="2068830"/>
+            <a:ext cx="10477500" cy="2628900"/>
+          </a:xfrm>
+          <a:prstGeom prst="rect">
+            <a:avLst/>
+          </a:prstGeom>
+        </p:spPr>
+      </p:pic>
+      <p:sp>
+        <p:nvSpPr>
+          <p:cNvPr id="4" name="TextBox 3"/>
+          <p:cNvSpPr txBox="1"/>
+          <p:nvPr/>
+        </p:nvSpPr>
+        <p:spPr>
+          <a:xfrm>
+            <a:off x="548640" y="5440680"/>
+            <a:ext cx="11094415" cy="914400"/>
+          </a:xfrm>
+          <a:prstGeom prst="rect">
+            <a:avLst/>
+          </a:prstGeom>
+          <a:noFill/>
+        </p:spPr>
+        <p:txBody>
+          <a:bodyPr wrap="square" lIns="0" rIns="0" tIns="0" bIns="0">
+            <a:spAutoFit/>
+          </a:bodyPr>
+          <a:lstStyle/>
+          <a:p>
+            <a:pPr>
+              <a:spcAft>
+                <a:spcPts val="1600"/>
+              </a:spcAft>
+            </a:pPr>
+            <a:r>
+              <a:rPr sz="2200" b="1">
+                <a:solidFill>
+                  <a:srgbClr val="FFB000"/>
+                </a:solidFill>
+                <a:latin typeface="Calibri"/>
+              </a:rPr>
+              <a:t>Leave Candles to lock at 2.</a:t>
+            </a:r>
+          </a:p>
+        </p:txBody>
+      </p:sp>
+    </p:spTree>
+  </p:cSld>
+  <p:clrMapOvr>
+    <a:masterClrMapping/>
+  </p:clrMapOvr>
+</p:sld>
+</file>
+
+<file path=ppt/slides/slide19.xml><?xml version="1.0" encoding="utf-8"?>
+<p:sld xmlns:a="http://schemas.openxmlformats.org/drawingml/2006/main" xmlns:p="http://schemas.openxmlformats.org/presentationml/2006/main" xmlns:r="http://schemas.openxmlformats.org/officeDocument/2006/relationships">
+  <p:cSld>
+    <p:bg>
+      <p:bgPr>
+        <a:solidFill>
+          <a:srgbClr val="121216"/>
+        </a:solidFill>
+        <a:effectLst/>
+      </p:bgPr>
+    </p:bg>
+    <p:spTree>
+      <p:nvGrpSpPr>
+        <p:cNvPr id="1" name=""/>
+        <p:cNvGrpSpPr/>
+        <p:nvPr/>
+      </p:nvGrpSpPr>
+      <p:grpSpPr/>
+      <p:sp>
+        <p:nvSpPr>
+          <p:cNvPr id="2" name="TextBox 1"/>
+          <p:cNvSpPr txBox="1"/>
+          <p:nvPr/>
+        </p:nvSpPr>
+        <p:spPr>
+          <a:xfrm>
+            <a:off x="548640" y="457200"/>
+            <a:ext cx="11094415" cy="914400"/>
+          </a:xfrm>
+          <a:prstGeom prst="rect">
+            <a:avLst/>
+          </a:prstGeom>
+          <a:noFill/>
+        </p:spPr>
+        <p:txBody>
+          <a:bodyPr wrap="square" lIns="0" rIns="0" tIns="0" bIns="0">
+            <a:spAutoFit/>
+          </a:bodyPr>
+          <a:lstStyle/>
+          <a:p>
+            <a:pPr>
+              <a:spcAft>
+                <a:spcPts val="1600"/>
+              </a:spcAft>
+            </a:pPr>
+            <a:r>
+              <a:rPr sz="3600" b="1">
+                <a:solidFill>
+                  <a:srgbClr val="FFFFFF"/>
+                </a:solidFill>
+                <a:latin typeface="Cambria"/>
+              </a:rPr>
+              <a:t>Step 19 — Create the bot</a:t>
+            </a:r>
+          </a:p>
+        </p:txBody>
+      </p:sp>
+      <p:pic>
+        <p:nvPicPr>
+          <p:cNvPr id="3" name="Picture 2" descr="step-19-create-the-bot.png"/>
+          <p:cNvPicPr>
+            <a:picLocks noChangeAspect="1"/>
+          </p:cNvPicPr>
+          <p:nvPr/>
+        </p:nvPicPr>
+        <p:blipFill>
+          <a:blip r:embed="rId2"/>
+          <a:stretch>
+            <a:fillRect/>
+          </a:stretch>
+        </p:blipFill>
+        <p:spPr>
+          <a:xfrm>
+            <a:off x="857097" y="2611755"/>
+            <a:ext cx="10477500" cy="1543050"/>
+          </a:xfrm>
+          <a:prstGeom prst="rect">
+            <a:avLst/>
+          </a:prstGeom>
+        </p:spPr>
+      </p:pic>
+      <p:sp>
+        <p:nvSpPr>
+          <p:cNvPr id="4" name="TextBox 3"/>
+          <p:cNvSpPr txBox="1"/>
+          <p:nvPr/>
+        </p:nvSpPr>
+        <p:spPr>
+          <a:xfrm>
+            <a:off x="548640" y="5440680"/>
+            <a:ext cx="11094415" cy="914400"/>
+          </a:xfrm>
+          <a:prstGeom prst="rect">
+            <a:avLst/>
+          </a:prstGeom>
+          <a:noFill/>
+        </p:spPr>
+        <p:txBody>
+          <a:bodyPr wrap="square" lIns="0" rIns="0" tIns="0" bIns="0">
+            <a:spAutoFit/>
+          </a:bodyPr>
+          <a:lstStyle/>
+          <a:p>
+            <a:pPr>
+              <a:spcAft>
+                <a:spcPts val="1600"/>
+              </a:spcAft>
+            </a:pPr>
+            <a:r>
+              <a:rPr sz="2200" b="1">
+                <a:solidFill>
+                  <a:srgbClr val="FFB000"/>
+                </a:solidFill>
+                <a:latin typeface="Calibri"/>
+              </a:rPr>
+              <a:t>Press Finish.</a:t>
             </a:r>
           </a:p>
         </p:txBody>
@@ -3264,14 +4564,14 @@
                 </a:solidFill>
                 <a:latin typeface="Cambria"/>
               </a:rPr>
-              <a:t>Step 2 — Live has no venue</a:t>
+              <a:t>Step 2 — Take the newest release</a:t>
             </a:r>
           </a:p>
         </p:txBody>
       </p:sp>
       <p:pic>
         <p:nvPicPr>
-          <p:cNvPr id="3" name="Picture 2" descr="step-2-live-has-no-venue.png"/>
+          <p:cNvPr id="3" name="Picture 2" descr="step-2-take-the-newest-release.png"/>
           <p:cNvPicPr>
             <a:picLocks noChangeAspect="1"/>
           </p:cNvPicPr>
@@ -3285,8 +4585,8 @@
         </p:blipFill>
         <p:spPr>
           <a:xfrm>
-            <a:off x="2519210" y="2087880"/>
-            <a:ext cx="7153275" cy="2590800"/>
+            <a:off x="3305022" y="1621155"/>
+            <a:ext cx="5581650" cy="3524250"/>
           </a:xfrm>
           <a:prstGeom prst="rect">
             <a:avLst/>
@@ -3327,7 +4627,1031 @@
                 </a:solidFill>
                 <a:latin typeface="Calibri"/>
               </a:rPr>
-              <a:t>No venue is stored. Press Add Crypto Exchange.</a:t>
+              <a:t>Open the release marked Latest.</a:t>
+            </a:r>
+          </a:p>
+        </p:txBody>
+      </p:sp>
+    </p:spTree>
+  </p:cSld>
+  <p:clrMapOvr>
+    <a:masterClrMapping/>
+  </p:clrMapOvr>
+</p:sld>
+</file>
+
+<file path=ppt/slides/slide20.xml><?xml version="1.0" encoding="utf-8"?>
+<p:sld xmlns:a="http://schemas.openxmlformats.org/drawingml/2006/main" xmlns:p="http://schemas.openxmlformats.org/presentationml/2006/main" xmlns:r="http://schemas.openxmlformats.org/officeDocument/2006/relationships">
+  <p:cSld>
+    <p:bg>
+      <p:bgPr>
+        <a:solidFill>
+          <a:srgbClr val="121216"/>
+        </a:solidFill>
+        <a:effectLst/>
+      </p:bgPr>
+    </p:bg>
+    <p:spTree>
+      <p:nvGrpSpPr>
+        <p:cNvPr id="1" name=""/>
+        <p:cNvGrpSpPr/>
+        <p:nvPr/>
+      </p:nvGrpSpPr>
+      <p:grpSpPr/>
+      <p:sp>
+        <p:nvSpPr>
+          <p:cNvPr id="2" name="TextBox 1"/>
+          <p:cNvSpPr txBox="1"/>
+          <p:nvPr/>
+        </p:nvSpPr>
+        <p:spPr>
+          <a:xfrm>
+            <a:off x="548640" y="457200"/>
+            <a:ext cx="11094415" cy="914400"/>
+          </a:xfrm>
+          <a:prstGeom prst="rect">
+            <a:avLst/>
+          </a:prstGeom>
+          <a:noFill/>
+        </p:spPr>
+        <p:txBody>
+          <a:bodyPr wrap="square" lIns="0" rIns="0" tIns="0" bIns="0">
+            <a:spAutoFit/>
+          </a:bodyPr>
+          <a:lstStyle/>
+          <a:p>
+            <a:pPr>
+              <a:spcAft>
+                <a:spcPts val="1600"/>
+              </a:spcAft>
+            </a:pPr>
+            <a:r>
+              <a:rPr sz="3600" b="1">
+                <a:solidFill>
+                  <a:srgbClr val="FFFFFF"/>
+                </a:solidFill>
+                <a:latin typeface="Cambria"/>
+              </a:rPr>
+              <a:t>Step 20 — Make the fleet</a:t>
+            </a:r>
+          </a:p>
+        </p:txBody>
+      </p:sp>
+      <p:pic>
+        <p:nvPicPr>
+          <p:cNvPr id="3" name="Picture 2" descr="step-20-make-the-fleet.png"/>
+          <p:cNvPicPr>
+            <a:picLocks noChangeAspect="1"/>
+          </p:cNvPicPr>
+          <p:nvPr/>
+        </p:nvPicPr>
+        <p:blipFill>
+          <a:blip r:embed="rId2"/>
+          <a:stretch>
+            <a:fillRect/>
+          </a:stretch>
+        </p:blipFill>
+        <p:spPr>
+          <a:xfrm>
+            <a:off x="1145229" y="1554480"/>
+            <a:ext cx="9901237" cy="3657600"/>
+          </a:xfrm>
+          <a:prstGeom prst="rect">
+            <a:avLst/>
+          </a:prstGeom>
+        </p:spPr>
+      </p:pic>
+      <p:sp>
+        <p:nvSpPr>
+          <p:cNvPr id="4" name="TextBox 3"/>
+          <p:cNvSpPr txBox="1"/>
+          <p:nvPr/>
+        </p:nvSpPr>
+        <p:spPr>
+          <a:xfrm>
+            <a:off x="548640" y="5440680"/>
+            <a:ext cx="11094415" cy="914400"/>
+          </a:xfrm>
+          <a:prstGeom prst="rect">
+            <a:avLst/>
+          </a:prstGeom>
+          <a:noFill/>
+        </p:spPr>
+        <p:txBody>
+          <a:bodyPr wrap="square" lIns="0" rIns="0" tIns="0" bIns="0">
+            <a:spAutoFit/>
+          </a:bodyPr>
+          <a:lstStyle/>
+          <a:p>
+            <a:pPr>
+              <a:spcAft>
+                <a:spcPts val="1600"/>
+              </a:spcAft>
+            </a:pPr>
+            <a:r>
+              <a:rPr sz="2200" b="1">
+                <a:solidFill>
+                  <a:srgbClr val="FFB000"/>
+                </a:solidFill>
+                <a:latin typeface="Calibri"/>
+              </a:rPr>
+              <a:t>Open Inspector and scan. Press Preview on a topology proposal, then Adopt.</a:t>
+            </a:r>
+          </a:p>
+        </p:txBody>
+      </p:sp>
+    </p:spTree>
+  </p:cSld>
+  <p:clrMapOvr>
+    <a:masterClrMapping/>
+  </p:clrMapOvr>
+</p:sld>
+</file>
+
+<file path=ppt/slides/slide21.xml><?xml version="1.0" encoding="utf-8"?>
+<p:sld xmlns:a="http://schemas.openxmlformats.org/drawingml/2006/main" xmlns:p="http://schemas.openxmlformats.org/presentationml/2006/main" xmlns:r="http://schemas.openxmlformats.org/officeDocument/2006/relationships">
+  <p:cSld>
+    <p:bg>
+      <p:bgPr>
+        <a:solidFill>
+          <a:srgbClr val="121216"/>
+        </a:solidFill>
+        <a:effectLst/>
+      </p:bgPr>
+    </p:bg>
+    <p:spTree>
+      <p:nvGrpSpPr>
+        <p:cNvPr id="1" name=""/>
+        <p:cNvGrpSpPr/>
+        <p:nvPr/>
+      </p:nvGrpSpPr>
+      <p:grpSpPr/>
+      <p:sp>
+        <p:nvSpPr>
+          <p:cNvPr id="2" name="TextBox 1"/>
+          <p:cNvSpPr txBox="1"/>
+          <p:nvPr/>
+        </p:nvSpPr>
+        <p:spPr>
+          <a:xfrm>
+            <a:off x="548640" y="457200"/>
+            <a:ext cx="11094415" cy="914400"/>
+          </a:xfrm>
+          <a:prstGeom prst="rect">
+            <a:avLst/>
+          </a:prstGeom>
+          <a:noFill/>
+        </p:spPr>
+        <p:txBody>
+          <a:bodyPr wrap="square" lIns="0" rIns="0" tIns="0" bIns="0">
+            <a:spAutoFit/>
+          </a:bodyPr>
+          <a:lstStyle/>
+          <a:p>
+            <a:pPr>
+              <a:spcAft>
+                <a:spcPts val="1600"/>
+              </a:spcAft>
+            </a:pPr>
+            <a:r>
+              <a:rPr sz="3600" b="1">
+                <a:solidFill>
+                  <a:srgbClr val="FFFFFF"/>
+                </a:solidFill>
+                <a:latin typeface="Cambria"/>
+              </a:rPr>
+              <a:t>Step 21 — Start the fleet</a:t>
+            </a:r>
+          </a:p>
+        </p:txBody>
+      </p:sp>
+      <p:pic>
+        <p:nvPicPr>
+          <p:cNvPr id="3" name="Picture 2" descr="step-21-start-the-fleet.png"/>
+          <p:cNvPicPr>
+            <a:picLocks noChangeAspect="1"/>
+          </p:cNvPicPr>
+          <p:nvPr/>
+        </p:nvPicPr>
+        <p:blipFill>
+          <a:blip r:embed="rId2"/>
+          <a:stretch>
+            <a:fillRect/>
+          </a:stretch>
+        </p:blipFill>
+        <p:spPr>
+          <a:xfrm>
+            <a:off x="548640" y="2733464"/>
+            <a:ext cx="11094415" cy="1299631"/>
+          </a:xfrm>
+          <a:prstGeom prst="rect">
+            <a:avLst/>
+          </a:prstGeom>
+        </p:spPr>
+      </p:pic>
+      <p:sp>
+        <p:nvSpPr>
+          <p:cNvPr id="4" name="TextBox 3"/>
+          <p:cNvSpPr txBox="1"/>
+          <p:nvPr/>
+        </p:nvSpPr>
+        <p:spPr>
+          <a:xfrm>
+            <a:off x="548640" y="5440680"/>
+            <a:ext cx="11094415" cy="914400"/>
+          </a:xfrm>
+          <a:prstGeom prst="rect">
+            <a:avLst/>
+          </a:prstGeom>
+          <a:noFill/>
+        </p:spPr>
+        <p:txBody>
+          <a:bodyPr wrap="square" lIns="0" rIns="0" tIns="0" bIns="0">
+            <a:spAutoFit/>
+          </a:bodyPr>
+          <a:lstStyle/>
+          <a:p>
+            <a:pPr>
+              <a:spcAft>
+                <a:spcPts val="1600"/>
+              </a:spcAft>
+            </a:pPr>
+            <a:r>
+              <a:rPr sz="2200" b="1">
+                <a:solidFill>
+                  <a:srgbClr val="FFB000"/>
+                </a:solidFill>
+                <a:latin typeface="Calibri"/>
+              </a:rPr>
+              <a:t>Start each bot from the bot list under Live.</a:t>
+            </a:r>
+          </a:p>
+        </p:txBody>
+      </p:sp>
+    </p:spTree>
+  </p:cSld>
+  <p:clrMapOvr>
+    <a:masterClrMapping/>
+  </p:clrMapOvr>
+</p:sld>
+</file>
+
+<file path=ppt/slides/slide22.xml><?xml version="1.0" encoding="utf-8"?>
+<p:sld xmlns:a="http://schemas.openxmlformats.org/drawingml/2006/main" xmlns:p="http://schemas.openxmlformats.org/presentationml/2006/main" xmlns:r="http://schemas.openxmlformats.org/officeDocument/2006/relationships">
+  <p:cSld>
+    <p:bg>
+      <p:bgPr>
+        <a:solidFill>
+          <a:srgbClr val="121216"/>
+        </a:solidFill>
+        <a:effectLst/>
+      </p:bgPr>
+    </p:bg>
+    <p:spTree>
+      <p:nvGrpSpPr>
+        <p:cNvPr id="1" name=""/>
+        <p:cNvGrpSpPr/>
+        <p:nvPr/>
+      </p:nvGrpSpPr>
+      <p:grpSpPr/>
+      <p:sp>
+        <p:nvSpPr>
+          <p:cNvPr id="2" name="TextBox 1"/>
+          <p:cNvSpPr txBox="1"/>
+          <p:nvPr/>
+        </p:nvSpPr>
+        <p:spPr>
+          <a:xfrm>
+            <a:off x="548640" y="457200"/>
+            <a:ext cx="11094415" cy="914400"/>
+          </a:xfrm>
+          <a:prstGeom prst="rect">
+            <a:avLst/>
+          </a:prstGeom>
+          <a:noFill/>
+        </p:spPr>
+        <p:txBody>
+          <a:bodyPr wrap="square" lIns="0" rIns="0" tIns="0" bIns="0">
+            <a:spAutoFit/>
+          </a:bodyPr>
+          <a:lstStyle/>
+          <a:p>
+            <a:pPr>
+              <a:spcAft>
+                <a:spcPts val="1600"/>
+              </a:spcAft>
+            </a:pPr>
+            <a:r>
+              <a:rPr sz="3600" b="1">
+                <a:solidFill>
+                  <a:srgbClr val="FFFFFF"/>
+                </a:solidFill>
+                <a:latin typeface="Cambria"/>
+              </a:rPr>
+              <a:t>Step 22 — The Simulator</a:t>
+            </a:r>
+          </a:p>
+        </p:txBody>
+      </p:sp>
+      <p:pic>
+        <p:nvPicPr>
+          <p:cNvPr id="3" name="Picture 2" descr="step-22-the-simulator.png"/>
+          <p:cNvPicPr>
+            <a:picLocks noChangeAspect="1"/>
+          </p:cNvPicPr>
+          <p:nvPr/>
+        </p:nvPicPr>
+        <p:blipFill>
+          <a:blip r:embed="rId2"/>
+          <a:stretch>
+            <a:fillRect/>
+          </a:stretch>
+        </p:blipFill>
+        <p:spPr>
+          <a:xfrm>
+            <a:off x="548640" y="2467991"/>
+            <a:ext cx="11094415" cy="1830578"/>
+          </a:xfrm>
+          <a:prstGeom prst="rect">
+            <a:avLst/>
+          </a:prstGeom>
+        </p:spPr>
+      </p:pic>
+      <p:sp>
+        <p:nvSpPr>
+          <p:cNvPr id="4" name="TextBox 3"/>
+          <p:cNvSpPr txBox="1"/>
+          <p:nvPr/>
+        </p:nvSpPr>
+        <p:spPr>
+          <a:xfrm>
+            <a:off x="548640" y="5440680"/>
+            <a:ext cx="11094415" cy="914400"/>
+          </a:xfrm>
+          <a:prstGeom prst="rect">
+            <a:avLst/>
+          </a:prstGeom>
+          <a:noFill/>
+        </p:spPr>
+        <p:txBody>
+          <a:bodyPr wrap="square" lIns="0" rIns="0" tIns="0" bIns="0">
+            <a:spAutoFit/>
+          </a:bodyPr>
+          <a:lstStyle/>
+          <a:p>
+            <a:pPr>
+              <a:spcAft>
+                <a:spcPts val="1600"/>
+              </a:spcAft>
+            </a:pPr>
+            <a:r>
+              <a:rPr sz="2200" b="1">
+                <a:solidFill>
+                  <a:srgbClr val="FFB000"/>
+                </a:solidFill>
+                <a:latin typeface="Calibri"/>
+              </a:rPr>
+              <a:t>Press Sim.</a:t>
+            </a:r>
+          </a:p>
+        </p:txBody>
+      </p:sp>
+    </p:spTree>
+  </p:cSld>
+  <p:clrMapOvr>
+    <a:masterClrMapping/>
+  </p:clrMapOvr>
+</p:sld>
+</file>
+
+<file path=ppt/slides/slide23.xml><?xml version="1.0" encoding="utf-8"?>
+<p:sld xmlns:a="http://schemas.openxmlformats.org/drawingml/2006/main" xmlns:p="http://schemas.openxmlformats.org/presentationml/2006/main" xmlns:r="http://schemas.openxmlformats.org/officeDocument/2006/relationships">
+  <p:cSld>
+    <p:bg>
+      <p:bgPr>
+        <a:solidFill>
+          <a:srgbClr val="121216"/>
+        </a:solidFill>
+        <a:effectLst/>
+      </p:bgPr>
+    </p:bg>
+    <p:spTree>
+      <p:nvGrpSpPr>
+        <p:cNvPr id="1" name=""/>
+        <p:cNvGrpSpPr/>
+        <p:nvPr/>
+      </p:nvGrpSpPr>
+      <p:grpSpPr/>
+      <p:sp>
+        <p:nvSpPr>
+          <p:cNvPr id="2" name="TextBox 1"/>
+          <p:cNvSpPr txBox="1"/>
+          <p:nvPr/>
+        </p:nvSpPr>
+        <p:spPr>
+          <a:xfrm>
+            <a:off x="548640" y="457200"/>
+            <a:ext cx="11094415" cy="914400"/>
+          </a:xfrm>
+          <a:prstGeom prst="rect">
+            <a:avLst/>
+          </a:prstGeom>
+          <a:noFill/>
+        </p:spPr>
+        <p:txBody>
+          <a:bodyPr wrap="square" lIns="0" rIns="0" tIns="0" bIns="0">
+            <a:spAutoFit/>
+          </a:bodyPr>
+          <a:lstStyle/>
+          <a:p>
+            <a:pPr>
+              <a:spcAft>
+                <a:spcPts val="1600"/>
+              </a:spcAft>
+            </a:pPr>
+            <a:r>
+              <a:rPr sz="3600" b="1">
+                <a:solidFill>
+                  <a:srgbClr val="FFFFFF"/>
+                </a:solidFill>
+                <a:latin typeface="Cambria"/>
+              </a:rPr>
+              <a:t>Step 23 — Paper first</a:t>
+            </a:r>
+          </a:p>
+        </p:txBody>
+      </p:sp>
+      <p:pic>
+        <p:nvPicPr>
+          <p:cNvPr id="3" name="Picture 2" descr="step-23-paper-first.png"/>
+          <p:cNvPicPr>
+            <a:picLocks noChangeAspect="1"/>
+          </p:cNvPicPr>
+          <p:nvPr/>
+        </p:nvPicPr>
+        <p:blipFill>
+          <a:blip r:embed="rId2"/>
+          <a:stretch>
+            <a:fillRect/>
+          </a:stretch>
+        </p:blipFill>
+        <p:spPr>
+          <a:xfrm>
+            <a:off x="2519210" y="1616392"/>
+            <a:ext cx="7153275" cy="3533775"/>
+          </a:xfrm>
+          <a:prstGeom prst="rect">
+            <a:avLst/>
+          </a:prstGeom>
+        </p:spPr>
+      </p:pic>
+      <p:sp>
+        <p:nvSpPr>
+          <p:cNvPr id="4" name="TextBox 3"/>
+          <p:cNvSpPr txBox="1"/>
+          <p:nvPr/>
+        </p:nvSpPr>
+        <p:spPr>
+          <a:xfrm>
+            <a:off x="548640" y="5440680"/>
+            <a:ext cx="11094415" cy="914400"/>
+          </a:xfrm>
+          <a:prstGeom prst="rect">
+            <a:avLst/>
+          </a:prstGeom>
+          <a:noFill/>
+        </p:spPr>
+        <p:txBody>
+          <a:bodyPr wrap="square" lIns="0" rIns="0" tIns="0" bIns="0">
+            <a:spAutoFit/>
+          </a:bodyPr>
+          <a:lstStyle/>
+          <a:p>
+            <a:pPr>
+              <a:spcAft>
+                <a:spcPts val="1600"/>
+              </a:spcAft>
+            </a:pPr>
+            <a:r>
+              <a:rPr sz="2200" b="1">
+                <a:solidFill>
+                  <a:srgbClr val="FFB000"/>
+                </a:solidFill>
+                <a:latin typeface="Calibri"/>
+              </a:rPr>
+              <a:t>Press Import Live Fleet.</a:t>
+            </a:r>
+          </a:p>
+        </p:txBody>
+      </p:sp>
+    </p:spTree>
+  </p:cSld>
+  <p:clrMapOvr>
+    <a:masterClrMapping/>
+  </p:clrMapOvr>
+</p:sld>
+</file>
+
+<file path=ppt/slides/slide24.xml><?xml version="1.0" encoding="utf-8"?>
+<p:sld xmlns:a="http://schemas.openxmlformats.org/drawingml/2006/main" xmlns:p="http://schemas.openxmlformats.org/presentationml/2006/main" xmlns:r="http://schemas.openxmlformats.org/officeDocument/2006/relationships">
+  <p:cSld>
+    <p:bg>
+      <p:bgPr>
+        <a:solidFill>
+          <a:srgbClr val="121216"/>
+        </a:solidFill>
+        <a:effectLst/>
+      </p:bgPr>
+    </p:bg>
+    <p:spTree>
+      <p:nvGrpSpPr>
+        <p:cNvPr id="1" name=""/>
+        <p:cNvGrpSpPr/>
+        <p:nvPr/>
+      </p:nvGrpSpPr>
+      <p:grpSpPr/>
+      <p:sp>
+        <p:nvSpPr>
+          <p:cNvPr id="2" name="TextBox 1"/>
+          <p:cNvSpPr txBox="1"/>
+          <p:nvPr/>
+        </p:nvSpPr>
+        <p:spPr>
+          <a:xfrm>
+            <a:off x="548640" y="457200"/>
+            <a:ext cx="11094415" cy="914400"/>
+          </a:xfrm>
+          <a:prstGeom prst="rect">
+            <a:avLst/>
+          </a:prstGeom>
+          <a:noFill/>
+        </p:spPr>
+        <p:txBody>
+          <a:bodyPr wrap="square" lIns="0" rIns="0" tIns="0" bIns="0">
+            <a:spAutoFit/>
+          </a:bodyPr>
+          <a:lstStyle/>
+          <a:p>
+            <a:pPr>
+              <a:spcAft>
+                <a:spcPts val="1600"/>
+              </a:spcAft>
+            </a:pPr>
+            <a:r>
+              <a:rPr sz="3600" b="1">
+                <a:solidFill>
+                  <a:srgbClr val="FFFFFF"/>
+                </a:solidFill>
+                <a:latin typeface="Cambria"/>
+              </a:rPr>
+              <a:t>Step 24 — The chart</a:t>
+            </a:r>
+          </a:p>
+        </p:txBody>
+      </p:sp>
+      <p:pic>
+        <p:nvPicPr>
+          <p:cNvPr id="3" name="Picture 2" descr="step-24-the-chart.png"/>
+          <p:cNvPicPr>
+            <a:picLocks noChangeAspect="1"/>
+          </p:cNvPicPr>
+          <p:nvPr/>
+        </p:nvPicPr>
+        <p:blipFill>
+          <a:blip r:embed="rId2"/>
+          <a:stretch>
+            <a:fillRect/>
+          </a:stretch>
+        </p:blipFill>
+        <p:spPr>
+          <a:xfrm>
+            <a:off x="548640" y="2467991"/>
+            <a:ext cx="11094415" cy="1830578"/>
+          </a:xfrm>
+          <a:prstGeom prst="rect">
+            <a:avLst/>
+          </a:prstGeom>
+        </p:spPr>
+      </p:pic>
+      <p:sp>
+        <p:nvSpPr>
+          <p:cNvPr id="4" name="TextBox 3"/>
+          <p:cNvSpPr txBox="1"/>
+          <p:nvPr/>
+        </p:nvSpPr>
+        <p:spPr>
+          <a:xfrm>
+            <a:off x="548640" y="5440680"/>
+            <a:ext cx="11094415" cy="914400"/>
+          </a:xfrm>
+          <a:prstGeom prst="rect">
+            <a:avLst/>
+          </a:prstGeom>
+          <a:noFill/>
+        </p:spPr>
+        <p:txBody>
+          <a:bodyPr wrap="square" lIns="0" rIns="0" tIns="0" bIns="0">
+            <a:spAutoFit/>
+          </a:bodyPr>
+          <a:lstStyle/>
+          <a:p>
+            <a:pPr>
+              <a:spcAft>
+                <a:spcPts val="1600"/>
+              </a:spcAft>
+            </a:pPr>
+            <a:r>
+              <a:rPr sz="2200" b="1">
+                <a:solidFill>
+                  <a:srgbClr val="FFB000"/>
+                </a:solidFill>
+                <a:latin typeface="Calibri"/>
+              </a:rPr>
+              <a:t>Press Charts.</a:t>
+            </a:r>
+          </a:p>
+        </p:txBody>
+      </p:sp>
+    </p:spTree>
+  </p:cSld>
+  <p:clrMapOvr>
+    <a:masterClrMapping/>
+  </p:clrMapOvr>
+</p:sld>
+</file>
+
+<file path=ppt/slides/slide25.xml><?xml version="1.0" encoding="utf-8"?>
+<p:sld xmlns:a="http://schemas.openxmlformats.org/drawingml/2006/main" xmlns:p="http://schemas.openxmlformats.org/presentationml/2006/main" xmlns:r="http://schemas.openxmlformats.org/officeDocument/2006/relationships">
+  <p:cSld>
+    <p:bg>
+      <p:bgPr>
+        <a:solidFill>
+          <a:srgbClr val="121216"/>
+        </a:solidFill>
+        <a:effectLst/>
+      </p:bgPr>
+    </p:bg>
+    <p:spTree>
+      <p:nvGrpSpPr>
+        <p:cNvPr id="1" name=""/>
+        <p:cNvGrpSpPr/>
+        <p:nvPr/>
+      </p:nvGrpSpPr>
+      <p:grpSpPr/>
+      <p:sp>
+        <p:nvSpPr>
+          <p:cNvPr id="2" name="TextBox 1"/>
+          <p:cNvSpPr txBox="1"/>
+          <p:nvPr/>
+        </p:nvSpPr>
+        <p:spPr>
+          <a:xfrm>
+            <a:off x="548640" y="457200"/>
+            <a:ext cx="11094415" cy="914400"/>
+          </a:xfrm>
+          <a:prstGeom prst="rect">
+            <a:avLst/>
+          </a:prstGeom>
+          <a:noFill/>
+        </p:spPr>
+        <p:txBody>
+          <a:bodyPr wrap="square" lIns="0" rIns="0" tIns="0" bIns="0">
+            <a:spAutoFit/>
+          </a:bodyPr>
+          <a:lstStyle/>
+          <a:p>
+            <a:pPr>
+              <a:spcAft>
+                <a:spcPts val="1600"/>
+              </a:spcAft>
+            </a:pPr>
+            <a:r>
+              <a:rPr sz="3600" b="1">
+                <a:solidFill>
+                  <a:srgbClr val="FFFFFF"/>
+                </a:solidFill>
+                <a:latin typeface="Cambria"/>
+              </a:rPr>
+              <a:t>Step 25 — The market inspector</a:t>
+            </a:r>
+          </a:p>
+        </p:txBody>
+      </p:sp>
+      <p:pic>
+        <p:nvPicPr>
+          <p:cNvPr id="3" name="Picture 2" descr="step-25-the-market-inspector.png"/>
+          <p:cNvPicPr>
+            <a:picLocks noChangeAspect="1"/>
+          </p:cNvPicPr>
+          <p:nvPr/>
+        </p:nvPicPr>
+        <p:blipFill>
+          <a:blip r:embed="rId2"/>
+          <a:stretch>
+            <a:fillRect/>
+          </a:stretch>
+        </p:blipFill>
+        <p:spPr>
+          <a:xfrm>
+            <a:off x="548640" y="2467991"/>
+            <a:ext cx="11094415" cy="1830578"/>
+          </a:xfrm>
+          <a:prstGeom prst="rect">
+            <a:avLst/>
+          </a:prstGeom>
+        </p:spPr>
+      </p:pic>
+      <p:sp>
+        <p:nvSpPr>
+          <p:cNvPr id="4" name="TextBox 3"/>
+          <p:cNvSpPr txBox="1"/>
+          <p:nvPr/>
+        </p:nvSpPr>
+        <p:spPr>
+          <a:xfrm>
+            <a:off x="548640" y="5440680"/>
+            <a:ext cx="11094415" cy="914400"/>
+          </a:xfrm>
+          <a:prstGeom prst="rect">
+            <a:avLst/>
+          </a:prstGeom>
+          <a:noFill/>
+        </p:spPr>
+        <p:txBody>
+          <a:bodyPr wrap="square" lIns="0" rIns="0" tIns="0" bIns="0">
+            <a:spAutoFit/>
+          </a:bodyPr>
+          <a:lstStyle/>
+          <a:p>
+            <a:pPr>
+              <a:spcAft>
+                <a:spcPts val="1600"/>
+              </a:spcAft>
+            </a:pPr>
+            <a:r>
+              <a:rPr sz="2200" b="1">
+                <a:solidFill>
+                  <a:srgbClr val="FFB000"/>
+                </a:solidFill>
+                <a:latin typeface="Calibri"/>
+              </a:rPr>
+              <a:t>Press Inspector.</a:t>
+            </a:r>
+          </a:p>
+        </p:txBody>
+      </p:sp>
+    </p:spTree>
+  </p:cSld>
+  <p:clrMapOvr>
+    <a:masterClrMapping/>
+  </p:clrMapOvr>
+</p:sld>
+</file>
+
+<file path=ppt/slides/slide26.xml><?xml version="1.0" encoding="utf-8"?>
+<p:sld xmlns:a="http://schemas.openxmlformats.org/drawingml/2006/main" xmlns:p="http://schemas.openxmlformats.org/presentationml/2006/main" xmlns:r="http://schemas.openxmlformats.org/officeDocument/2006/relationships">
+  <p:cSld>
+    <p:bg>
+      <p:bgPr>
+        <a:solidFill>
+          <a:srgbClr val="121216"/>
+        </a:solidFill>
+        <a:effectLst/>
+      </p:bgPr>
+    </p:bg>
+    <p:spTree>
+      <p:nvGrpSpPr>
+        <p:cNvPr id="1" name=""/>
+        <p:cNvGrpSpPr/>
+        <p:nvPr/>
+      </p:nvGrpSpPr>
+      <p:grpSpPr/>
+      <p:sp>
+        <p:nvSpPr>
+          <p:cNvPr id="2" name="TextBox 1"/>
+          <p:cNvSpPr txBox="1"/>
+          <p:nvPr/>
+        </p:nvSpPr>
+        <p:spPr>
+          <a:xfrm>
+            <a:off x="548640" y="457200"/>
+            <a:ext cx="11094415" cy="914400"/>
+          </a:xfrm>
+          <a:prstGeom prst="rect">
+            <a:avLst/>
+          </a:prstGeom>
+          <a:noFill/>
+        </p:spPr>
+        <p:txBody>
+          <a:bodyPr wrap="square" lIns="0" rIns="0" tIns="0" bIns="0">
+            <a:spAutoFit/>
+          </a:bodyPr>
+          <a:lstStyle/>
+          <a:p>
+            <a:pPr>
+              <a:spcAft>
+                <a:spcPts val="1600"/>
+              </a:spcAft>
+            </a:pPr>
+            <a:r>
+              <a:rPr sz="3600" b="1">
+                <a:solidFill>
+                  <a:srgbClr val="FFFFFF"/>
+                </a:solidFill>
+                <a:latin typeface="Cambria"/>
+              </a:rPr>
+              <a:t>Step 26 — The swarm</a:t>
+            </a:r>
+          </a:p>
+        </p:txBody>
+      </p:sp>
+      <p:pic>
+        <p:nvPicPr>
+          <p:cNvPr id="3" name="Picture 2" descr="step-26-the-swarm.png"/>
+          <p:cNvPicPr>
+            <a:picLocks noChangeAspect="1"/>
+          </p:cNvPicPr>
+          <p:nvPr/>
+        </p:nvPicPr>
+        <p:blipFill>
+          <a:blip r:embed="rId2"/>
+          <a:stretch>
+            <a:fillRect/>
+          </a:stretch>
+        </p:blipFill>
+        <p:spPr>
+          <a:xfrm>
+            <a:off x="548640" y="2467991"/>
+            <a:ext cx="11094415" cy="1830578"/>
+          </a:xfrm>
+          <a:prstGeom prst="rect">
+            <a:avLst/>
+          </a:prstGeom>
+        </p:spPr>
+      </p:pic>
+      <p:sp>
+        <p:nvSpPr>
+          <p:cNvPr id="4" name="TextBox 3"/>
+          <p:cNvSpPr txBox="1"/>
+          <p:nvPr/>
+        </p:nvSpPr>
+        <p:spPr>
+          <a:xfrm>
+            <a:off x="548640" y="5440680"/>
+            <a:ext cx="11094415" cy="914400"/>
+          </a:xfrm>
+          <a:prstGeom prst="rect">
+            <a:avLst/>
+          </a:prstGeom>
+          <a:noFill/>
+        </p:spPr>
+        <p:txBody>
+          <a:bodyPr wrap="square" lIns="0" rIns="0" tIns="0" bIns="0">
+            <a:spAutoFit/>
+          </a:bodyPr>
+          <a:lstStyle/>
+          <a:p>
+            <a:pPr>
+              <a:spcAft>
+                <a:spcPts val="1600"/>
+              </a:spcAft>
+            </a:pPr>
+            <a:r>
+              <a:rPr sz="2200" b="1">
+                <a:solidFill>
+                  <a:srgbClr val="FFB000"/>
+                </a:solidFill>
+                <a:latin typeface="Calibri"/>
+              </a:rPr>
+              <a:t>Press Swarm.</a:t>
+            </a:r>
+          </a:p>
+        </p:txBody>
+      </p:sp>
+    </p:spTree>
+  </p:cSld>
+  <p:clrMapOvr>
+    <a:masterClrMapping/>
+  </p:clrMapOvr>
+</p:sld>
+</file>
+
+<file path=ppt/slides/slide27.xml><?xml version="1.0" encoding="utf-8"?>
+<p:sld xmlns:a="http://schemas.openxmlformats.org/drawingml/2006/main" xmlns:p="http://schemas.openxmlformats.org/presentationml/2006/main" xmlns:r="http://schemas.openxmlformats.org/officeDocument/2006/relationships">
+  <p:cSld>
+    <p:bg>
+      <p:bgPr>
+        <a:solidFill>
+          <a:srgbClr val="121216"/>
+        </a:solidFill>
+        <a:effectLst/>
+      </p:bgPr>
+    </p:bg>
+    <p:spTree>
+      <p:nvGrpSpPr>
+        <p:cNvPr id="1" name=""/>
+        <p:cNvGrpSpPr/>
+        <p:nvPr/>
+      </p:nvGrpSpPr>
+      <p:grpSpPr/>
+      <p:sp>
+        <p:nvSpPr>
+          <p:cNvPr id="2" name="TextBox 1"/>
+          <p:cNvSpPr txBox="1"/>
+          <p:nvPr/>
+        </p:nvSpPr>
+        <p:spPr>
+          <a:xfrm>
+            <a:off x="548640" y="457200"/>
+            <a:ext cx="11094415" cy="914400"/>
+          </a:xfrm>
+          <a:prstGeom prst="rect">
+            <a:avLst/>
+          </a:prstGeom>
+          <a:noFill/>
+        </p:spPr>
+        <p:txBody>
+          <a:bodyPr wrap="square" lIns="0" rIns="0" tIns="0" bIns="0">
+            <a:spAutoFit/>
+          </a:bodyPr>
+          <a:lstStyle/>
+          <a:p>
+            <a:pPr>
+              <a:spcAft>
+                <a:spcPts val="1600"/>
+              </a:spcAft>
+            </a:pPr>
+            <a:r>
+              <a:rPr sz="3600" b="1">
+                <a:solidFill>
+                  <a:srgbClr val="FFFFFF"/>
+                </a:solidFill>
+                <a:latin typeface="Cambria"/>
+              </a:rPr>
+              <a:t>Step 27 — What it has traded</a:t>
+            </a:r>
+          </a:p>
+        </p:txBody>
+      </p:sp>
+      <p:pic>
+        <p:nvPicPr>
+          <p:cNvPr id="3" name="Picture 2" descr="step-27-what-it-has-traded.png"/>
+          <p:cNvPicPr>
+            <a:picLocks noChangeAspect="1"/>
+          </p:cNvPicPr>
+          <p:nvPr/>
+        </p:nvPicPr>
+        <p:blipFill>
+          <a:blip r:embed="rId2"/>
+          <a:stretch>
+            <a:fillRect/>
+          </a:stretch>
+        </p:blipFill>
+        <p:spPr>
+          <a:xfrm>
+            <a:off x="548640" y="2467991"/>
+            <a:ext cx="11094415" cy="1830578"/>
+          </a:xfrm>
+          <a:prstGeom prst="rect">
+            <a:avLst/>
+          </a:prstGeom>
+        </p:spPr>
+      </p:pic>
+      <p:sp>
+        <p:nvSpPr>
+          <p:cNvPr id="4" name="TextBox 3"/>
+          <p:cNvSpPr txBox="1"/>
+          <p:nvPr/>
+        </p:nvSpPr>
+        <p:spPr>
+          <a:xfrm>
+            <a:off x="548640" y="5440680"/>
+            <a:ext cx="11094415" cy="914400"/>
+          </a:xfrm>
+          <a:prstGeom prst="rect">
+            <a:avLst/>
+          </a:prstGeom>
+          <a:noFill/>
+        </p:spPr>
+        <p:txBody>
+          <a:bodyPr wrap="square" lIns="0" rIns="0" tIns="0" bIns="0">
+            <a:spAutoFit/>
+          </a:bodyPr>
+          <a:lstStyle/>
+          <a:p>
+            <a:pPr>
+              <a:spcAft>
+                <a:spcPts val="1600"/>
+              </a:spcAft>
+            </a:pPr>
+            <a:r>
+              <a:rPr sz="2200" b="1">
+                <a:solidFill>
+                  <a:srgbClr val="FFB000"/>
+                </a:solidFill>
+                <a:latin typeface="Calibri"/>
+              </a:rPr>
+              <a:t>Press History.</a:t>
             </a:r>
           </a:p>
         </p:txBody>
@@ -3392,14 +5716,14 @@
                 </a:solidFill>
                 <a:latin typeface="Cambria"/>
               </a:rPr>
-              <a:t>Step 3 — Enter the venue keys</a:t>
+              <a:t>Step 3 — Pick one file</a:t>
             </a:r>
           </a:p>
         </p:txBody>
       </p:sp>
       <p:pic>
         <p:nvPicPr>
-          <p:cNvPr id="3" name="Picture 2" descr="step-3-enter-the-venue-keys.png"/>
+          <p:cNvPr id="3" name="Picture 2" descr="step-3-pick-one-file.png"/>
           <p:cNvPicPr>
             <a:picLocks noChangeAspect="1"/>
           </p:cNvPicPr>
@@ -3413,8 +5737,8 @@
         </p:blipFill>
         <p:spPr>
           <a:xfrm>
-            <a:off x="2734083" y="1554480"/>
-            <a:ext cx="6723529" cy="3657600"/>
+            <a:off x="548640" y="2235083"/>
+            <a:ext cx="11094415" cy="2296393"/>
           </a:xfrm>
           <a:prstGeom prst="rect">
             <a:avLst/>
@@ -3455,7 +5779,7 @@
                 </a:solidFill>
                 <a:latin typeface="Calibri"/>
               </a:rPr>
-              <a:t>Type the key and the secret. Press Test and Add Exchange.</a:t>
+              <a:t>Take the one file whose middle column names your computer.</a:t>
             </a:r>
           </a:p>
         </p:txBody>
@@ -3520,14 +5844,14 @@
                 </a:solidFill>
                 <a:latin typeface="Cambria"/>
               </a:rPr>
-              <a:t>Step 4 — Choose the engine</a:t>
+              <a:t>Step 4 — On Windows</a:t>
             </a:r>
           </a:p>
         </p:txBody>
       </p:sp>
       <p:pic>
         <p:nvPicPr>
-          <p:cNvPr id="3" name="Picture 2" descr="step-4-choose-the-engine.png"/>
+          <p:cNvPr id="3" name="Picture 2" descr="step-4-on-windows.png"/>
           <p:cNvPicPr>
             <a:picLocks noChangeAspect="1"/>
           </p:cNvPicPr>
@@ -3541,8 +5865,8 @@
         </p:blipFill>
         <p:spPr>
           <a:xfrm>
-            <a:off x="2529039" y="1554480"/>
-            <a:ext cx="7133617" cy="3657600"/>
+            <a:off x="548640" y="1763657"/>
+            <a:ext cx="11094415" cy="3239245"/>
           </a:xfrm>
           <a:prstGeom prst="rect">
             <a:avLst/>
@@ -3583,7 +5907,7 @@
                 </a:solidFill>
                 <a:latin typeface="Calibri"/>
               </a:rPr>
-              <a:t>Press Accumulation Trading (Scrumming), then Next.</a:t>
+              <a:t>Right-click the file, choose Extract All, open the folder it makes, and double-click the program inside.</a:t>
             </a:r>
           </a:p>
         </p:txBody>
@@ -3648,14 +5972,14 @@
                 </a:solidFill>
                 <a:latin typeface="Cambria"/>
               </a:rPr>
-              <a:t>Step 5 — Name what it trades</a:t>
+              <a:t>Step 5 — On a Mac</a:t>
             </a:r>
           </a:p>
         </p:txBody>
       </p:sp>
       <p:pic>
         <p:nvPicPr>
-          <p:cNvPr id="3" name="Picture 2" descr="step-5-name-what-it-trades.png"/>
+          <p:cNvPr id="3" name="Picture 2" descr="step-5-on-a-mac.png"/>
           <p:cNvPicPr>
             <a:picLocks noChangeAspect="1"/>
           </p:cNvPicPr>
@@ -3669,8 +5993,8 @@
         </p:blipFill>
         <p:spPr>
           <a:xfrm>
-            <a:off x="2627434" y="1554480"/>
-            <a:ext cx="6936827" cy="3657599"/>
+            <a:off x="548640" y="2125180"/>
+            <a:ext cx="11094415" cy="2516199"/>
           </a:xfrm>
           <a:prstGeom prst="rect">
             <a:avLst/>
@@ -3711,7 +6035,7 @@
                 </a:solidFill>
                 <a:latin typeface="Calibri"/>
               </a:rPr>
-              <a:t>Pick the venue, then the pair. Press Next.</a:t>
+              <a:t>Double-click the file, then drag Acervator to the Applications folder.</a:t>
             </a:r>
           </a:p>
         </p:txBody>
@@ -3776,21 +6100,45 @@
                 </a:solidFill>
                 <a:latin typeface="Cambria"/>
               </a:rPr>
-              <a:t>Step 6 — Make the fleet</a:t>
-            </a:r>
-          </a:p>
-        </p:txBody>
-      </p:sp>
-      <p:sp>
-        <p:nvSpPr>
-          <p:cNvPr id="3" name="TextBox 2"/>
+              <a:t>Step 6 — The window opens</a:t>
+            </a:r>
+          </a:p>
+        </p:txBody>
+      </p:sp>
+      <p:pic>
+        <p:nvPicPr>
+          <p:cNvPr id="3" name="Picture 2" descr="step-6-window-opens.png"/>
+          <p:cNvPicPr>
+            <a:picLocks noChangeAspect="1"/>
+          </p:cNvPicPr>
+          <p:nvPr/>
+        </p:nvPicPr>
+        <p:blipFill>
+          <a:blip r:embed="rId2"/>
+          <a:stretch>
+            <a:fillRect/>
+          </a:stretch>
+        </p:blipFill>
+        <p:spPr>
+          <a:xfrm>
+            <a:off x="548640" y="2773087"/>
+            <a:ext cx="11094415" cy="1220385"/>
+          </a:xfrm>
+          <a:prstGeom prst="rect">
+            <a:avLst/>
+          </a:prstGeom>
+        </p:spPr>
+      </p:pic>
+      <p:sp>
+        <p:nvSpPr>
+          <p:cNvPr id="4" name="TextBox 3"/>
           <p:cNvSpPr txBox="1"/>
           <p:nvPr/>
         </p:nvSpPr>
         <p:spPr>
           <a:xfrm>
-            <a:off x="548640" y="1737360"/>
-            <a:ext cx="11094415" cy="4572000"/>
+            <a:off x="548640" y="5440680"/>
+            <a:ext cx="11094415" cy="914400"/>
           </a:xfrm>
           <a:prstGeom prst="rect">
             <a:avLst/>
@@ -3809,45 +6157,13 @@
               </a:spcAft>
             </a:pPr>
             <a:r>
-              <a:rPr sz="2000" b="0">
-                <a:solidFill>
-                  <a:srgbClr val="FFFFFF"/>
+              <a:rPr sz="2200" b="1">
+                <a:solidFill>
+                  <a:srgbClr val="FFB000"/>
                 </a:solidFill>
                 <a:latin typeface="Calibri"/>
               </a:rPr>
-              <a:t>This step carries no picture. Driving it creates bots.</a:t>
-            </a:r>
-          </a:p>
-          <a:p>
-            <a:pPr>
-              <a:spcAft>
-                <a:spcPts val="1600"/>
-              </a:spcAft>
-            </a:pPr>
-            <a:r>
-              <a:rPr sz="2000" b="1">
-                <a:solidFill>
-                  <a:srgbClr val="FFFFFF"/>
-                </a:solidFill>
-                <a:latin typeface="Calibri"/>
-              </a:rPr>
-              <a:t>Open Inspector and scan. Press Preview on a topology proposal, then Adopt.</a:t>
-            </a:r>
-          </a:p>
-          <a:p>
-            <a:pPr>
-              <a:spcAft>
-                <a:spcPts val="1600"/>
-              </a:spcAft>
-            </a:pPr>
-            <a:r>
-              <a:rPr sz="2000" b="0">
-                <a:solidFill>
-                  <a:srgbClr val="FFFFFF"/>
-                </a:solidFill>
-                <a:latin typeface="Calibri"/>
-              </a:rPr>
-              <a:t>Adopt is the only control on that screen that creates anything. It opens the wizard once for each new bot.</a:t>
+              <a:t>Acervator opens on Status. Press Live.</a:t>
             </a:r>
           </a:p>
         </p:txBody>
@@ -3912,21 +6228,45 @@
                 </a:solidFill>
                 <a:latin typeface="Cambria"/>
               </a:rPr>
-              <a:t>Step 7 — Start the fleet</a:t>
-            </a:r>
-          </a:p>
-        </p:txBody>
-      </p:sp>
-      <p:sp>
-        <p:nvSpPr>
-          <p:cNvPr id="3" name="TextBox 2"/>
+              <a:t>Step 7 — Live has no venue</a:t>
+            </a:r>
+          </a:p>
+        </p:txBody>
+      </p:sp>
+      <p:pic>
+        <p:nvPicPr>
+          <p:cNvPr id="3" name="Picture 2" descr="step-7-live-has-no-venue.png"/>
+          <p:cNvPicPr>
+            <a:picLocks noChangeAspect="1"/>
+          </p:cNvPicPr>
+          <p:nvPr/>
+        </p:nvPicPr>
+        <p:blipFill>
+          <a:blip r:embed="rId2"/>
+          <a:stretch>
+            <a:fillRect/>
+          </a:stretch>
+        </p:blipFill>
+        <p:spPr>
+          <a:xfrm>
+            <a:off x="2519210" y="2087880"/>
+            <a:ext cx="7153275" cy="2590800"/>
+          </a:xfrm>
+          <a:prstGeom prst="rect">
+            <a:avLst/>
+          </a:prstGeom>
+        </p:spPr>
+      </p:pic>
+      <p:sp>
+        <p:nvSpPr>
+          <p:cNvPr id="4" name="TextBox 3"/>
           <p:cNvSpPr txBox="1"/>
           <p:nvPr/>
         </p:nvSpPr>
         <p:spPr>
           <a:xfrm>
-            <a:off x="548640" y="1737360"/>
-            <a:ext cx="11094415" cy="4572000"/>
+            <a:off x="548640" y="5440680"/>
+            <a:ext cx="11094415" cy="914400"/>
           </a:xfrm>
           <a:prstGeom prst="rect">
             <a:avLst/>
@@ -3945,15 +6285,64 @@
               </a:spcAft>
             </a:pPr>
             <a:r>
-              <a:rPr sz="2000" b="0">
-                <a:solidFill>
-                  <a:srgbClr val="FFFFFF"/>
+              <a:rPr sz="2200" b="1">
+                <a:solidFill>
+                  <a:srgbClr val="FFB000"/>
                 </a:solidFill>
                 <a:latin typeface="Calibri"/>
               </a:rPr>
-              <a:t>This step carries no picture. A started bot places real orders on a real venue.</a:t>
-            </a:r>
-          </a:p>
+              <a:t>No venue is stored. Press Add Crypto Exchange.</a:t>
+            </a:r>
+          </a:p>
+        </p:txBody>
+      </p:sp>
+    </p:spTree>
+  </p:cSld>
+  <p:clrMapOvr>
+    <a:masterClrMapping/>
+  </p:clrMapOvr>
+</p:sld>
+</file>
+
+<file path=ppt/slides/slide8.xml><?xml version="1.0" encoding="utf-8"?>
+<p:sld xmlns:a="http://schemas.openxmlformats.org/drawingml/2006/main" xmlns:p="http://schemas.openxmlformats.org/presentationml/2006/main" xmlns:r="http://schemas.openxmlformats.org/officeDocument/2006/relationships">
+  <p:cSld>
+    <p:bg>
+      <p:bgPr>
+        <a:solidFill>
+          <a:srgbClr val="121216"/>
+        </a:solidFill>
+        <a:effectLst/>
+      </p:bgPr>
+    </p:bg>
+    <p:spTree>
+      <p:nvGrpSpPr>
+        <p:cNvPr id="1" name=""/>
+        <p:cNvGrpSpPr/>
+        <p:nvPr/>
+      </p:nvGrpSpPr>
+      <p:grpSpPr/>
+      <p:sp>
+        <p:nvSpPr>
+          <p:cNvPr id="2" name="TextBox 1"/>
+          <p:cNvSpPr txBox="1"/>
+          <p:nvPr/>
+        </p:nvSpPr>
+        <p:spPr>
+          <a:xfrm>
+            <a:off x="548640" y="457200"/>
+            <a:ext cx="11094415" cy="914400"/>
+          </a:xfrm>
+          <a:prstGeom prst="rect">
+            <a:avLst/>
+          </a:prstGeom>
+          <a:noFill/>
+        </p:spPr>
+        <p:txBody>
+          <a:bodyPr wrap="square" lIns="0" rIns="0" tIns="0" bIns="0">
+            <a:spAutoFit/>
+          </a:bodyPr>
+          <a:lstStyle/>
           <a:p>
             <a:pPr>
               <a:spcAft>
@@ -3961,15 +6350,62 @@
               </a:spcAft>
             </a:pPr>
             <a:r>
-              <a:rPr sz="2000" b="1">
+              <a:rPr sz="3600" b="1">
                 <a:solidFill>
                   <a:srgbClr val="FFFFFF"/>
                 </a:solidFill>
-                <a:latin typeface="Calibri"/>
+                <a:latin typeface="Cambria"/>
               </a:rPr>
-              <a:t>Start each bot from the bot list under Live.</a:t>
-            </a:r>
-          </a:p>
+              <a:t>Step 8 — Enter the venue keys</a:t>
+            </a:r>
+          </a:p>
+        </p:txBody>
+      </p:sp>
+      <p:pic>
+        <p:nvPicPr>
+          <p:cNvPr id="3" name="Picture 2" descr="step-8-enter-the-venue-keys.png"/>
+          <p:cNvPicPr>
+            <a:picLocks noChangeAspect="1"/>
+          </p:cNvPicPr>
+          <p:nvPr/>
+        </p:nvPicPr>
+        <p:blipFill>
+          <a:blip r:embed="rId2"/>
+          <a:stretch>
+            <a:fillRect/>
+          </a:stretch>
+        </p:blipFill>
+        <p:spPr>
+          <a:xfrm>
+            <a:off x="2734083" y="1554480"/>
+            <a:ext cx="6723529" cy="3657600"/>
+          </a:xfrm>
+          <a:prstGeom prst="rect">
+            <a:avLst/>
+          </a:prstGeom>
+        </p:spPr>
+      </p:pic>
+      <p:sp>
+        <p:nvSpPr>
+          <p:cNvPr id="4" name="TextBox 3"/>
+          <p:cNvSpPr txBox="1"/>
+          <p:nvPr/>
+        </p:nvSpPr>
+        <p:spPr>
+          <a:xfrm>
+            <a:off x="548640" y="5440680"/>
+            <a:ext cx="11094415" cy="914400"/>
+          </a:xfrm>
+          <a:prstGeom prst="rect">
+            <a:avLst/>
+          </a:prstGeom>
+          <a:noFill/>
+        </p:spPr>
+        <p:txBody>
+          <a:bodyPr wrap="square" lIns="0" rIns="0" tIns="0" bIns="0">
+            <a:spAutoFit/>
+          </a:bodyPr>
+          <a:lstStyle/>
           <a:p>
             <a:pPr>
               <a:spcAft>
@@ -3977,13 +6413,141 @@
               </a:spcAft>
             </a:pPr>
             <a:r>
-              <a:rPr sz="2000" b="0">
-                <a:solidFill>
-                  <a:srgbClr val="FFFFFF"/>
+              <a:rPr sz="2200" b="1">
+                <a:solidFill>
+                  <a:srgbClr val="FFB000"/>
                 </a:solidFill>
                 <a:latin typeface="Calibri"/>
               </a:rPr>
-              <a:t>The fleet is running.</a:t>
+              <a:t>Type the key and the secret. Press Test and Add Exchange.</a:t>
+            </a:r>
+          </a:p>
+        </p:txBody>
+      </p:sp>
+    </p:spTree>
+  </p:cSld>
+  <p:clrMapOvr>
+    <a:masterClrMapping/>
+  </p:clrMapOvr>
+</p:sld>
+</file>
+
+<file path=ppt/slides/slide9.xml><?xml version="1.0" encoding="utf-8"?>
+<p:sld xmlns:a="http://schemas.openxmlformats.org/drawingml/2006/main" xmlns:p="http://schemas.openxmlformats.org/presentationml/2006/main" xmlns:r="http://schemas.openxmlformats.org/officeDocument/2006/relationships">
+  <p:cSld>
+    <p:bg>
+      <p:bgPr>
+        <a:solidFill>
+          <a:srgbClr val="121216"/>
+        </a:solidFill>
+        <a:effectLst/>
+      </p:bgPr>
+    </p:bg>
+    <p:spTree>
+      <p:nvGrpSpPr>
+        <p:cNvPr id="1" name=""/>
+        <p:cNvGrpSpPr/>
+        <p:nvPr/>
+      </p:nvGrpSpPr>
+      <p:grpSpPr/>
+      <p:sp>
+        <p:nvSpPr>
+          <p:cNvPr id="2" name="TextBox 1"/>
+          <p:cNvSpPr txBox="1"/>
+          <p:nvPr/>
+        </p:nvSpPr>
+        <p:spPr>
+          <a:xfrm>
+            <a:off x="548640" y="457200"/>
+            <a:ext cx="11094415" cy="914400"/>
+          </a:xfrm>
+          <a:prstGeom prst="rect">
+            <a:avLst/>
+          </a:prstGeom>
+          <a:noFill/>
+        </p:spPr>
+        <p:txBody>
+          <a:bodyPr wrap="square" lIns="0" rIns="0" tIns="0" bIns="0">
+            <a:spAutoFit/>
+          </a:bodyPr>
+          <a:lstStyle/>
+          <a:p>
+            <a:pPr>
+              <a:spcAft>
+                <a:spcPts val="1600"/>
+              </a:spcAft>
+            </a:pPr>
+            <a:r>
+              <a:rPr sz="3600" b="1">
+                <a:solidFill>
+                  <a:srgbClr val="FFFFFF"/>
+                </a:solidFill>
+                <a:latin typeface="Cambria"/>
+              </a:rPr>
+              <a:t>Step 9 — Choose the engine</a:t>
+            </a:r>
+          </a:p>
+        </p:txBody>
+      </p:sp>
+      <p:pic>
+        <p:nvPicPr>
+          <p:cNvPr id="3" name="Picture 2" descr="step-9-choose-the-engine.png"/>
+          <p:cNvPicPr>
+            <a:picLocks noChangeAspect="1"/>
+          </p:cNvPicPr>
+          <p:nvPr/>
+        </p:nvPicPr>
+        <p:blipFill>
+          <a:blip r:embed="rId2"/>
+          <a:stretch>
+            <a:fillRect/>
+          </a:stretch>
+        </p:blipFill>
+        <p:spPr>
+          <a:xfrm>
+            <a:off x="2529039" y="1554480"/>
+            <a:ext cx="7133617" cy="3657600"/>
+          </a:xfrm>
+          <a:prstGeom prst="rect">
+            <a:avLst/>
+          </a:prstGeom>
+        </p:spPr>
+      </p:pic>
+      <p:sp>
+        <p:nvSpPr>
+          <p:cNvPr id="4" name="TextBox 3"/>
+          <p:cNvSpPr txBox="1"/>
+          <p:nvPr/>
+        </p:nvSpPr>
+        <p:spPr>
+          <a:xfrm>
+            <a:off x="548640" y="5440680"/>
+            <a:ext cx="11094415" cy="914400"/>
+          </a:xfrm>
+          <a:prstGeom prst="rect">
+            <a:avLst/>
+          </a:prstGeom>
+          <a:noFill/>
+        </p:spPr>
+        <p:txBody>
+          <a:bodyPr wrap="square" lIns="0" rIns="0" tIns="0" bIns="0">
+            <a:spAutoFit/>
+          </a:bodyPr>
+          <a:lstStyle/>
+          <a:p>
+            <a:pPr>
+              <a:spcAft>
+                <a:spcPts val="1600"/>
+              </a:spcAft>
+            </a:pPr>
+            <a:r>
+              <a:rPr sz="2200" b="1">
+                <a:solidFill>
+                  <a:srgbClr val="FFB000"/>
+                </a:solidFill>
+                <a:latin typeface="Calibri"/>
+              </a:rPr>
+              <a:t>Press Accumulation Trading (Scrumming), then Next.</a:t>
             </a:r>
           </a:p>
         </p:txBody>

--- a/docs/new-user-procedure/New-User-Procedure.pptx
+++ b/docs/new-user-procedure/New-User-Procedure.pptx
@@ -3110,7 +3110,7 @@
     <p:bg>
       <p:bgPr>
         <a:solidFill>
-          <a:srgbClr val="121216"/>
+          <a:srgbClr val="FFFFFF"/>
         </a:solidFill>
         <a:effectLst/>
       </p:bgPr>
@@ -3130,40 +3130,69 @@
         </p:nvSpPr>
         <p:spPr>
           <a:xfrm>
-            <a:off x="548640" y="457200"/>
-            <a:ext cx="11094415" cy="914400"/>
-          </a:xfrm>
-          <a:prstGeom prst="rect">
-            <a:avLst/>
-          </a:prstGeom>
-          <a:noFill/>
-        </p:spPr>
-        <p:txBody>
-          <a:bodyPr wrap="square" lIns="0" rIns="0" tIns="0" bIns="0">
-            <a:spAutoFit/>
-          </a:bodyPr>
-          <a:lstStyle/>
-          <a:p>
-            <a:pPr>
-              <a:spcAft>
-                <a:spcPts val="1600"/>
-              </a:spcAft>
-            </a:pPr>
-            <a:r>
-              <a:rPr sz="3600" b="1">
-                <a:solidFill>
-                  <a:srgbClr val="FFFFFF"/>
-                </a:solidFill>
-                <a:latin typeface="Cambria"/>
+            <a:off x="502920" y="310896"/>
+            <a:ext cx="11185855" cy="640080"/>
+          </a:xfrm>
+          <a:prstGeom prst="rect">
+            <a:avLst/>
+          </a:prstGeom>
+          <a:noFill/>
+        </p:spPr>
+        <p:txBody>
+          <a:bodyPr wrap="square">
+            <a:spAutoFit/>
+          </a:bodyPr>
+          <a:lstStyle/>
+          <a:p>
+            <a:pPr algn="l"/>
+            <a:r>
+              <a:rPr sz="2600" b="1">
+                <a:solidFill>
+                  <a:srgbClr val="1F3A68"/>
+                </a:solidFill>
               </a:rPr>
               <a:t>Step 1 — Open Releases</a:t>
+            </a:r>
+          </a:p>
+        </p:txBody>
+      </p:sp>
+      <p:sp>
+        <p:nvSpPr>
+          <p:cNvPr id="3" name="TextBox 2"/>
+          <p:cNvSpPr txBox="1"/>
+          <p:nvPr/>
+        </p:nvSpPr>
+        <p:spPr>
+          <a:xfrm>
+            <a:off x="502920" y="969264"/>
+            <a:ext cx="11185855" cy="566928"/>
+          </a:xfrm>
+          <a:prstGeom prst="rect">
+            <a:avLst/>
+          </a:prstGeom>
+          <a:noFill/>
+        </p:spPr>
+        <p:txBody>
+          <a:bodyPr wrap="square">
+            <a:spAutoFit/>
+          </a:bodyPr>
+          <a:lstStyle/>
+          <a:p>
+            <a:pPr algn="l"/>
+            <a:r>
+              <a:rPr sz="1300" b="0">
+                <a:solidFill>
+                  <a:srgbClr val="6B6B6B"/>
+                </a:solidFill>
+              </a:rPr>
+              <a:t>The right column lists Releases. Open it.</a:t>
             </a:r>
           </a:p>
         </p:txBody>
       </p:sp>
       <p:pic>
         <p:nvPicPr>
-          <p:cNvPr id="3" name="Picture 2" descr="step-1-open-releases.png"/>
+          <p:cNvPr id="4" name="Picture 3" descr="step-1-open-releases.png"/>
           <p:cNvPicPr>
             <a:picLocks noChangeAspect="1"/>
           </p:cNvPicPr>
@@ -3177,8 +3206,8 @@
         </p:blipFill>
         <p:spPr>
           <a:xfrm>
-            <a:off x="3305022" y="1621155"/>
-            <a:ext cx="5581650" cy="3524250"/>
+            <a:off x="3054602" y="1645920"/>
+            <a:ext cx="6082490" cy="3840480"/>
           </a:xfrm>
           <a:prstGeom prst="rect">
             <a:avLst/>
@@ -3187,39 +3216,68 @@
       </p:pic>
       <p:sp>
         <p:nvSpPr>
-          <p:cNvPr id="4" name="TextBox 3"/>
-          <p:cNvSpPr txBox="1"/>
-          <p:nvPr/>
-        </p:nvSpPr>
-        <p:spPr>
-          <a:xfrm>
-            <a:off x="548640" y="5440680"/>
-            <a:ext cx="11094415" cy="914400"/>
-          </a:xfrm>
-          <a:prstGeom prst="rect">
-            <a:avLst/>
-          </a:prstGeom>
-          <a:noFill/>
-        </p:spPr>
-        <p:txBody>
-          <a:bodyPr wrap="square" lIns="0" rIns="0" tIns="0" bIns="0">
-            <a:spAutoFit/>
-          </a:bodyPr>
-          <a:lstStyle/>
-          <a:p>
-            <a:pPr>
-              <a:spcAft>
-                <a:spcPts val="1600"/>
-              </a:spcAft>
-            </a:pPr>
-            <a:r>
-              <a:rPr sz="2200" b="1">
-                <a:solidFill>
-                  <a:srgbClr val="FFB000"/>
-                </a:solidFill>
-                <a:latin typeface="Calibri"/>
+          <p:cNvPr id="5" name="TextBox 4"/>
+          <p:cNvSpPr txBox="1"/>
+          <p:nvPr/>
+        </p:nvSpPr>
+        <p:spPr>
+          <a:xfrm>
+            <a:off x="502920" y="5614416"/>
+            <a:ext cx="11185855" cy="658368"/>
+          </a:xfrm>
+          <a:prstGeom prst="rect">
+            <a:avLst/>
+          </a:prstGeom>
+          <a:noFill/>
+        </p:spPr>
+        <p:txBody>
+          <a:bodyPr wrap="square">
+            <a:spAutoFit/>
+          </a:bodyPr>
+          <a:lstStyle/>
+          <a:p>
+            <a:pPr algn="l"/>
+            <a:r>
+              <a:rPr sz="1500" b="1">
+                <a:solidFill>
+                  <a:srgbClr val="1A1A1A"/>
+                </a:solidFill>
               </a:rPr>
               <a:t>Open Releases in the right column of the repository page.</a:t>
+            </a:r>
+          </a:p>
+        </p:txBody>
+      </p:sp>
+      <p:sp>
+        <p:nvSpPr>
+          <p:cNvPr id="6" name="TextBox 5"/>
+          <p:cNvSpPr txBox="1"/>
+          <p:nvPr/>
+        </p:nvSpPr>
+        <p:spPr>
+          <a:xfrm>
+            <a:off x="502920" y="6382512"/>
+            <a:ext cx="11185855" cy="310896"/>
+          </a:xfrm>
+          <a:prstGeom prst="rect">
+            <a:avLst/>
+          </a:prstGeom>
+          <a:noFill/>
+        </p:spPr>
+        <p:txBody>
+          <a:bodyPr wrap="square">
+            <a:spAutoFit/>
+          </a:bodyPr>
+          <a:lstStyle/>
+          <a:p>
+            <a:pPr algn="r"/>
+            <a:r>
+              <a:rPr sz="900" b="0">
+                <a:solidFill>
+                  <a:srgbClr val="6B6B6B"/>
+                </a:solidFill>
+              </a:rPr>
+              <a:t>docs/new-user-procedure/01-open-releases.md</a:t>
             </a:r>
           </a:p>
         </p:txBody>
@@ -3238,7 +3296,7 @@
     <p:bg>
       <p:bgPr>
         <a:solidFill>
-          <a:srgbClr val="121216"/>
+          <a:srgbClr val="FFFFFF"/>
         </a:solidFill>
         <a:effectLst/>
       </p:bgPr>
@@ -3258,40 +3316,69 @@
         </p:nvSpPr>
         <p:spPr>
           <a:xfrm>
-            <a:off x="548640" y="457200"/>
-            <a:ext cx="11094415" cy="914400"/>
-          </a:xfrm>
-          <a:prstGeom prst="rect">
-            <a:avLst/>
-          </a:prstGeom>
-          <a:noFill/>
-        </p:spPr>
-        <p:txBody>
-          <a:bodyPr wrap="square" lIns="0" rIns="0" tIns="0" bIns="0">
-            <a:spAutoFit/>
-          </a:bodyPr>
-          <a:lstStyle/>
-          <a:p>
-            <a:pPr>
-              <a:spcAft>
-                <a:spcPts val="1600"/>
-              </a:spcAft>
-            </a:pPr>
-            <a:r>
-              <a:rPr sz="3600" b="1">
-                <a:solidFill>
-                  <a:srgbClr val="FFFFFF"/>
-                </a:solidFill>
-                <a:latin typeface="Cambria"/>
+            <a:off x="502920" y="310896"/>
+            <a:ext cx="11185855" cy="640080"/>
+          </a:xfrm>
+          <a:prstGeom prst="rect">
+            <a:avLst/>
+          </a:prstGeom>
+          <a:noFill/>
+        </p:spPr>
+        <p:txBody>
+          <a:bodyPr wrap="square">
+            <a:spAutoFit/>
+          </a:bodyPr>
+          <a:lstStyle/>
+          <a:p>
+            <a:pPr algn="l"/>
+            <a:r>
+              <a:rPr sz="2600" b="1">
+                <a:solidFill>
+                  <a:srgbClr val="1F3A68"/>
+                </a:solidFill>
               </a:rPr>
               <a:t>Step 10 — Name what it trades</a:t>
+            </a:r>
+          </a:p>
+        </p:txBody>
+      </p:sp>
+      <p:sp>
+        <p:nvSpPr>
+          <p:cNvPr id="3" name="TextBox 2"/>
+          <p:cNvSpPr txBox="1"/>
+          <p:nvPr/>
+        </p:nvSpPr>
+        <p:spPr>
+          <a:xfrm>
+            <a:off x="502920" y="969264"/>
+            <a:ext cx="11185855" cy="566928"/>
+          </a:xfrm>
+          <a:prstGeom prst="rect">
+            <a:avLst/>
+          </a:prstGeom>
+          <a:noFill/>
+        </p:spPr>
+        <p:txBody>
+          <a:bodyPr wrap="square">
+            <a:spAutoFit/>
+          </a:bodyPr>
+          <a:lstStyle/>
+          <a:p>
+            <a:pPr algn="l"/>
+            <a:r>
+              <a:rPr sz="1300" b="0">
+                <a:solidFill>
+                  <a:srgbClr val="6B6B6B"/>
+                </a:solidFill>
+              </a:rPr>
+              <a:t>Pick the venue, then the pair. Press Next.</a:t>
             </a:r>
           </a:p>
         </p:txBody>
       </p:sp>
       <p:pic>
         <p:nvPicPr>
-          <p:cNvPr id="3" name="Picture 2" descr="step-10-name-what-it-trades.png"/>
+          <p:cNvPr id="4" name="Picture 3" descr="step-10-name-what-it-trades.png"/>
           <p:cNvPicPr>
             <a:picLocks noChangeAspect="1"/>
           </p:cNvPicPr>
@@ -3305,8 +3392,8 @@
         </p:blipFill>
         <p:spPr>
           <a:xfrm>
-            <a:off x="2627434" y="1554480"/>
-            <a:ext cx="6936827" cy="3657599"/>
+            <a:off x="2454013" y="1645920"/>
+            <a:ext cx="7283669" cy="3840480"/>
           </a:xfrm>
           <a:prstGeom prst="rect">
             <a:avLst/>
@@ -3315,39 +3402,68 @@
       </p:pic>
       <p:sp>
         <p:nvSpPr>
-          <p:cNvPr id="4" name="TextBox 3"/>
-          <p:cNvSpPr txBox="1"/>
-          <p:nvPr/>
-        </p:nvSpPr>
-        <p:spPr>
-          <a:xfrm>
-            <a:off x="548640" y="5440680"/>
-            <a:ext cx="11094415" cy="914400"/>
-          </a:xfrm>
-          <a:prstGeom prst="rect">
-            <a:avLst/>
-          </a:prstGeom>
-          <a:noFill/>
-        </p:spPr>
-        <p:txBody>
-          <a:bodyPr wrap="square" lIns="0" rIns="0" tIns="0" bIns="0">
-            <a:spAutoFit/>
-          </a:bodyPr>
-          <a:lstStyle/>
-          <a:p>
-            <a:pPr>
-              <a:spcAft>
-                <a:spcPts val="1600"/>
-              </a:spcAft>
-            </a:pPr>
-            <a:r>
-              <a:rPr sz="2200" b="1">
-                <a:solidFill>
-                  <a:srgbClr val="FFB000"/>
-                </a:solidFill>
-                <a:latin typeface="Calibri"/>
+          <p:cNvPr id="5" name="TextBox 4"/>
+          <p:cNvSpPr txBox="1"/>
+          <p:nvPr/>
+        </p:nvSpPr>
+        <p:spPr>
+          <a:xfrm>
+            <a:off x="502920" y="5614416"/>
+            <a:ext cx="11185855" cy="658368"/>
+          </a:xfrm>
+          <a:prstGeom prst="rect">
+            <a:avLst/>
+          </a:prstGeom>
+          <a:noFill/>
+        </p:spPr>
+        <p:txBody>
+          <a:bodyPr wrap="square">
+            <a:spAutoFit/>
+          </a:bodyPr>
+          <a:lstStyle/>
+          <a:p>
+            <a:pPr algn="l"/>
+            <a:r>
+              <a:rPr sz="1500" b="1">
+                <a:solidFill>
+                  <a:srgbClr val="1A1A1A"/>
+                </a:solidFill>
               </a:rPr>
               <a:t>Pick the venue, then the pair. Press Next.</a:t>
+            </a:r>
+          </a:p>
+        </p:txBody>
+      </p:sp>
+      <p:sp>
+        <p:nvSpPr>
+          <p:cNvPr id="6" name="TextBox 5"/>
+          <p:cNvSpPr txBox="1"/>
+          <p:nvPr/>
+        </p:nvSpPr>
+        <p:spPr>
+          <a:xfrm>
+            <a:off x="502920" y="6382512"/>
+            <a:ext cx="11185855" cy="310896"/>
+          </a:xfrm>
+          <a:prstGeom prst="rect">
+            <a:avLst/>
+          </a:prstGeom>
+          <a:noFill/>
+        </p:spPr>
+        <p:txBody>
+          <a:bodyPr wrap="square">
+            <a:spAutoFit/>
+          </a:bodyPr>
+          <a:lstStyle/>
+          <a:p>
+            <a:pPr algn="r"/>
+            <a:r>
+              <a:rPr sz="900" b="0">
+                <a:solidFill>
+                  <a:srgbClr val="6B6B6B"/>
+                </a:solidFill>
+              </a:rPr>
+              <a:t>docs/new-user-procedure/10-name-what-it-trades.md</a:t>
             </a:r>
           </a:p>
         </p:txBody>
@@ -3366,7 +3482,7 @@
     <p:bg>
       <p:bgPr>
         <a:solidFill>
-          <a:srgbClr val="121216"/>
+          <a:srgbClr val="FFFFFF"/>
         </a:solidFill>
         <a:effectLst/>
       </p:bgPr>
@@ -3386,40 +3502,69 @@
         </p:nvSpPr>
         <p:spPr>
           <a:xfrm>
-            <a:off x="548640" y="457200"/>
-            <a:ext cx="11094415" cy="914400"/>
-          </a:xfrm>
-          <a:prstGeom prst="rect">
-            <a:avLst/>
-          </a:prstGeom>
-          <a:noFill/>
-        </p:spPr>
-        <p:txBody>
-          <a:bodyPr wrap="square" lIns="0" rIns="0" tIns="0" bIns="0">
-            <a:spAutoFit/>
-          </a:bodyPr>
-          <a:lstStyle/>
-          <a:p>
-            <a:pPr>
-              <a:spcAft>
-                <a:spcPts val="1600"/>
-              </a:spcAft>
-            </a:pPr>
-            <a:r>
-              <a:rPr sz="3600" b="1">
-                <a:solidFill>
-                  <a:srgbClr val="FFFFFF"/>
-                </a:solidFill>
-                <a:latin typeface="Cambria"/>
+            <a:off x="502920" y="310896"/>
+            <a:ext cx="11185855" cy="640080"/>
+          </a:xfrm>
+          <a:prstGeom prst="rect">
+            <a:avLst/>
+          </a:prstGeom>
+          <a:noFill/>
+        </p:spPr>
+        <p:txBody>
+          <a:bodyPr wrap="square">
+            <a:spAutoFit/>
+          </a:bodyPr>
+          <a:lstStyle/>
+          <a:p>
+            <a:pPr algn="l"/>
+            <a:r>
+              <a:rPr sz="2600" b="1">
+                <a:solidFill>
+                  <a:srgbClr val="1F3A68"/>
+                </a:solidFill>
               </a:rPr>
               <a:t>Step 11 — How far price must move</a:t>
+            </a:r>
+          </a:p>
+        </p:txBody>
+      </p:sp>
+      <p:sp>
+        <p:nvSpPr>
+          <p:cNvPr id="3" name="TextBox 2"/>
+          <p:cNvSpPr txBox="1"/>
+          <p:nvPr/>
+        </p:nvSpPr>
+        <p:spPr>
+          <a:xfrm>
+            <a:off x="502920" y="969264"/>
+            <a:ext cx="11185855" cy="566928"/>
+          </a:xfrm>
+          <a:prstGeom prst="rect">
+            <a:avLst/>
+          </a:prstGeom>
+          <a:noFill/>
+        </p:spPr>
+        <p:txBody>
+          <a:bodyPr wrap="square">
+            <a:spAutoFit/>
+          </a:bodyPr>
+          <a:lstStyle/>
+          <a:p>
+            <a:pPr algn="l"/>
+            <a:r>
+              <a:rPr sz="1300" b="0">
+                <a:solidFill>
+                  <a:srgbClr val="6B6B6B"/>
+                </a:solidFill>
+              </a:rPr>
+              <a:t>Opposing Trade Interval opens at 1.00 %.</a:t>
             </a:r>
           </a:p>
         </p:txBody>
       </p:sp>
       <p:pic>
         <p:nvPicPr>
-          <p:cNvPr id="3" name="Picture 2" descr="step-11-how-far-price-must-move.png"/>
+          <p:cNvPr id="4" name="Picture 3" descr="step-11-how-far-price-must-move.png"/>
           <p:cNvPicPr>
             <a:picLocks noChangeAspect="1"/>
           </p:cNvPicPr>
@@ -3433,8 +3578,8 @@
         </p:blipFill>
         <p:spPr>
           <a:xfrm>
-            <a:off x="2792596" y="1554480"/>
-            <a:ext cx="6606502" cy="3657600"/>
+            <a:off x="2627434" y="1645920"/>
+            <a:ext cx="6936827" cy="3840480"/>
           </a:xfrm>
           <a:prstGeom prst="rect">
             <a:avLst/>
@@ -3443,39 +3588,68 @@
       </p:pic>
       <p:sp>
         <p:nvSpPr>
-          <p:cNvPr id="4" name="TextBox 3"/>
-          <p:cNvSpPr txBox="1"/>
-          <p:nvPr/>
-        </p:nvSpPr>
-        <p:spPr>
-          <a:xfrm>
-            <a:off x="548640" y="5440680"/>
-            <a:ext cx="11094415" cy="914400"/>
-          </a:xfrm>
-          <a:prstGeom prst="rect">
-            <a:avLst/>
-          </a:prstGeom>
-          <a:noFill/>
-        </p:spPr>
-        <p:txBody>
-          <a:bodyPr wrap="square" lIns="0" rIns="0" tIns="0" bIns="0">
-            <a:spAutoFit/>
-          </a:bodyPr>
-          <a:lstStyle/>
-          <a:p>
-            <a:pPr>
-              <a:spcAft>
-                <a:spcPts val="1600"/>
-              </a:spcAft>
-            </a:pPr>
-            <a:r>
-              <a:rPr sz="2200" b="1">
-                <a:solidFill>
-                  <a:srgbClr val="FFB000"/>
-                </a:solidFill>
-                <a:latin typeface="Calibri"/>
-              </a:rPr>
-              <a:t>Leave Opposing Trade Interval at 1.00 %.</a:t>
+          <p:cNvPr id="5" name="TextBox 4"/>
+          <p:cNvSpPr txBox="1"/>
+          <p:nvPr/>
+        </p:nvSpPr>
+        <p:spPr>
+          <a:xfrm>
+            <a:off x="502920" y="5614416"/>
+            <a:ext cx="11185855" cy="658368"/>
+          </a:xfrm>
+          <a:prstGeom prst="rect">
+            <a:avLst/>
+          </a:prstGeom>
+          <a:noFill/>
+        </p:spPr>
+        <p:txBody>
+          <a:bodyPr wrap="square">
+            <a:spAutoFit/>
+          </a:bodyPr>
+          <a:lstStyle/>
+          <a:p>
+            <a:pPr algn="l"/>
+            <a:r>
+              <a:rPr sz="1500" b="1">
+                <a:solidFill>
+                  <a:srgbClr val="1A1A1A"/>
+                </a:solidFill>
+              </a:rPr>
+              <a:t>Opposing Trade Interval sets the gap between one trade and the opposite one.</a:t>
+            </a:r>
+          </a:p>
+        </p:txBody>
+      </p:sp>
+      <p:sp>
+        <p:nvSpPr>
+          <p:cNvPr id="6" name="TextBox 5"/>
+          <p:cNvSpPr txBox="1"/>
+          <p:nvPr/>
+        </p:nvSpPr>
+        <p:spPr>
+          <a:xfrm>
+            <a:off x="502920" y="6382512"/>
+            <a:ext cx="11185855" cy="310896"/>
+          </a:xfrm>
+          <a:prstGeom prst="rect">
+            <a:avLst/>
+          </a:prstGeom>
+          <a:noFill/>
+        </p:spPr>
+        <p:txBody>
+          <a:bodyPr wrap="square">
+            <a:spAutoFit/>
+          </a:bodyPr>
+          <a:lstStyle/>
+          <a:p>
+            <a:pPr algn="r"/>
+            <a:r>
+              <a:rPr sz="900" b="0">
+                <a:solidFill>
+                  <a:srgbClr val="6B6B6B"/>
+                </a:solidFill>
+              </a:rPr>
+              <a:t>docs/new-user-procedure/11-how-far-price-must-move.md</a:t>
             </a:r>
           </a:p>
         </p:txBody>
@@ -3494,7 +3668,7 @@
     <p:bg>
       <p:bgPr>
         <a:solidFill>
-          <a:srgbClr val="121216"/>
+          <a:srgbClr val="FFFFFF"/>
         </a:solidFill>
         <a:effectLst/>
       </p:bgPr>
@@ -3514,40 +3688,69 @@
         </p:nvSpPr>
         <p:spPr>
           <a:xfrm>
-            <a:off x="548640" y="457200"/>
-            <a:ext cx="11094415" cy="914400"/>
-          </a:xfrm>
-          <a:prstGeom prst="rect">
-            <a:avLst/>
-          </a:prstGeom>
-          <a:noFill/>
-        </p:spPr>
-        <p:txBody>
-          <a:bodyPr wrap="square" lIns="0" rIns="0" tIns="0" bIns="0">
-            <a:spAutoFit/>
-          </a:bodyPr>
-          <a:lstStyle/>
-          <a:p>
-            <a:pPr>
-              <a:spcAft>
-                <a:spcPts val="1600"/>
-              </a:spcAft>
-            </a:pPr>
-            <a:r>
-              <a:rPr sz="3600" b="1">
-                <a:solidFill>
-                  <a:srgbClr val="FFFFFF"/>
-                </a:solidFill>
-                <a:latin typeface="Cambria"/>
+            <a:off x="502920" y="310896"/>
+            <a:ext cx="11185855" cy="640080"/>
+          </a:xfrm>
+          <a:prstGeom prst="rect">
+            <a:avLst/>
+          </a:prstGeom>
+          <a:noFill/>
+        </p:spPr>
+        <p:txBody>
+          <a:bodyPr wrap="square">
+            <a:spAutoFit/>
+          </a:bodyPr>
+          <a:lstStyle/>
+          <a:p>
+            <a:pPr algn="l"/>
+            <a:r>
+              <a:rPr sz="2600" b="1">
+                <a:solidFill>
+                  <a:srgbClr val="1F3A68"/>
+                </a:solidFill>
               </a:rPr>
               <a:t>Step 12 — What it watches</a:t>
+            </a:r>
+          </a:p>
+        </p:txBody>
+      </p:sp>
+      <p:sp>
+        <p:nvSpPr>
+          <p:cNvPr id="3" name="TextBox 2"/>
+          <p:cNvSpPr txBox="1"/>
+          <p:nvPr/>
+        </p:nvSpPr>
+        <p:spPr>
+          <a:xfrm>
+            <a:off x="502920" y="969264"/>
+            <a:ext cx="11185855" cy="566928"/>
+          </a:xfrm>
+          <a:prstGeom prst="rect">
+            <a:avLst/>
+          </a:prstGeom>
+          <a:noFill/>
+        </p:spPr>
+        <p:txBody>
+          <a:bodyPr wrap="square">
+            <a:spAutoFit/>
+          </a:bodyPr>
+          <a:lstStyle/>
+          <a:p>
+            <a:pPr algn="l"/>
+            <a:r>
+              <a:rPr sz="1300" b="0">
+                <a:solidFill>
+                  <a:srgbClr val="6B6B6B"/>
+                </a:solidFill>
+              </a:rPr>
+              <a:t>TA Timeframe opens on 1h.</a:t>
             </a:r>
           </a:p>
         </p:txBody>
       </p:sp>
       <p:pic>
         <p:nvPicPr>
-          <p:cNvPr id="3" name="Picture 2" descr="step-12-what-it-watches.png"/>
+          <p:cNvPr id="4" name="Picture 3" descr="step-12-what-it-watches.png"/>
           <p:cNvPicPr>
             <a:picLocks noChangeAspect="1"/>
           </p:cNvPicPr>
@@ -3561,8 +3764,8 @@
         </p:blipFill>
         <p:spPr>
           <a:xfrm>
-            <a:off x="857097" y="2083117"/>
-            <a:ext cx="10477500" cy="2600325"/>
+            <a:off x="502920" y="2178097"/>
+            <a:ext cx="11185855" cy="2776126"/>
           </a:xfrm>
           <a:prstGeom prst="rect">
             <a:avLst/>
@@ -3571,39 +3774,68 @@
       </p:pic>
       <p:sp>
         <p:nvSpPr>
-          <p:cNvPr id="4" name="TextBox 3"/>
-          <p:cNvSpPr txBox="1"/>
-          <p:nvPr/>
-        </p:nvSpPr>
-        <p:spPr>
-          <a:xfrm>
-            <a:off x="548640" y="5440680"/>
-            <a:ext cx="11094415" cy="914400"/>
-          </a:xfrm>
-          <a:prstGeom prst="rect">
-            <a:avLst/>
-          </a:prstGeom>
-          <a:noFill/>
-        </p:spPr>
-        <p:txBody>
-          <a:bodyPr wrap="square" lIns="0" rIns="0" tIns="0" bIns="0">
-            <a:spAutoFit/>
-          </a:bodyPr>
-          <a:lstStyle/>
-          <a:p>
-            <a:pPr>
-              <a:spcAft>
-                <a:spcPts val="1600"/>
-              </a:spcAft>
-            </a:pPr>
-            <a:r>
-              <a:rPr sz="2200" b="1">
-                <a:solidFill>
-                  <a:srgbClr val="FFB000"/>
-                </a:solidFill>
-                <a:latin typeface="Calibri"/>
-              </a:rPr>
-              <a:t>Leave TA Timeframe on 1h.</a:t>
+          <p:cNvPr id="5" name="TextBox 4"/>
+          <p:cNvSpPr txBox="1"/>
+          <p:nvPr/>
+        </p:nvSpPr>
+        <p:spPr>
+          <a:xfrm>
+            <a:off x="502920" y="5614416"/>
+            <a:ext cx="11185855" cy="658368"/>
+          </a:xfrm>
+          <a:prstGeom prst="rect">
+            <a:avLst/>
+          </a:prstGeom>
+          <a:noFill/>
+        </p:spPr>
+        <p:txBody>
+          <a:bodyPr wrap="square">
+            <a:spAutoFit/>
+          </a:bodyPr>
+          <a:lstStyle/>
+          <a:p>
+            <a:pPr algn="l"/>
+            <a:r>
+              <a:rPr sz="1500" b="1">
+                <a:solidFill>
+                  <a:srgbClr val="1A1A1A"/>
+                </a:solidFill>
+              </a:rPr>
+              <a:t>TA Timeframe picks the candle size every indicator reads.</a:t>
+            </a:r>
+          </a:p>
+        </p:txBody>
+      </p:sp>
+      <p:sp>
+        <p:nvSpPr>
+          <p:cNvPr id="6" name="TextBox 5"/>
+          <p:cNvSpPr txBox="1"/>
+          <p:nvPr/>
+        </p:nvSpPr>
+        <p:spPr>
+          <a:xfrm>
+            <a:off x="502920" y="6382512"/>
+            <a:ext cx="11185855" cy="310896"/>
+          </a:xfrm>
+          <a:prstGeom prst="rect">
+            <a:avLst/>
+          </a:prstGeom>
+          <a:noFill/>
+        </p:spPr>
+        <p:txBody>
+          <a:bodyPr wrap="square">
+            <a:spAutoFit/>
+          </a:bodyPr>
+          <a:lstStyle/>
+          <a:p>
+            <a:pPr algn="r"/>
+            <a:r>
+              <a:rPr sz="900" b="0">
+                <a:solidFill>
+                  <a:srgbClr val="6B6B6B"/>
+                </a:solidFill>
+              </a:rPr>
+              <a:t>docs/new-user-procedure/12-what-it-watches.md</a:t>
             </a:r>
           </a:p>
         </p:txBody>
@@ -3622,7 +3854,7 @@
     <p:bg>
       <p:bgPr>
         <a:solidFill>
-          <a:srgbClr val="121216"/>
+          <a:srgbClr val="FFFFFF"/>
         </a:solidFill>
         <a:effectLst/>
       </p:bgPr>
@@ -3642,40 +3874,69 @@
         </p:nvSpPr>
         <p:spPr>
           <a:xfrm>
-            <a:off x="548640" y="457200"/>
-            <a:ext cx="11094415" cy="914400"/>
-          </a:xfrm>
-          <a:prstGeom prst="rect">
-            <a:avLst/>
-          </a:prstGeom>
-          <a:noFill/>
-        </p:spPr>
-        <p:txBody>
-          <a:bodyPr wrap="square" lIns="0" rIns="0" tIns="0" bIns="0">
-            <a:spAutoFit/>
-          </a:bodyPr>
-          <a:lstStyle/>
-          <a:p>
-            <a:pPr>
-              <a:spcAft>
-                <a:spcPts val="1600"/>
-              </a:spcAft>
-            </a:pPr>
-            <a:r>
-              <a:rPr sz="3600" b="1">
-                <a:solidFill>
-                  <a:srgbClr val="FFFFFF"/>
-                </a:solidFill>
-                <a:latin typeface="Cambria"/>
+            <a:off x="502920" y="310896"/>
+            <a:ext cx="11185855" cy="640080"/>
+          </a:xfrm>
+          <a:prstGeom prst="rect">
+            <a:avLst/>
+          </a:prstGeom>
+          <a:noFill/>
+        </p:spPr>
+        <p:txBody>
+          <a:bodyPr wrap="square">
+            <a:spAutoFit/>
+          </a:bodyPr>
+          <a:lstStyle/>
+          <a:p>
+            <a:pPr algn="l"/>
+            <a:r>
+              <a:rPr sz="2600" b="1">
+                <a:solidFill>
+                  <a:srgbClr val="1F3A68"/>
+                </a:solidFill>
               </a:rPr>
               <a:t>Step 13 — Set the Target Balance</a:t>
+            </a:r>
+          </a:p>
+        </p:txBody>
+      </p:sp>
+      <p:sp>
+        <p:nvSpPr>
+          <p:cNvPr id="3" name="TextBox 2"/>
+          <p:cNvSpPr txBox="1"/>
+          <p:nvPr/>
+        </p:nvSpPr>
+        <p:spPr>
+          <a:xfrm>
+            <a:off x="502920" y="969264"/>
+            <a:ext cx="11185855" cy="566928"/>
+          </a:xfrm>
+          <a:prstGeom prst="rect">
+            <a:avLst/>
+          </a:prstGeom>
+          <a:noFill/>
+        </p:spPr>
+        <p:txBody>
+          <a:bodyPr wrap="square">
+            <a:spAutoFit/>
+          </a:bodyPr>
+          <a:lstStyle/>
+          <a:p>
+            <a:pPr algn="l"/>
+            <a:r>
+              <a:rPr sz="1300" b="0">
+                <a:solidFill>
+                  <a:srgbClr val="6B6B6B"/>
+                </a:solidFill>
+              </a:rPr>
+              <a:t>Target Balance opens at $ 200.00.</a:t>
             </a:r>
           </a:p>
         </p:txBody>
       </p:sp>
       <p:pic>
         <p:nvPicPr>
-          <p:cNvPr id="3" name="Picture 2" descr="step-13-set-the-target-balance.png"/>
+          <p:cNvPr id="4" name="Picture 3" descr="step-13-set-the-target-balance.png"/>
           <p:cNvPicPr>
             <a:picLocks noChangeAspect="1"/>
           </p:cNvPicPr>
@@ -3689,8 +3950,8 @@
         </p:blipFill>
         <p:spPr>
           <a:xfrm>
-            <a:off x="2645281" y="1554480"/>
-            <a:ext cx="6901132" cy="3657600"/>
+            <a:off x="2472753" y="1645920"/>
+            <a:ext cx="7246188" cy="3840480"/>
           </a:xfrm>
           <a:prstGeom prst="rect">
             <a:avLst/>
@@ -3699,39 +3960,68 @@
       </p:pic>
       <p:sp>
         <p:nvSpPr>
-          <p:cNvPr id="4" name="TextBox 3"/>
-          <p:cNvSpPr txBox="1"/>
-          <p:nvPr/>
-        </p:nvSpPr>
-        <p:spPr>
-          <a:xfrm>
-            <a:off x="548640" y="5440680"/>
-            <a:ext cx="11094415" cy="914400"/>
-          </a:xfrm>
-          <a:prstGeom prst="rect">
-            <a:avLst/>
-          </a:prstGeom>
-          <a:noFill/>
-        </p:spPr>
-        <p:txBody>
-          <a:bodyPr wrap="square" lIns="0" rIns="0" tIns="0" bIns="0">
-            <a:spAutoFit/>
-          </a:bodyPr>
-          <a:lstStyle/>
-          <a:p>
-            <a:pPr>
-              <a:spcAft>
-                <a:spcPts val="1600"/>
-              </a:spcAft>
-            </a:pPr>
-            <a:r>
-              <a:rPr sz="2200" b="1">
-                <a:solidFill>
-                  <a:srgbClr val="FFB000"/>
-                </a:solidFill>
-                <a:latin typeface="Calibri"/>
+          <p:cNvPr id="5" name="TextBox 4"/>
+          <p:cNvSpPr txBox="1"/>
+          <p:nvPr/>
+        </p:nvSpPr>
+        <p:spPr>
+          <a:xfrm>
+            <a:off x="502920" y="5614416"/>
+            <a:ext cx="11185855" cy="658368"/>
+          </a:xfrm>
+          <a:prstGeom prst="rect">
+            <a:avLst/>
+          </a:prstGeom>
+          <a:noFill/>
+        </p:spPr>
+        <p:txBody>
+          <a:bodyPr wrap="square">
+            <a:spAutoFit/>
+          </a:bodyPr>
+          <a:lstStyle/>
+          <a:p>
+            <a:pPr algn="l"/>
+            <a:r>
+              <a:rPr sz="1500" b="1">
+                <a:solidFill>
+                  <a:srgbClr val="1A1A1A"/>
+                </a:solidFill>
               </a:rPr>
               <a:t>Set Target Balance.</a:t>
+            </a:r>
+          </a:p>
+        </p:txBody>
+      </p:sp>
+      <p:sp>
+        <p:nvSpPr>
+          <p:cNvPr id="6" name="TextBox 5"/>
+          <p:cNvSpPr txBox="1"/>
+          <p:nvPr/>
+        </p:nvSpPr>
+        <p:spPr>
+          <a:xfrm>
+            <a:off x="502920" y="6382512"/>
+            <a:ext cx="11185855" cy="310896"/>
+          </a:xfrm>
+          <a:prstGeom prst="rect">
+            <a:avLst/>
+          </a:prstGeom>
+          <a:noFill/>
+        </p:spPr>
+        <p:txBody>
+          <a:bodyPr wrap="square">
+            <a:spAutoFit/>
+          </a:bodyPr>
+          <a:lstStyle/>
+          <a:p>
+            <a:pPr algn="r"/>
+            <a:r>
+              <a:rPr sz="900" b="0">
+                <a:solidFill>
+                  <a:srgbClr val="6B6B6B"/>
+                </a:solidFill>
+              </a:rPr>
+              <a:t>docs/new-user-procedure/13-set-the-target-balance.md</a:t>
             </a:r>
           </a:p>
         </p:txBody>
@@ -3750,7 +4040,7 @@
     <p:bg>
       <p:bgPr>
         <a:solidFill>
-          <a:srgbClr val="121216"/>
+          <a:srgbClr val="FFFFFF"/>
         </a:solidFill>
         <a:effectLst/>
       </p:bgPr>
@@ -3770,40 +4060,69 @@
         </p:nvSpPr>
         <p:spPr>
           <a:xfrm>
-            <a:off x="548640" y="457200"/>
-            <a:ext cx="11094415" cy="914400"/>
-          </a:xfrm>
-          <a:prstGeom prst="rect">
-            <a:avLst/>
-          </a:prstGeom>
-          <a:noFill/>
-        </p:spPr>
-        <p:txBody>
-          <a:bodyPr wrap="square" lIns="0" rIns="0" tIns="0" bIns="0">
-            <a:spAutoFit/>
-          </a:bodyPr>
-          <a:lstStyle/>
-          <a:p>
-            <a:pPr>
-              <a:spcAft>
-                <a:spcPts val="1600"/>
-              </a:spcAft>
-            </a:pPr>
-            <a:r>
-              <a:rPr sz="3600" b="1">
-                <a:solidFill>
-                  <a:srgbClr val="FFFFFF"/>
-                </a:solidFill>
-                <a:latin typeface="Cambria"/>
+            <a:off x="502920" y="310896"/>
+            <a:ext cx="11185855" cy="640080"/>
+          </a:xfrm>
+          <a:prstGeom prst="rect">
+            <a:avLst/>
+          </a:prstGeom>
+          <a:noFill/>
+        </p:spPr>
+        <p:txBody>
+          <a:bodyPr wrap="square">
+            <a:spAutoFit/>
+          </a:bodyPr>
+          <a:lstStyle/>
+          <a:p>
+            <a:pPr algn="l"/>
+            <a:r>
+              <a:rPr sz="2600" b="1">
+                <a:solidFill>
+                  <a:srgbClr val="1F3A68"/>
+                </a:solidFill>
               </a:rPr>
               <a:t>Step 14 — The price window</a:t>
+            </a:r>
+          </a:p>
+        </p:txBody>
+      </p:sp>
+      <p:sp>
+        <p:nvSpPr>
+          <p:cNvPr id="3" name="TextBox 2"/>
+          <p:cNvSpPr txBox="1"/>
+          <p:nvPr/>
+        </p:nvSpPr>
+        <p:spPr>
+          <a:xfrm>
+            <a:off x="502920" y="969264"/>
+            <a:ext cx="11185855" cy="566928"/>
+          </a:xfrm>
+          <a:prstGeom prst="rect">
+            <a:avLst/>
+          </a:prstGeom>
+          <a:noFill/>
+        </p:spPr>
+        <p:txBody>
+          <a:bodyPr wrap="square">
+            <a:spAutoFit/>
+          </a:bodyPr>
+          <a:lstStyle/>
+          <a:p>
+            <a:pPr algn="l"/>
+            <a:r>
+              <a:rPr sz="1300" b="0">
+                <a:solidFill>
+                  <a:srgbClr val="6B6B6B"/>
+                </a:solidFill>
+              </a:rPr>
+              <a:t>Max Entry Price opens at $ 0.00000000.</a:t>
             </a:r>
           </a:p>
         </p:txBody>
       </p:sp>
       <p:pic>
         <p:nvPicPr>
-          <p:cNvPr id="3" name="Picture 2" descr="step-14-the-price-window.png"/>
+          <p:cNvPr id="4" name="Picture 3" descr="step-14-the-price-window.png"/>
           <p:cNvPicPr>
             <a:picLocks noChangeAspect="1"/>
           </p:cNvPicPr>
@@ -3817,8 +4136,8 @@
         </p:blipFill>
         <p:spPr>
           <a:xfrm>
-            <a:off x="2792596" y="1554480"/>
-            <a:ext cx="6606502" cy="3657600"/>
+            <a:off x="2627434" y="1645920"/>
+            <a:ext cx="6936827" cy="3840480"/>
           </a:xfrm>
           <a:prstGeom prst="rect">
             <a:avLst/>
@@ -3827,39 +4146,68 @@
       </p:pic>
       <p:sp>
         <p:nvSpPr>
-          <p:cNvPr id="4" name="TextBox 3"/>
-          <p:cNvSpPr txBox="1"/>
-          <p:nvPr/>
-        </p:nvSpPr>
-        <p:spPr>
-          <a:xfrm>
-            <a:off x="548640" y="5440680"/>
-            <a:ext cx="11094415" cy="914400"/>
-          </a:xfrm>
-          <a:prstGeom prst="rect">
-            <a:avLst/>
-          </a:prstGeom>
-          <a:noFill/>
-        </p:spPr>
-        <p:txBody>
-          <a:bodyPr wrap="square" lIns="0" rIns="0" tIns="0" bIns="0">
-            <a:spAutoFit/>
-          </a:bodyPr>
-          <a:lstStyle/>
-          <a:p>
-            <a:pPr>
-              <a:spcAft>
-                <a:spcPts val="1600"/>
-              </a:spcAft>
-            </a:pPr>
-            <a:r>
-              <a:rPr sz="2200" b="1">
-                <a:solidFill>
-                  <a:srgbClr val="FFB000"/>
-                </a:solidFill>
-                <a:latin typeface="Calibri"/>
-              </a:rPr>
-              <a:t>Leave Max Entry Price and Min Entry Price at zero.</a:t>
+          <p:cNvPr id="5" name="TextBox 4"/>
+          <p:cNvSpPr txBox="1"/>
+          <p:nvPr/>
+        </p:nvSpPr>
+        <p:spPr>
+          <a:xfrm>
+            <a:off x="502920" y="5614416"/>
+            <a:ext cx="11185855" cy="658368"/>
+          </a:xfrm>
+          <a:prstGeom prst="rect">
+            <a:avLst/>
+          </a:prstGeom>
+          <a:noFill/>
+        </p:spPr>
+        <p:txBody>
+          <a:bodyPr wrap="square">
+            <a:spAutoFit/>
+          </a:bodyPr>
+          <a:lstStyle/>
+          <a:p>
+            <a:pPr algn="l"/>
+            <a:r>
+              <a:rPr sz="1500" b="1">
+                <a:solidFill>
+                  <a:srgbClr val="1A1A1A"/>
+                </a:solidFill>
+              </a:rPr>
+              <a:t>Max Entry Price and Min Entry Price fence the price an automatic buy may pay.</a:t>
+            </a:r>
+          </a:p>
+        </p:txBody>
+      </p:sp>
+      <p:sp>
+        <p:nvSpPr>
+          <p:cNvPr id="6" name="TextBox 5"/>
+          <p:cNvSpPr txBox="1"/>
+          <p:nvPr/>
+        </p:nvSpPr>
+        <p:spPr>
+          <a:xfrm>
+            <a:off x="502920" y="6382512"/>
+            <a:ext cx="11185855" cy="310896"/>
+          </a:xfrm>
+          <a:prstGeom prst="rect">
+            <a:avLst/>
+          </a:prstGeom>
+          <a:noFill/>
+        </p:spPr>
+        <p:txBody>
+          <a:bodyPr wrap="square">
+            <a:spAutoFit/>
+          </a:bodyPr>
+          <a:lstStyle/>
+          <a:p>
+            <a:pPr algn="r"/>
+            <a:r>
+              <a:rPr sz="900" b="0">
+                <a:solidFill>
+                  <a:srgbClr val="6B6B6B"/>
+                </a:solidFill>
+              </a:rPr>
+              <a:t>docs/new-user-procedure/14-the-price-window.md</a:t>
             </a:r>
           </a:p>
         </p:txBody>
@@ -3878,7 +4226,7 @@
     <p:bg>
       <p:bgPr>
         <a:solidFill>
-          <a:srgbClr val="121216"/>
+          <a:srgbClr val="FFFFFF"/>
         </a:solidFill>
         <a:effectLst/>
       </p:bgPr>
@@ -3898,40 +4246,69 @@
         </p:nvSpPr>
         <p:spPr>
           <a:xfrm>
-            <a:off x="548640" y="457200"/>
-            <a:ext cx="11094415" cy="914400"/>
-          </a:xfrm>
-          <a:prstGeom prst="rect">
-            <a:avLst/>
-          </a:prstGeom>
-          <a:noFill/>
-        </p:spPr>
-        <p:txBody>
-          <a:bodyPr wrap="square" lIns="0" rIns="0" tIns="0" bIns="0">
-            <a:spAutoFit/>
-          </a:bodyPr>
-          <a:lstStyle/>
-          <a:p>
-            <a:pPr>
-              <a:spcAft>
-                <a:spcPts val="1600"/>
-              </a:spcAft>
-            </a:pPr>
-            <a:r>
-              <a:rPr sz="3600" b="1">
-                <a:solidFill>
-                  <a:srgbClr val="FFFFFF"/>
-                </a:solidFill>
-                <a:latin typeface="Cambria"/>
+            <a:off x="502920" y="310896"/>
+            <a:ext cx="11185855" cy="640080"/>
+          </a:xfrm>
+          <a:prstGeom prst="rect">
+            <a:avLst/>
+          </a:prstGeom>
+          <a:noFill/>
+        </p:spPr>
+        <p:txBody>
+          <a:bodyPr wrap="square">
+            <a:spAutoFit/>
+          </a:bodyPr>
+          <a:lstStyle/>
+          <a:p>
+            <a:pPr algn="l"/>
+            <a:r>
+              <a:rPr sz="2600" b="1">
+                <a:solidFill>
+                  <a:srgbClr val="1F3A68"/>
+                </a:solidFill>
               </a:rPr>
               <a:t>Step 15 — What a cycle keeps</a:t>
+            </a:r>
+          </a:p>
+        </p:txBody>
+      </p:sp>
+      <p:sp>
+        <p:nvSpPr>
+          <p:cNvPr id="3" name="TextBox 2"/>
+          <p:cNvSpPr txBox="1"/>
+          <p:nvPr/>
+        </p:nvSpPr>
+        <p:spPr>
+          <a:xfrm>
+            <a:off x="502920" y="969264"/>
+            <a:ext cx="11185855" cy="566928"/>
+          </a:xfrm>
+          <a:prstGeom prst="rect">
+            <a:avLst/>
+          </a:prstGeom>
+          <a:noFill/>
+        </p:spPr>
+        <p:txBody>
+          <a:bodyPr wrap="square">
+            <a:spAutoFit/>
+          </a:bodyPr>
+          <a:lstStyle/>
+          <a:p>
+            <a:pPr algn="l"/>
+            <a:r>
+              <a:rPr sz="1300" b="0">
+                <a:solidFill>
+                  <a:srgbClr val="6B6B6B"/>
+                </a:solidFill>
+              </a:rPr>
+              <a:t>Scrum Fold Ratio opens at 100 %.</a:t>
             </a:r>
           </a:p>
         </p:txBody>
       </p:sp>
       <p:pic>
         <p:nvPicPr>
-          <p:cNvPr id="3" name="Picture 2" descr="step-15-what-a-cycle-keeps.png"/>
+          <p:cNvPr id="4" name="Picture 3" descr="step-15-what-a-cycle-keeps.png"/>
           <p:cNvPicPr>
             <a:picLocks noChangeAspect="1"/>
           </p:cNvPicPr>
@@ -3945,8 +4322,8 @@
         </p:blipFill>
         <p:spPr>
           <a:xfrm>
-            <a:off x="2792596" y="1554480"/>
-            <a:ext cx="6606502" cy="3657600"/>
+            <a:off x="2627434" y="1645920"/>
+            <a:ext cx="6936827" cy="3840480"/>
           </a:xfrm>
           <a:prstGeom prst="rect">
             <a:avLst/>
@@ -3955,39 +4332,68 @@
       </p:pic>
       <p:sp>
         <p:nvSpPr>
-          <p:cNvPr id="4" name="TextBox 3"/>
-          <p:cNvSpPr txBox="1"/>
-          <p:nvPr/>
-        </p:nvSpPr>
-        <p:spPr>
-          <a:xfrm>
-            <a:off x="548640" y="5440680"/>
-            <a:ext cx="11094415" cy="914400"/>
-          </a:xfrm>
-          <a:prstGeom prst="rect">
-            <a:avLst/>
-          </a:prstGeom>
-          <a:noFill/>
-        </p:spPr>
-        <p:txBody>
-          <a:bodyPr wrap="square" lIns="0" rIns="0" tIns="0" bIns="0">
-            <a:spAutoFit/>
-          </a:bodyPr>
-          <a:lstStyle/>
-          <a:p>
-            <a:pPr>
-              <a:spcAft>
-                <a:spcPts val="1600"/>
-              </a:spcAft>
-            </a:pPr>
-            <a:r>
-              <a:rPr sz="2200" b="1">
-                <a:solidFill>
-                  <a:srgbClr val="FFB000"/>
-                </a:solidFill>
-                <a:latin typeface="Calibri"/>
-              </a:rPr>
-              <a:t>Leave the last three rows as they open.</a:t>
+          <p:cNvPr id="5" name="TextBox 4"/>
+          <p:cNvSpPr txBox="1"/>
+          <p:nvPr/>
+        </p:nvSpPr>
+        <p:spPr>
+          <a:xfrm>
+            <a:off x="502920" y="5614416"/>
+            <a:ext cx="11185855" cy="658368"/>
+          </a:xfrm>
+          <a:prstGeom prst="rect">
+            <a:avLst/>
+          </a:prstGeom>
+          <a:noFill/>
+        </p:spPr>
+        <p:txBody>
+          <a:bodyPr wrap="square">
+            <a:spAutoFit/>
+          </a:bodyPr>
+          <a:lstStyle/>
+          <a:p>
+            <a:pPr algn="l"/>
+            <a:r>
+              <a:rPr sz="1500" b="1">
+                <a:solidFill>
+                  <a:srgbClr val="1A1A1A"/>
+                </a:solidFill>
+              </a:rPr>
+              <a:t>The last three rows decide what a finished cycle keeps.</a:t>
+            </a:r>
+          </a:p>
+        </p:txBody>
+      </p:sp>
+      <p:sp>
+        <p:nvSpPr>
+          <p:cNvPr id="6" name="TextBox 5"/>
+          <p:cNvSpPr txBox="1"/>
+          <p:nvPr/>
+        </p:nvSpPr>
+        <p:spPr>
+          <a:xfrm>
+            <a:off x="502920" y="6382512"/>
+            <a:ext cx="11185855" cy="310896"/>
+          </a:xfrm>
+          <a:prstGeom prst="rect">
+            <a:avLst/>
+          </a:prstGeom>
+          <a:noFill/>
+        </p:spPr>
+        <p:txBody>
+          <a:bodyPr wrap="square">
+            <a:spAutoFit/>
+          </a:bodyPr>
+          <a:lstStyle/>
+          <a:p>
+            <a:pPr algn="r"/>
+            <a:r>
+              <a:rPr sz="900" b="0">
+                <a:solidFill>
+                  <a:srgbClr val="6B6B6B"/>
+                </a:solidFill>
+              </a:rPr>
+              <a:t>docs/new-user-procedure/15-what-a-cycle-keeps.md</a:t>
             </a:r>
           </a:p>
         </p:txBody>
@@ -4006,7 +4412,7 @@
     <p:bg>
       <p:bgPr>
         <a:solidFill>
-          <a:srgbClr val="121216"/>
+          <a:srgbClr val="FFFFFF"/>
         </a:solidFill>
         <a:effectLst/>
       </p:bgPr>
@@ -4026,40 +4432,69 @@
         </p:nvSpPr>
         <p:spPr>
           <a:xfrm>
-            <a:off x="548640" y="457200"/>
-            <a:ext cx="11094415" cy="914400"/>
-          </a:xfrm>
-          <a:prstGeom prst="rect">
-            <a:avLst/>
-          </a:prstGeom>
-          <a:noFill/>
-        </p:spPr>
-        <p:txBody>
-          <a:bodyPr wrap="square" lIns="0" rIns="0" tIns="0" bIns="0">
-            <a:spAutoFit/>
-          </a:bodyPr>
-          <a:lstStyle/>
-          <a:p>
-            <a:pPr>
-              <a:spcAft>
-                <a:spcPts val="1600"/>
-              </a:spcAft>
-            </a:pPr>
-            <a:r>
-              <a:rPr sz="3600" b="1">
-                <a:solidFill>
-                  <a:srgbClr val="FFFFFF"/>
-                </a:solidFill>
-                <a:latin typeface="Cambria"/>
+            <a:off x="502920" y="310896"/>
+            <a:ext cx="11185855" cy="640080"/>
+          </a:xfrm>
+          <a:prstGeom prst="rect">
+            <a:avLst/>
+          </a:prstGeom>
+          <a:noFill/>
+        </p:spPr>
+        <p:txBody>
+          <a:bodyPr wrap="square">
+            <a:spAutoFit/>
+          </a:bodyPr>
+          <a:lstStyle/>
+          <a:p>
+            <a:pPr algn="l"/>
+            <a:r>
+              <a:rPr sz="2600" b="1">
+                <a:solidFill>
+                  <a:srgbClr val="1F3A68"/>
+                </a:solidFill>
               </a:rPr>
               <a:t>Step 16 — The reserve for a dip</a:t>
+            </a:r>
+          </a:p>
+        </p:txBody>
+      </p:sp>
+      <p:sp>
+        <p:nvSpPr>
+          <p:cNvPr id="3" name="TextBox 2"/>
+          <p:cNvSpPr txBox="1"/>
+          <p:nvPr/>
+        </p:nvSpPr>
+        <p:spPr>
+          <a:xfrm>
+            <a:off x="502920" y="969264"/>
+            <a:ext cx="11185855" cy="566928"/>
+          </a:xfrm>
+          <a:prstGeom prst="rect">
+            <a:avLst/>
+          </a:prstGeom>
+          <a:noFill/>
+        </p:spPr>
+        <p:txBody>
+          <a:bodyPr wrap="square">
+            <a:spAutoFit/>
+          </a:bodyPr>
+          <a:lstStyle/>
+          <a:p>
+            <a:pPr algn="l"/>
+            <a:r>
+              <a:rPr sz="1300" b="0">
+                <a:solidFill>
+                  <a:srgbClr val="6B6B6B"/>
+                </a:solidFill>
+              </a:rPr>
+              <a:t>Hedge Rebalance Active opens ticked. Press Next.</a:t>
             </a:r>
           </a:p>
         </p:txBody>
       </p:sp>
       <p:pic>
         <p:nvPicPr>
-          <p:cNvPr id="3" name="Picture 2" descr="step-16-the-reserve-for-a-dip.png"/>
+          <p:cNvPr id="4" name="Picture 3" descr="step-16-the-reserve-for-a-dip.png"/>
           <p:cNvPicPr>
             <a:picLocks noChangeAspect="1"/>
           </p:cNvPicPr>
@@ -4073,8 +4508,8 @@
         </p:blipFill>
         <p:spPr>
           <a:xfrm>
-            <a:off x="857097" y="2149792"/>
-            <a:ext cx="10477500" cy="2466975"/>
+            <a:off x="502920" y="2249280"/>
+            <a:ext cx="11185855" cy="2633760"/>
           </a:xfrm>
           <a:prstGeom prst="rect">
             <a:avLst/>
@@ -4083,39 +4518,68 @@
       </p:pic>
       <p:sp>
         <p:nvSpPr>
-          <p:cNvPr id="4" name="TextBox 3"/>
-          <p:cNvSpPr txBox="1"/>
-          <p:nvPr/>
-        </p:nvSpPr>
-        <p:spPr>
-          <a:xfrm>
-            <a:off x="548640" y="5440680"/>
-            <a:ext cx="11094415" cy="914400"/>
-          </a:xfrm>
-          <a:prstGeom prst="rect">
-            <a:avLst/>
-          </a:prstGeom>
-          <a:noFill/>
-        </p:spPr>
-        <p:txBody>
-          <a:bodyPr wrap="square" lIns="0" rIns="0" tIns="0" bIns="0">
-            <a:spAutoFit/>
-          </a:bodyPr>
-          <a:lstStyle/>
-          <a:p>
-            <a:pPr>
-              <a:spcAft>
-                <a:spcPts val="1600"/>
-              </a:spcAft>
-            </a:pPr>
-            <a:r>
-              <a:rPr sz="2200" b="1">
-                <a:solidFill>
-                  <a:srgbClr val="FFB000"/>
-                </a:solidFill>
-                <a:latin typeface="Calibri"/>
-              </a:rPr>
-              <a:t>Leave Hedge Rebalance Active ticked, then press Next.</a:t>
+          <p:cNvPr id="5" name="TextBox 4"/>
+          <p:cNvSpPr txBox="1"/>
+          <p:nvPr/>
+        </p:nvSpPr>
+        <p:spPr>
+          <a:xfrm>
+            <a:off x="502920" y="5614416"/>
+            <a:ext cx="11185855" cy="658368"/>
+          </a:xfrm>
+          <a:prstGeom prst="rect">
+            <a:avLst/>
+          </a:prstGeom>
+          <a:noFill/>
+        </p:spPr>
+        <p:txBody>
+          <a:bodyPr wrap="square">
+            <a:spAutoFit/>
+          </a:bodyPr>
+          <a:lstStyle/>
+          <a:p>
+            <a:pPr algn="l"/>
+            <a:r>
+              <a:rPr sz="1500" b="1">
+                <a:solidFill>
+                  <a:srgbClr val="1A1A1A"/>
+                </a:solidFill>
+              </a:rPr>
+              <a:t>Hedge Rebalance Active decides whether the dip reserve may be spent.</a:t>
+            </a:r>
+          </a:p>
+        </p:txBody>
+      </p:sp>
+      <p:sp>
+        <p:nvSpPr>
+          <p:cNvPr id="6" name="TextBox 5"/>
+          <p:cNvSpPr txBox="1"/>
+          <p:nvPr/>
+        </p:nvSpPr>
+        <p:spPr>
+          <a:xfrm>
+            <a:off x="502920" y="6382512"/>
+            <a:ext cx="11185855" cy="310896"/>
+          </a:xfrm>
+          <a:prstGeom prst="rect">
+            <a:avLst/>
+          </a:prstGeom>
+          <a:noFill/>
+        </p:spPr>
+        <p:txBody>
+          <a:bodyPr wrap="square">
+            <a:spAutoFit/>
+          </a:bodyPr>
+          <a:lstStyle/>
+          <a:p>
+            <a:pPr algn="r"/>
+            <a:r>
+              <a:rPr sz="900" b="0">
+                <a:solidFill>
+                  <a:srgbClr val="6B6B6B"/>
+                </a:solidFill>
+              </a:rPr>
+              <a:t>docs/new-user-procedure/16-the-reserve-for-a-dip.md</a:t>
             </a:r>
           </a:p>
         </p:txBody>
@@ -4134,7 +4598,7 @@
     <p:bg>
       <p:bgPr>
         <a:solidFill>
-          <a:srgbClr val="121216"/>
+          <a:srgbClr val="FFFFFF"/>
         </a:solidFill>
         <a:effectLst/>
       </p:bgPr>
@@ -4154,40 +4618,69 @@
         </p:nvSpPr>
         <p:spPr>
           <a:xfrm>
-            <a:off x="548640" y="457200"/>
-            <a:ext cx="11094415" cy="914400"/>
-          </a:xfrm>
-          <a:prstGeom prst="rect">
-            <a:avLst/>
-          </a:prstGeom>
-          <a:noFill/>
-        </p:spPr>
-        <p:txBody>
-          <a:bodyPr wrap="square" lIns="0" rIns="0" tIns="0" bIns="0">
-            <a:spAutoFit/>
-          </a:bodyPr>
-          <a:lstStyle/>
-          <a:p>
-            <a:pPr>
-              <a:spcAft>
-                <a:spcPts val="1600"/>
-              </a:spcAft>
-            </a:pPr>
-            <a:r>
-              <a:rPr sz="3600" b="1">
-                <a:solidFill>
-                  <a:srgbClr val="FFFFFF"/>
-                </a:solidFill>
-                <a:latin typeface="Cambria"/>
-              </a:rPr>
-              <a:t>Step 17 — Leave the shadow bot off</a:t>
+            <a:off x="502920" y="310896"/>
+            <a:ext cx="11185855" cy="640080"/>
+          </a:xfrm>
+          <a:prstGeom prst="rect">
+            <a:avLst/>
+          </a:prstGeom>
+          <a:noFill/>
+        </p:spPr>
+        <p:txBody>
+          <a:bodyPr wrap="square">
+            <a:spAutoFit/>
+          </a:bodyPr>
+          <a:lstStyle/>
+          <a:p>
+            <a:pPr algn="l"/>
+            <a:r>
+              <a:rPr sz="2600" b="1">
+                <a:solidFill>
+                  <a:srgbClr val="1F3A68"/>
+                </a:solidFill>
+              </a:rPr>
+              <a:t>Step 17 — The shadow bot</a:t>
+            </a:r>
+          </a:p>
+        </p:txBody>
+      </p:sp>
+      <p:sp>
+        <p:nvSpPr>
+          <p:cNvPr id="3" name="TextBox 2"/>
+          <p:cNvSpPr txBox="1"/>
+          <p:nvPr/>
+        </p:nvSpPr>
+        <p:spPr>
+          <a:xfrm>
+            <a:off x="502920" y="969264"/>
+            <a:ext cx="11185855" cy="566928"/>
+          </a:xfrm>
+          <a:prstGeom prst="rect">
+            <a:avLst/>
+          </a:prstGeom>
+          <a:noFill/>
+        </p:spPr>
+        <p:txBody>
+          <a:bodyPr wrap="square">
+            <a:spAutoFit/>
+          </a:bodyPr>
+          <a:lstStyle/>
+          <a:p>
+            <a:pPr algn="l"/>
+            <a:r>
+              <a:rPr sz="1300" b="0">
+                <a:solidFill>
+                  <a:srgbClr val="6B6B6B"/>
+                </a:solidFill>
+              </a:rPr>
+              <a:t>Enable Phantom Bots opens clear.</a:t>
             </a:r>
           </a:p>
         </p:txBody>
       </p:sp>
       <p:pic>
         <p:nvPicPr>
-          <p:cNvPr id="3" name="Picture 2" descr="step-17-leave-the-shadow-bot-off.png"/>
+          <p:cNvPr id="4" name="Picture 3" descr="step-17-leave-the-shadow-bot-off.png"/>
           <p:cNvPicPr>
             <a:picLocks noChangeAspect="1"/>
           </p:cNvPicPr>
@@ -4201,8 +4694,8 @@
         </p:blipFill>
         <p:spPr>
           <a:xfrm>
-            <a:off x="857097" y="2154555"/>
-            <a:ext cx="10477500" cy="2457450"/>
+            <a:off x="502920" y="2254364"/>
+            <a:ext cx="11185855" cy="2623591"/>
           </a:xfrm>
           <a:prstGeom prst="rect">
             <a:avLst/>
@@ -4211,39 +4704,68 @@
       </p:pic>
       <p:sp>
         <p:nvSpPr>
-          <p:cNvPr id="4" name="TextBox 3"/>
-          <p:cNvSpPr txBox="1"/>
-          <p:nvPr/>
-        </p:nvSpPr>
-        <p:spPr>
-          <a:xfrm>
-            <a:off x="548640" y="5440680"/>
-            <a:ext cx="11094415" cy="914400"/>
-          </a:xfrm>
-          <a:prstGeom prst="rect">
-            <a:avLst/>
-          </a:prstGeom>
-          <a:noFill/>
-        </p:spPr>
-        <p:txBody>
-          <a:bodyPr wrap="square" lIns="0" rIns="0" tIns="0" bIns="0">
-            <a:spAutoFit/>
-          </a:bodyPr>
-          <a:lstStyle/>
-          <a:p>
-            <a:pPr>
-              <a:spcAft>
-                <a:spcPts val="1600"/>
-              </a:spcAft>
-            </a:pPr>
-            <a:r>
-              <a:rPr sz="2200" b="1">
-                <a:solidFill>
-                  <a:srgbClr val="FFB000"/>
-                </a:solidFill>
-                <a:latin typeface="Calibri"/>
-              </a:rPr>
-              <a:t>Leave Enable Phantom Bots clear.</a:t>
+          <p:cNvPr id="5" name="TextBox 4"/>
+          <p:cNvSpPr txBox="1"/>
+          <p:nvPr/>
+        </p:nvSpPr>
+        <p:spPr>
+          <a:xfrm>
+            <a:off x="502920" y="5614416"/>
+            <a:ext cx="11185855" cy="658368"/>
+          </a:xfrm>
+          <a:prstGeom prst="rect">
+            <a:avLst/>
+          </a:prstGeom>
+          <a:noFill/>
+        </p:spPr>
+        <p:txBody>
+          <a:bodyPr wrap="square">
+            <a:spAutoFit/>
+          </a:bodyPr>
+          <a:lstStyle/>
+          <a:p>
+            <a:pPr algn="l"/>
+            <a:r>
+              <a:rPr sz="1500" b="1">
+                <a:solidFill>
+                  <a:srgbClr val="1A1A1A"/>
+                </a:solidFill>
+              </a:rPr>
+              <a:t>Enable Phantom Bots adds a slower reader above this bot.</a:t>
+            </a:r>
+          </a:p>
+        </p:txBody>
+      </p:sp>
+      <p:sp>
+        <p:nvSpPr>
+          <p:cNvPr id="6" name="TextBox 5"/>
+          <p:cNvSpPr txBox="1"/>
+          <p:nvPr/>
+        </p:nvSpPr>
+        <p:spPr>
+          <a:xfrm>
+            <a:off x="502920" y="6382512"/>
+            <a:ext cx="11185855" cy="310896"/>
+          </a:xfrm>
+          <a:prstGeom prst="rect">
+            <a:avLst/>
+          </a:prstGeom>
+          <a:noFill/>
+        </p:spPr>
+        <p:txBody>
+          <a:bodyPr wrap="square">
+            <a:spAutoFit/>
+          </a:bodyPr>
+          <a:lstStyle/>
+          <a:p>
+            <a:pPr algn="r"/>
+            <a:r>
+              <a:rPr sz="900" b="0">
+                <a:solidFill>
+                  <a:srgbClr val="6B6B6B"/>
+                </a:solidFill>
+              </a:rPr>
+              <a:t>docs/new-user-procedure/17-leave-the-shadow-bot-off.md</a:t>
             </a:r>
           </a:p>
         </p:txBody>
@@ -4262,7 +4784,7 @@
     <p:bg>
       <p:bgPr>
         <a:solidFill>
-          <a:srgbClr val="121216"/>
+          <a:srgbClr val="FFFFFF"/>
         </a:solidFill>
         <a:effectLst/>
       </p:bgPr>
@@ -4282,40 +4804,69 @@
         </p:nvSpPr>
         <p:spPr>
           <a:xfrm>
-            <a:off x="548640" y="457200"/>
-            <a:ext cx="11094415" cy="914400"/>
-          </a:xfrm>
-          <a:prstGeom prst="rect">
-            <a:avLst/>
-          </a:prstGeom>
-          <a:noFill/>
-        </p:spPr>
-        <p:txBody>
-          <a:bodyPr wrap="square" lIns="0" rIns="0" tIns="0" bIns="0">
-            <a:spAutoFit/>
-          </a:bodyPr>
-          <a:lstStyle/>
-          <a:p>
-            <a:pPr>
-              <a:spcAft>
-                <a:spcPts val="1600"/>
-              </a:spcAft>
-            </a:pPr>
-            <a:r>
-              <a:rPr sz="3600" b="1">
-                <a:solidFill>
-                  <a:srgbClr val="FFFFFF"/>
-                </a:solidFill>
-                <a:latin typeface="Cambria"/>
+            <a:off x="502920" y="310896"/>
+            <a:ext cx="11185855" cy="640080"/>
+          </a:xfrm>
+          <a:prstGeom prst="rect">
+            <a:avLst/>
+          </a:prstGeom>
+          <a:noFill/>
+        </p:spPr>
+        <p:txBody>
+          <a:bodyPr wrap="square">
+            <a:spAutoFit/>
+          </a:bodyPr>
+          <a:lstStyle/>
+          <a:p>
+            <a:pPr algn="l"/>
+            <a:r>
+              <a:rPr sz="2600" b="1">
+                <a:solidFill>
+                  <a:srgbClr val="1F3A68"/>
+                </a:solidFill>
               </a:rPr>
               <a:t>Step 18 — How long a lock holds</a:t>
+            </a:r>
+          </a:p>
+        </p:txBody>
+      </p:sp>
+      <p:sp>
+        <p:nvSpPr>
+          <p:cNvPr id="3" name="TextBox 2"/>
+          <p:cNvSpPr txBox="1"/>
+          <p:nvPr/>
+        </p:nvSpPr>
+        <p:spPr>
+          <a:xfrm>
+            <a:off x="502920" y="969264"/>
+            <a:ext cx="11185855" cy="566928"/>
+          </a:xfrm>
+          <a:prstGeom prst="rect">
+            <a:avLst/>
+          </a:prstGeom>
+          <a:noFill/>
+        </p:spPr>
+        <p:txBody>
+          <a:bodyPr wrap="square">
+            <a:spAutoFit/>
+          </a:bodyPr>
+          <a:lstStyle/>
+          <a:p>
+            <a:pPr algn="l"/>
+            <a:r>
+              <a:rPr sz="1300" b="0">
+                <a:solidFill>
+                  <a:srgbClr val="6B6B6B"/>
+                </a:solidFill>
+              </a:rPr>
+              <a:t>Candles to lock opens at 2.</a:t>
             </a:r>
           </a:p>
         </p:txBody>
       </p:sp>
       <p:pic>
         <p:nvPicPr>
-          <p:cNvPr id="3" name="Picture 2" descr="step-18-how-long-a-lock-holds.png"/>
+          <p:cNvPr id="4" name="Picture 3" descr="step-18-how-long-a-lock-holds.png"/>
           <p:cNvPicPr>
             <a:picLocks noChangeAspect="1"/>
           </p:cNvPicPr>
@@ -4329,8 +4880,8 @@
         </p:blipFill>
         <p:spPr>
           <a:xfrm>
-            <a:off x="857097" y="2068830"/>
-            <a:ext cx="10477500" cy="2628900"/>
+            <a:off x="502920" y="2162843"/>
+            <a:ext cx="11185855" cy="2806633"/>
           </a:xfrm>
           <a:prstGeom prst="rect">
             <a:avLst/>
@@ -4339,39 +4890,68 @@
       </p:pic>
       <p:sp>
         <p:nvSpPr>
-          <p:cNvPr id="4" name="TextBox 3"/>
-          <p:cNvSpPr txBox="1"/>
-          <p:nvPr/>
-        </p:nvSpPr>
-        <p:spPr>
-          <a:xfrm>
-            <a:off x="548640" y="5440680"/>
-            <a:ext cx="11094415" cy="914400"/>
-          </a:xfrm>
-          <a:prstGeom prst="rect">
-            <a:avLst/>
-          </a:prstGeom>
-          <a:noFill/>
-        </p:spPr>
-        <p:txBody>
-          <a:bodyPr wrap="square" lIns="0" rIns="0" tIns="0" bIns="0">
-            <a:spAutoFit/>
-          </a:bodyPr>
-          <a:lstStyle/>
-          <a:p>
-            <a:pPr>
-              <a:spcAft>
-                <a:spcPts val="1600"/>
-              </a:spcAft>
-            </a:pPr>
-            <a:r>
-              <a:rPr sz="2200" b="1">
-                <a:solidFill>
-                  <a:srgbClr val="FFB000"/>
-                </a:solidFill>
-                <a:latin typeface="Calibri"/>
-              </a:rPr>
-              <a:t>Leave Candles to lock at 2.</a:t>
+          <p:cNvPr id="5" name="TextBox 4"/>
+          <p:cNvSpPr txBox="1"/>
+          <p:nvPr/>
+        </p:nvSpPr>
+        <p:spPr>
+          <a:xfrm>
+            <a:off x="502920" y="5614416"/>
+            <a:ext cx="11185855" cy="658368"/>
+          </a:xfrm>
+          <a:prstGeom prst="rect">
+            <a:avLst/>
+          </a:prstGeom>
+          <a:noFill/>
+        </p:spPr>
+        <p:txBody>
+          <a:bodyPr wrap="square">
+            <a:spAutoFit/>
+          </a:bodyPr>
+          <a:lstStyle/>
+          <a:p>
+            <a:pPr algn="l"/>
+            <a:r>
+              <a:rPr sz="1500" b="1">
+                <a:solidFill>
+                  <a:srgbClr val="1A1A1A"/>
+                </a:solidFill>
+              </a:rPr>
+              <a:t>Candles to lock sets how long a slower chart holds a trade back.</a:t>
+            </a:r>
+          </a:p>
+        </p:txBody>
+      </p:sp>
+      <p:sp>
+        <p:nvSpPr>
+          <p:cNvPr id="6" name="TextBox 5"/>
+          <p:cNvSpPr txBox="1"/>
+          <p:nvPr/>
+        </p:nvSpPr>
+        <p:spPr>
+          <a:xfrm>
+            <a:off x="502920" y="6382512"/>
+            <a:ext cx="11185855" cy="310896"/>
+          </a:xfrm>
+          <a:prstGeom prst="rect">
+            <a:avLst/>
+          </a:prstGeom>
+          <a:noFill/>
+        </p:spPr>
+        <p:txBody>
+          <a:bodyPr wrap="square">
+            <a:spAutoFit/>
+          </a:bodyPr>
+          <a:lstStyle/>
+          <a:p>
+            <a:pPr algn="r"/>
+            <a:r>
+              <a:rPr sz="900" b="0">
+                <a:solidFill>
+                  <a:srgbClr val="6B6B6B"/>
+                </a:solidFill>
+              </a:rPr>
+              <a:t>docs/new-user-procedure/18-how-long-a-lock-holds.md</a:t>
             </a:r>
           </a:p>
         </p:txBody>
@@ -4390,7 +4970,7 @@
     <p:bg>
       <p:bgPr>
         <a:solidFill>
-          <a:srgbClr val="121216"/>
+          <a:srgbClr val="FFFFFF"/>
         </a:solidFill>
         <a:effectLst/>
       </p:bgPr>
@@ -4410,40 +4990,69 @@
         </p:nvSpPr>
         <p:spPr>
           <a:xfrm>
-            <a:off x="548640" y="457200"/>
-            <a:ext cx="11094415" cy="914400"/>
-          </a:xfrm>
-          <a:prstGeom prst="rect">
-            <a:avLst/>
-          </a:prstGeom>
-          <a:noFill/>
-        </p:spPr>
-        <p:txBody>
-          <a:bodyPr wrap="square" lIns="0" rIns="0" tIns="0" bIns="0">
-            <a:spAutoFit/>
-          </a:bodyPr>
-          <a:lstStyle/>
-          <a:p>
-            <a:pPr>
-              <a:spcAft>
-                <a:spcPts val="1600"/>
-              </a:spcAft>
-            </a:pPr>
-            <a:r>
-              <a:rPr sz="3600" b="1">
-                <a:solidFill>
-                  <a:srgbClr val="FFFFFF"/>
-                </a:solidFill>
-                <a:latin typeface="Cambria"/>
+            <a:off x="502920" y="310896"/>
+            <a:ext cx="11185855" cy="640080"/>
+          </a:xfrm>
+          <a:prstGeom prst="rect">
+            <a:avLst/>
+          </a:prstGeom>
+          <a:noFill/>
+        </p:spPr>
+        <p:txBody>
+          <a:bodyPr wrap="square">
+            <a:spAutoFit/>
+          </a:bodyPr>
+          <a:lstStyle/>
+          <a:p>
+            <a:pPr algn="l"/>
+            <a:r>
+              <a:rPr sz="2600" b="1">
+                <a:solidFill>
+                  <a:srgbClr val="1F3A68"/>
+                </a:solidFill>
               </a:rPr>
               <a:t>Step 19 — Create the bot</a:t>
+            </a:r>
+          </a:p>
+        </p:txBody>
+      </p:sp>
+      <p:sp>
+        <p:nvSpPr>
+          <p:cNvPr id="3" name="TextBox 2"/>
+          <p:cNvSpPr txBox="1"/>
+          <p:nvPr/>
+        </p:nvSpPr>
+        <p:spPr>
+          <a:xfrm>
+            <a:off x="502920" y="969264"/>
+            <a:ext cx="11185855" cy="566928"/>
+          </a:xfrm>
+          <a:prstGeom prst="rect">
+            <a:avLst/>
+          </a:prstGeom>
+          <a:noFill/>
+        </p:spPr>
+        <p:txBody>
+          <a:bodyPr wrap="square">
+            <a:spAutoFit/>
+          </a:bodyPr>
+          <a:lstStyle/>
+          <a:p>
+            <a:pPr algn="l"/>
+            <a:r>
+              <a:rPr sz="1300" b="0">
+                <a:solidFill>
+                  <a:srgbClr val="6B6B6B"/>
+                </a:solidFill>
+              </a:rPr>
+              <a:t>Finish stands where Next stood. Press Finish.</a:t>
             </a:r>
           </a:p>
         </p:txBody>
       </p:sp>
       <p:pic>
         <p:nvPicPr>
-          <p:cNvPr id="3" name="Picture 2" descr="step-19-create-the-bot.png"/>
+          <p:cNvPr id="4" name="Picture 3" descr="step-19-create-the-bot.png"/>
           <p:cNvPicPr>
             <a:picLocks noChangeAspect="1"/>
           </p:cNvPicPr>
@@ -4457,8 +5066,8 @@
         </p:blipFill>
         <p:spPr>
           <a:xfrm>
-            <a:off x="857097" y="2611755"/>
-            <a:ext cx="10477500" cy="1543050"/>
+            <a:off x="502920" y="2742474"/>
+            <a:ext cx="11185855" cy="1647371"/>
           </a:xfrm>
           <a:prstGeom prst="rect">
             <a:avLst/>
@@ -4467,39 +5076,68 @@
       </p:pic>
       <p:sp>
         <p:nvSpPr>
-          <p:cNvPr id="4" name="TextBox 3"/>
-          <p:cNvSpPr txBox="1"/>
-          <p:nvPr/>
-        </p:nvSpPr>
-        <p:spPr>
-          <a:xfrm>
-            <a:off x="548640" y="5440680"/>
-            <a:ext cx="11094415" cy="914400"/>
-          </a:xfrm>
-          <a:prstGeom prst="rect">
-            <a:avLst/>
-          </a:prstGeom>
-          <a:noFill/>
-        </p:spPr>
-        <p:txBody>
-          <a:bodyPr wrap="square" lIns="0" rIns="0" tIns="0" bIns="0">
-            <a:spAutoFit/>
-          </a:bodyPr>
-          <a:lstStyle/>
-          <a:p>
-            <a:pPr>
-              <a:spcAft>
-                <a:spcPts val="1600"/>
-              </a:spcAft>
-            </a:pPr>
-            <a:r>
-              <a:rPr sz="2200" b="1">
-                <a:solidFill>
-                  <a:srgbClr val="FFB000"/>
-                </a:solidFill>
-                <a:latin typeface="Calibri"/>
+          <p:cNvPr id="5" name="TextBox 4"/>
+          <p:cNvSpPr txBox="1"/>
+          <p:nvPr/>
+        </p:nvSpPr>
+        <p:spPr>
+          <a:xfrm>
+            <a:off x="502920" y="5614416"/>
+            <a:ext cx="11185855" cy="658368"/>
+          </a:xfrm>
+          <a:prstGeom prst="rect">
+            <a:avLst/>
+          </a:prstGeom>
+          <a:noFill/>
+        </p:spPr>
+        <p:txBody>
+          <a:bodyPr wrap="square">
+            <a:spAutoFit/>
+          </a:bodyPr>
+          <a:lstStyle/>
+          <a:p>
+            <a:pPr algn="l"/>
+            <a:r>
+              <a:rPr sz="1500" b="1">
+                <a:solidFill>
+                  <a:srgbClr val="1A1A1A"/>
+                </a:solidFill>
               </a:rPr>
               <a:t>Press Finish.</a:t>
+            </a:r>
+          </a:p>
+        </p:txBody>
+      </p:sp>
+      <p:sp>
+        <p:nvSpPr>
+          <p:cNvPr id="6" name="TextBox 5"/>
+          <p:cNvSpPr txBox="1"/>
+          <p:nvPr/>
+        </p:nvSpPr>
+        <p:spPr>
+          <a:xfrm>
+            <a:off x="502920" y="6382512"/>
+            <a:ext cx="11185855" cy="310896"/>
+          </a:xfrm>
+          <a:prstGeom prst="rect">
+            <a:avLst/>
+          </a:prstGeom>
+          <a:noFill/>
+        </p:spPr>
+        <p:txBody>
+          <a:bodyPr wrap="square">
+            <a:spAutoFit/>
+          </a:bodyPr>
+          <a:lstStyle/>
+          <a:p>
+            <a:pPr algn="r"/>
+            <a:r>
+              <a:rPr sz="900" b="0">
+                <a:solidFill>
+                  <a:srgbClr val="6B6B6B"/>
+                </a:solidFill>
+              </a:rPr>
+              <a:t>docs/new-user-procedure/19-create-the-bot.md</a:t>
             </a:r>
           </a:p>
         </p:txBody>
@@ -4518,7 +5156,7 @@
     <p:bg>
       <p:bgPr>
         <a:solidFill>
-          <a:srgbClr val="121216"/>
+          <a:srgbClr val="FFFFFF"/>
         </a:solidFill>
         <a:effectLst/>
       </p:bgPr>
@@ -4538,40 +5176,69 @@
         </p:nvSpPr>
         <p:spPr>
           <a:xfrm>
-            <a:off x="548640" y="457200"/>
-            <a:ext cx="11094415" cy="914400"/>
-          </a:xfrm>
-          <a:prstGeom prst="rect">
-            <a:avLst/>
-          </a:prstGeom>
-          <a:noFill/>
-        </p:spPr>
-        <p:txBody>
-          <a:bodyPr wrap="square" lIns="0" rIns="0" tIns="0" bIns="0">
-            <a:spAutoFit/>
-          </a:bodyPr>
-          <a:lstStyle/>
-          <a:p>
-            <a:pPr>
-              <a:spcAft>
-                <a:spcPts val="1600"/>
-              </a:spcAft>
-            </a:pPr>
-            <a:r>
-              <a:rPr sz="3600" b="1">
-                <a:solidFill>
-                  <a:srgbClr val="FFFFFF"/>
-                </a:solidFill>
-                <a:latin typeface="Cambria"/>
+            <a:off x="502920" y="310896"/>
+            <a:ext cx="11185855" cy="640080"/>
+          </a:xfrm>
+          <a:prstGeom prst="rect">
+            <a:avLst/>
+          </a:prstGeom>
+          <a:noFill/>
+        </p:spPr>
+        <p:txBody>
+          <a:bodyPr wrap="square">
+            <a:spAutoFit/>
+          </a:bodyPr>
+          <a:lstStyle/>
+          <a:p>
+            <a:pPr algn="l"/>
+            <a:r>
+              <a:rPr sz="2600" b="1">
+                <a:solidFill>
+                  <a:srgbClr val="1F3A68"/>
+                </a:solidFill>
               </a:rPr>
               <a:t>Step 2 — Take the newest release</a:t>
+            </a:r>
+          </a:p>
+        </p:txBody>
+      </p:sp>
+      <p:sp>
+        <p:nvSpPr>
+          <p:cNvPr id="3" name="TextBox 2"/>
+          <p:cNvSpPr txBox="1"/>
+          <p:nvPr/>
+        </p:nvSpPr>
+        <p:spPr>
+          <a:xfrm>
+            <a:off x="502920" y="969264"/>
+            <a:ext cx="11185855" cy="566928"/>
+          </a:xfrm>
+          <a:prstGeom prst="rect">
+            <a:avLst/>
+          </a:prstGeom>
+          <a:noFill/>
+        </p:spPr>
+        <p:txBody>
+          <a:bodyPr wrap="square">
+            <a:spAutoFit/>
+          </a:bodyPr>
+          <a:lstStyle/>
+          <a:p>
+            <a:pPr algn="l"/>
+            <a:r>
+              <a:rPr sz="1300" b="0">
+                <a:solidFill>
+                  <a:srgbClr val="6B6B6B"/>
+                </a:solidFill>
+              </a:rPr>
+              <a:t>The newest release wears Latest. Open that one.</a:t>
             </a:r>
           </a:p>
         </p:txBody>
       </p:sp>
       <p:pic>
         <p:nvPicPr>
-          <p:cNvPr id="3" name="Picture 2" descr="step-2-take-the-newest-release.png"/>
+          <p:cNvPr id="4" name="Picture 3" descr="step-2-take-the-newest-release.png"/>
           <p:cNvPicPr>
             <a:picLocks noChangeAspect="1"/>
           </p:cNvPicPr>
@@ -4585,8 +5252,8 @@
         </p:blipFill>
         <p:spPr>
           <a:xfrm>
-            <a:off x="3305022" y="1621155"/>
-            <a:ext cx="5581650" cy="3524250"/>
+            <a:off x="3054602" y="1645920"/>
+            <a:ext cx="6082490" cy="3840480"/>
           </a:xfrm>
           <a:prstGeom prst="rect">
             <a:avLst/>
@@ -4595,39 +5262,68 @@
       </p:pic>
       <p:sp>
         <p:nvSpPr>
-          <p:cNvPr id="4" name="TextBox 3"/>
-          <p:cNvSpPr txBox="1"/>
-          <p:nvPr/>
-        </p:nvSpPr>
-        <p:spPr>
-          <a:xfrm>
-            <a:off x="548640" y="5440680"/>
-            <a:ext cx="11094415" cy="914400"/>
-          </a:xfrm>
-          <a:prstGeom prst="rect">
-            <a:avLst/>
-          </a:prstGeom>
-          <a:noFill/>
-        </p:spPr>
-        <p:txBody>
-          <a:bodyPr wrap="square" lIns="0" rIns="0" tIns="0" bIns="0">
-            <a:spAutoFit/>
-          </a:bodyPr>
-          <a:lstStyle/>
-          <a:p>
-            <a:pPr>
-              <a:spcAft>
-                <a:spcPts val="1600"/>
-              </a:spcAft>
-            </a:pPr>
-            <a:r>
-              <a:rPr sz="2200" b="1">
-                <a:solidFill>
-                  <a:srgbClr val="FFB000"/>
-                </a:solidFill>
-                <a:latin typeface="Calibri"/>
+          <p:cNvPr id="5" name="TextBox 4"/>
+          <p:cNvSpPr txBox="1"/>
+          <p:nvPr/>
+        </p:nvSpPr>
+        <p:spPr>
+          <a:xfrm>
+            <a:off x="502920" y="5614416"/>
+            <a:ext cx="11185855" cy="658368"/>
+          </a:xfrm>
+          <a:prstGeom prst="rect">
+            <a:avLst/>
+          </a:prstGeom>
+          <a:noFill/>
+        </p:spPr>
+        <p:txBody>
+          <a:bodyPr wrap="square">
+            <a:spAutoFit/>
+          </a:bodyPr>
+          <a:lstStyle/>
+          <a:p>
+            <a:pPr algn="l"/>
+            <a:r>
+              <a:rPr sz="1500" b="1">
+                <a:solidFill>
+                  <a:srgbClr val="1A1A1A"/>
+                </a:solidFill>
               </a:rPr>
               <a:t>Open the release marked Latest.</a:t>
+            </a:r>
+          </a:p>
+        </p:txBody>
+      </p:sp>
+      <p:sp>
+        <p:nvSpPr>
+          <p:cNvPr id="6" name="TextBox 5"/>
+          <p:cNvSpPr txBox="1"/>
+          <p:nvPr/>
+        </p:nvSpPr>
+        <p:spPr>
+          <a:xfrm>
+            <a:off x="502920" y="6382512"/>
+            <a:ext cx="11185855" cy="310896"/>
+          </a:xfrm>
+          <a:prstGeom prst="rect">
+            <a:avLst/>
+          </a:prstGeom>
+          <a:noFill/>
+        </p:spPr>
+        <p:txBody>
+          <a:bodyPr wrap="square">
+            <a:spAutoFit/>
+          </a:bodyPr>
+          <a:lstStyle/>
+          <a:p>
+            <a:pPr algn="r"/>
+            <a:r>
+              <a:rPr sz="900" b="0">
+                <a:solidFill>
+                  <a:srgbClr val="6B6B6B"/>
+                </a:solidFill>
+              </a:rPr>
+              <a:t>docs/new-user-procedure/02-take-the-newest-release.md</a:t>
             </a:r>
           </a:p>
         </p:txBody>
@@ -4646,7 +5342,7 @@
     <p:bg>
       <p:bgPr>
         <a:solidFill>
-          <a:srgbClr val="121216"/>
+          <a:srgbClr val="FFFFFF"/>
         </a:solidFill>
         <a:effectLst/>
       </p:bgPr>
@@ -4666,40 +5362,69 @@
         </p:nvSpPr>
         <p:spPr>
           <a:xfrm>
-            <a:off x="548640" y="457200"/>
-            <a:ext cx="11094415" cy="914400"/>
-          </a:xfrm>
-          <a:prstGeom prst="rect">
-            <a:avLst/>
-          </a:prstGeom>
-          <a:noFill/>
-        </p:spPr>
-        <p:txBody>
-          <a:bodyPr wrap="square" lIns="0" rIns="0" tIns="0" bIns="0">
-            <a:spAutoFit/>
-          </a:bodyPr>
-          <a:lstStyle/>
-          <a:p>
-            <a:pPr>
-              <a:spcAft>
-                <a:spcPts val="1600"/>
-              </a:spcAft>
-            </a:pPr>
-            <a:r>
-              <a:rPr sz="3600" b="1">
-                <a:solidFill>
-                  <a:srgbClr val="FFFFFF"/>
-                </a:solidFill>
-                <a:latin typeface="Cambria"/>
+            <a:off x="502920" y="310896"/>
+            <a:ext cx="11185855" cy="640080"/>
+          </a:xfrm>
+          <a:prstGeom prst="rect">
+            <a:avLst/>
+          </a:prstGeom>
+          <a:noFill/>
+        </p:spPr>
+        <p:txBody>
+          <a:bodyPr wrap="square">
+            <a:spAutoFit/>
+          </a:bodyPr>
+          <a:lstStyle/>
+          <a:p>
+            <a:pPr algn="l"/>
+            <a:r>
+              <a:rPr sz="2600" b="1">
+                <a:solidFill>
+                  <a:srgbClr val="1F3A68"/>
+                </a:solidFill>
               </a:rPr>
               <a:t>Step 20 — Make the fleet</a:t>
+            </a:r>
+          </a:p>
+        </p:txBody>
+      </p:sp>
+      <p:sp>
+        <p:nvSpPr>
+          <p:cNvPr id="3" name="TextBox 2"/>
+          <p:cNvSpPr txBox="1"/>
+          <p:nvPr/>
+        </p:nvSpPr>
+        <p:spPr>
+          <a:xfrm>
+            <a:off x="502920" y="969264"/>
+            <a:ext cx="11185855" cy="566928"/>
+          </a:xfrm>
+          <a:prstGeom prst="rect">
+            <a:avLst/>
+          </a:prstGeom>
+          <a:noFill/>
+        </p:spPr>
+        <p:txBody>
+          <a:bodyPr wrap="square">
+            <a:spAutoFit/>
+          </a:bodyPr>
+          <a:lstStyle/>
+          <a:p>
+            <a:pPr algn="l"/>
+            <a:r>
+              <a:rPr sz="1300" b="0">
+                <a:solidFill>
+                  <a:srgbClr val="6B6B6B"/>
+                </a:solidFill>
+              </a:rPr>
+              <a:t>Press Scan Now, then Refresh under Bot Swarm Topologies.</a:t>
             </a:r>
           </a:p>
         </p:txBody>
       </p:sp>
       <p:pic>
         <p:nvPicPr>
-          <p:cNvPr id="3" name="Picture 2" descr="step-20-make-the-fleet.png"/>
+          <p:cNvPr id="4" name="Picture 3" descr="step-20-make-the-fleet.png"/>
           <p:cNvPicPr>
             <a:picLocks noChangeAspect="1"/>
           </p:cNvPicPr>
@@ -4713,8 +5438,8 @@
         </p:blipFill>
         <p:spPr>
           <a:xfrm>
-            <a:off x="1145229" y="1554480"/>
-            <a:ext cx="9901237" cy="3657600"/>
+            <a:off x="897697" y="1645920"/>
+            <a:ext cx="10396300" cy="3840480"/>
           </a:xfrm>
           <a:prstGeom prst="rect">
             <a:avLst/>
@@ -4723,39 +5448,68 @@
       </p:pic>
       <p:sp>
         <p:nvSpPr>
-          <p:cNvPr id="4" name="TextBox 3"/>
-          <p:cNvSpPr txBox="1"/>
-          <p:nvPr/>
-        </p:nvSpPr>
-        <p:spPr>
-          <a:xfrm>
-            <a:off x="548640" y="5440680"/>
-            <a:ext cx="11094415" cy="914400"/>
-          </a:xfrm>
-          <a:prstGeom prst="rect">
-            <a:avLst/>
-          </a:prstGeom>
-          <a:noFill/>
-        </p:spPr>
-        <p:txBody>
-          <a:bodyPr wrap="square" lIns="0" rIns="0" tIns="0" bIns="0">
-            <a:spAutoFit/>
-          </a:bodyPr>
-          <a:lstStyle/>
-          <a:p>
-            <a:pPr>
-              <a:spcAft>
-                <a:spcPts val="1600"/>
-              </a:spcAft>
-            </a:pPr>
-            <a:r>
-              <a:rPr sz="2200" b="1">
-                <a:solidFill>
-                  <a:srgbClr val="FFB000"/>
-                </a:solidFill>
-                <a:latin typeface="Calibri"/>
+          <p:cNvPr id="5" name="TextBox 4"/>
+          <p:cNvSpPr txBox="1"/>
+          <p:nvPr/>
+        </p:nvSpPr>
+        <p:spPr>
+          <a:xfrm>
+            <a:off x="502920" y="5614416"/>
+            <a:ext cx="11185855" cy="658368"/>
+          </a:xfrm>
+          <a:prstGeom prst="rect">
+            <a:avLst/>
+          </a:prstGeom>
+          <a:noFill/>
+        </p:spPr>
+        <p:txBody>
+          <a:bodyPr wrap="square">
+            <a:spAutoFit/>
+          </a:bodyPr>
+          <a:lstStyle/>
+          <a:p>
+            <a:pPr algn="l"/>
+            <a:r>
+              <a:rPr sz="1500" b="1">
+                <a:solidFill>
+                  <a:srgbClr val="1A1A1A"/>
+                </a:solidFill>
               </a:rPr>
               <a:t>Open Inspector and scan. Press Preview on a topology proposal, then Adopt.</a:t>
+            </a:r>
+          </a:p>
+        </p:txBody>
+      </p:sp>
+      <p:sp>
+        <p:nvSpPr>
+          <p:cNvPr id="6" name="TextBox 5"/>
+          <p:cNvSpPr txBox="1"/>
+          <p:nvPr/>
+        </p:nvSpPr>
+        <p:spPr>
+          <a:xfrm>
+            <a:off x="502920" y="6382512"/>
+            <a:ext cx="11185855" cy="310896"/>
+          </a:xfrm>
+          <a:prstGeom prst="rect">
+            <a:avLst/>
+          </a:prstGeom>
+          <a:noFill/>
+        </p:spPr>
+        <p:txBody>
+          <a:bodyPr wrap="square">
+            <a:spAutoFit/>
+          </a:bodyPr>
+          <a:lstStyle/>
+          <a:p>
+            <a:pPr algn="r"/>
+            <a:r>
+              <a:rPr sz="900" b="0">
+                <a:solidFill>
+                  <a:srgbClr val="6B6B6B"/>
+                </a:solidFill>
+              </a:rPr>
+              <a:t>docs/new-user-procedure/20-make-the-fleet.md</a:t>
             </a:r>
           </a:p>
         </p:txBody>
@@ -4774,7 +5528,7 @@
     <p:bg>
       <p:bgPr>
         <a:solidFill>
-          <a:srgbClr val="121216"/>
+          <a:srgbClr val="FFFFFF"/>
         </a:solidFill>
         <a:effectLst/>
       </p:bgPr>
@@ -4794,40 +5548,69 @@
         </p:nvSpPr>
         <p:spPr>
           <a:xfrm>
-            <a:off x="548640" y="457200"/>
-            <a:ext cx="11094415" cy="914400"/>
-          </a:xfrm>
-          <a:prstGeom prst="rect">
-            <a:avLst/>
-          </a:prstGeom>
-          <a:noFill/>
-        </p:spPr>
-        <p:txBody>
-          <a:bodyPr wrap="square" lIns="0" rIns="0" tIns="0" bIns="0">
-            <a:spAutoFit/>
-          </a:bodyPr>
-          <a:lstStyle/>
-          <a:p>
-            <a:pPr>
-              <a:spcAft>
-                <a:spcPts val="1600"/>
-              </a:spcAft>
-            </a:pPr>
-            <a:r>
-              <a:rPr sz="3600" b="1">
-                <a:solidFill>
-                  <a:srgbClr val="FFFFFF"/>
-                </a:solidFill>
-                <a:latin typeface="Cambria"/>
+            <a:off x="502920" y="310896"/>
+            <a:ext cx="11185855" cy="640080"/>
+          </a:xfrm>
+          <a:prstGeom prst="rect">
+            <a:avLst/>
+          </a:prstGeom>
+          <a:noFill/>
+        </p:spPr>
+        <p:txBody>
+          <a:bodyPr wrap="square">
+            <a:spAutoFit/>
+          </a:bodyPr>
+          <a:lstStyle/>
+          <a:p>
+            <a:pPr algn="l"/>
+            <a:r>
+              <a:rPr sz="2600" b="1">
+                <a:solidFill>
+                  <a:srgbClr val="1F3A68"/>
+                </a:solidFill>
               </a:rPr>
               <a:t>Step 21 — Start the fleet</a:t>
+            </a:r>
+          </a:p>
+        </p:txBody>
+      </p:sp>
+      <p:sp>
+        <p:nvSpPr>
+          <p:cNvPr id="3" name="TextBox 2"/>
+          <p:cNvSpPr txBox="1"/>
+          <p:nvPr/>
+        </p:nvSpPr>
+        <p:spPr>
+          <a:xfrm>
+            <a:off x="502920" y="969264"/>
+            <a:ext cx="11185855" cy="566928"/>
+          </a:xfrm>
+          <a:prstGeom prst="rect">
+            <a:avLst/>
+          </a:prstGeom>
+          <a:noFill/>
+        </p:spPr>
+        <p:txBody>
+          <a:bodyPr wrap="square">
+            <a:spAutoFit/>
+          </a:bodyPr>
+          <a:lstStyle/>
+          <a:p>
+            <a:pPr algn="l"/>
+            <a:r>
+              <a:rPr sz="1300" b="0">
+                <a:solidFill>
+                  <a:srgbClr val="6B6B6B"/>
+                </a:solidFill>
+              </a:rPr>
+              <a:t>Press Start. The bot connects and begins trading.</a:t>
             </a:r>
           </a:p>
         </p:txBody>
       </p:sp>
       <p:pic>
         <p:nvPicPr>
-          <p:cNvPr id="3" name="Picture 2" descr="step-21-start-the-fleet.png"/>
+          <p:cNvPr id="4" name="Picture 3" descr="step-21-start-the-fleet.png"/>
           <p:cNvPicPr>
             <a:picLocks noChangeAspect="1"/>
           </p:cNvPicPr>
@@ -4841,8 +5624,8 @@
         </p:blipFill>
         <p:spPr>
           <a:xfrm>
-            <a:off x="548640" y="2733464"/>
-            <a:ext cx="11094415" cy="1299631"/>
+            <a:off x="502920" y="2910988"/>
+            <a:ext cx="11185855" cy="1310343"/>
           </a:xfrm>
           <a:prstGeom prst="rect">
             <a:avLst/>
@@ -4851,39 +5634,68 @@
       </p:pic>
       <p:sp>
         <p:nvSpPr>
-          <p:cNvPr id="4" name="TextBox 3"/>
-          <p:cNvSpPr txBox="1"/>
-          <p:nvPr/>
-        </p:nvSpPr>
-        <p:spPr>
-          <a:xfrm>
-            <a:off x="548640" y="5440680"/>
-            <a:ext cx="11094415" cy="914400"/>
-          </a:xfrm>
-          <a:prstGeom prst="rect">
-            <a:avLst/>
-          </a:prstGeom>
-          <a:noFill/>
-        </p:spPr>
-        <p:txBody>
-          <a:bodyPr wrap="square" lIns="0" rIns="0" tIns="0" bIns="0">
-            <a:spAutoFit/>
-          </a:bodyPr>
-          <a:lstStyle/>
-          <a:p>
-            <a:pPr>
-              <a:spcAft>
-                <a:spcPts val="1600"/>
-              </a:spcAft>
-            </a:pPr>
-            <a:r>
-              <a:rPr sz="2200" b="1">
-                <a:solidFill>
-                  <a:srgbClr val="FFB000"/>
-                </a:solidFill>
-                <a:latin typeface="Calibri"/>
+          <p:cNvPr id="5" name="TextBox 4"/>
+          <p:cNvSpPr txBox="1"/>
+          <p:nvPr/>
+        </p:nvSpPr>
+        <p:spPr>
+          <a:xfrm>
+            <a:off x="502920" y="5614416"/>
+            <a:ext cx="11185855" cy="658368"/>
+          </a:xfrm>
+          <a:prstGeom prst="rect">
+            <a:avLst/>
+          </a:prstGeom>
+          <a:noFill/>
+        </p:spPr>
+        <p:txBody>
+          <a:bodyPr wrap="square">
+            <a:spAutoFit/>
+          </a:bodyPr>
+          <a:lstStyle/>
+          <a:p>
+            <a:pPr algn="l"/>
+            <a:r>
+              <a:rPr sz="1500" b="1">
+                <a:solidFill>
+                  <a:srgbClr val="1A1A1A"/>
+                </a:solidFill>
               </a:rPr>
               <a:t>Start each bot from the bot list under Live.</a:t>
+            </a:r>
+          </a:p>
+        </p:txBody>
+      </p:sp>
+      <p:sp>
+        <p:nvSpPr>
+          <p:cNvPr id="6" name="TextBox 5"/>
+          <p:cNvSpPr txBox="1"/>
+          <p:nvPr/>
+        </p:nvSpPr>
+        <p:spPr>
+          <a:xfrm>
+            <a:off x="502920" y="6382512"/>
+            <a:ext cx="11185855" cy="310896"/>
+          </a:xfrm>
+          <a:prstGeom prst="rect">
+            <a:avLst/>
+          </a:prstGeom>
+          <a:noFill/>
+        </p:spPr>
+        <p:txBody>
+          <a:bodyPr wrap="square">
+            <a:spAutoFit/>
+          </a:bodyPr>
+          <a:lstStyle/>
+          <a:p>
+            <a:pPr algn="r"/>
+            <a:r>
+              <a:rPr sz="900" b="0">
+                <a:solidFill>
+                  <a:srgbClr val="6B6B6B"/>
+                </a:solidFill>
+              </a:rPr>
+              <a:t>docs/new-user-procedure/21-start-the-fleet.md</a:t>
             </a:r>
           </a:p>
         </p:txBody>
@@ -4902,7 +5714,7 @@
     <p:bg>
       <p:bgPr>
         <a:solidFill>
-          <a:srgbClr val="121216"/>
+          <a:srgbClr val="FFFFFF"/>
         </a:solidFill>
         <a:effectLst/>
       </p:bgPr>
@@ -4922,40 +5734,69 @@
         </p:nvSpPr>
         <p:spPr>
           <a:xfrm>
-            <a:off x="548640" y="457200"/>
-            <a:ext cx="11094415" cy="914400"/>
-          </a:xfrm>
-          <a:prstGeom prst="rect">
-            <a:avLst/>
-          </a:prstGeom>
-          <a:noFill/>
-        </p:spPr>
-        <p:txBody>
-          <a:bodyPr wrap="square" lIns="0" rIns="0" tIns="0" bIns="0">
-            <a:spAutoFit/>
-          </a:bodyPr>
-          <a:lstStyle/>
-          <a:p>
-            <a:pPr>
-              <a:spcAft>
-                <a:spcPts val="1600"/>
-              </a:spcAft>
-            </a:pPr>
-            <a:r>
-              <a:rPr sz="3600" b="1">
-                <a:solidFill>
-                  <a:srgbClr val="FFFFFF"/>
-                </a:solidFill>
-                <a:latin typeface="Cambria"/>
+            <a:off x="502920" y="310896"/>
+            <a:ext cx="11185855" cy="640080"/>
+          </a:xfrm>
+          <a:prstGeom prst="rect">
+            <a:avLst/>
+          </a:prstGeom>
+          <a:noFill/>
+        </p:spPr>
+        <p:txBody>
+          <a:bodyPr wrap="square">
+            <a:spAutoFit/>
+          </a:bodyPr>
+          <a:lstStyle/>
+          <a:p>
+            <a:pPr algn="l"/>
+            <a:r>
+              <a:rPr sz="2600" b="1">
+                <a:solidFill>
+                  <a:srgbClr val="1F3A68"/>
+                </a:solidFill>
               </a:rPr>
               <a:t>Step 22 — The Simulator</a:t>
+            </a:r>
+          </a:p>
+        </p:txBody>
+      </p:sp>
+      <p:sp>
+        <p:nvSpPr>
+          <p:cNvPr id="3" name="TextBox 2"/>
+          <p:cNvSpPr txBox="1"/>
+          <p:nvPr/>
+        </p:nvSpPr>
+        <p:spPr>
+          <a:xfrm>
+            <a:off x="502920" y="969264"/>
+            <a:ext cx="11185855" cy="566928"/>
+          </a:xfrm>
+          <a:prstGeom prst="rect">
+            <a:avLst/>
+          </a:prstGeom>
+          <a:noFill/>
+        </p:spPr>
+        <p:txBody>
+          <a:bodyPr wrap="square">
+            <a:spAutoFit/>
+          </a:bodyPr>
+          <a:lstStyle/>
+          <a:p>
+            <a:pPr algn="l"/>
+            <a:r>
+              <a:rPr sz="1300" b="0">
+                <a:solidFill>
+                  <a:srgbClr val="6B6B6B"/>
+                </a:solidFill>
+              </a:rPr>
+              <a:t>Press Sim. It stays empty until a run plays.</a:t>
             </a:r>
           </a:p>
         </p:txBody>
       </p:sp>
       <p:pic>
         <p:nvPicPr>
-          <p:cNvPr id="3" name="Picture 2" descr="step-22-the-simulator.png"/>
+          <p:cNvPr id="4" name="Picture 3" descr="step-22-the-simulator.png"/>
           <p:cNvPicPr>
             <a:picLocks noChangeAspect="1"/>
           </p:cNvPicPr>
@@ -4969,8 +5810,8 @@
         </p:blipFill>
         <p:spPr>
           <a:xfrm>
-            <a:off x="548640" y="2467991"/>
-            <a:ext cx="11094415" cy="1830578"/>
+            <a:off x="502920" y="2643327"/>
+            <a:ext cx="11185855" cy="1845666"/>
           </a:xfrm>
           <a:prstGeom prst="rect">
             <a:avLst/>
@@ -4979,39 +5820,68 @@
       </p:pic>
       <p:sp>
         <p:nvSpPr>
-          <p:cNvPr id="4" name="TextBox 3"/>
-          <p:cNvSpPr txBox="1"/>
-          <p:nvPr/>
-        </p:nvSpPr>
-        <p:spPr>
-          <a:xfrm>
-            <a:off x="548640" y="5440680"/>
-            <a:ext cx="11094415" cy="914400"/>
-          </a:xfrm>
-          <a:prstGeom prst="rect">
-            <a:avLst/>
-          </a:prstGeom>
-          <a:noFill/>
-        </p:spPr>
-        <p:txBody>
-          <a:bodyPr wrap="square" lIns="0" rIns="0" tIns="0" bIns="0">
-            <a:spAutoFit/>
-          </a:bodyPr>
-          <a:lstStyle/>
-          <a:p>
-            <a:pPr>
-              <a:spcAft>
-                <a:spcPts val="1600"/>
-              </a:spcAft>
-            </a:pPr>
-            <a:r>
-              <a:rPr sz="2200" b="1">
-                <a:solidFill>
-                  <a:srgbClr val="FFB000"/>
-                </a:solidFill>
-                <a:latin typeface="Calibri"/>
+          <p:cNvPr id="5" name="TextBox 4"/>
+          <p:cNvSpPr txBox="1"/>
+          <p:nvPr/>
+        </p:nvSpPr>
+        <p:spPr>
+          <a:xfrm>
+            <a:off x="502920" y="5614416"/>
+            <a:ext cx="11185855" cy="658368"/>
+          </a:xfrm>
+          <a:prstGeom prst="rect">
+            <a:avLst/>
+          </a:prstGeom>
+          <a:noFill/>
+        </p:spPr>
+        <p:txBody>
+          <a:bodyPr wrap="square">
+            <a:spAutoFit/>
+          </a:bodyPr>
+          <a:lstStyle/>
+          <a:p>
+            <a:pPr algn="l"/>
+            <a:r>
+              <a:rPr sz="1500" b="1">
+                <a:solidFill>
+                  <a:srgbClr val="1A1A1A"/>
+                </a:solidFill>
               </a:rPr>
               <a:t>Press Sim.</a:t>
+            </a:r>
+          </a:p>
+        </p:txBody>
+      </p:sp>
+      <p:sp>
+        <p:nvSpPr>
+          <p:cNvPr id="6" name="TextBox 5"/>
+          <p:cNvSpPr txBox="1"/>
+          <p:nvPr/>
+        </p:nvSpPr>
+        <p:spPr>
+          <a:xfrm>
+            <a:off x="502920" y="6382512"/>
+            <a:ext cx="11185855" cy="310896"/>
+          </a:xfrm>
+          <a:prstGeom prst="rect">
+            <a:avLst/>
+          </a:prstGeom>
+          <a:noFill/>
+        </p:spPr>
+        <p:txBody>
+          <a:bodyPr wrap="square">
+            <a:spAutoFit/>
+          </a:bodyPr>
+          <a:lstStyle/>
+          <a:p>
+            <a:pPr algn="r"/>
+            <a:r>
+              <a:rPr sz="900" b="0">
+                <a:solidFill>
+                  <a:srgbClr val="6B6B6B"/>
+                </a:solidFill>
+              </a:rPr>
+              <a:t>docs/new-user-procedure/22-the-simulator.md</a:t>
             </a:r>
           </a:p>
         </p:txBody>
@@ -5030,7 +5900,7 @@
     <p:bg>
       <p:bgPr>
         <a:solidFill>
-          <a:srgbClr val="121216"/>
+          <a:srgbClr val="FFFFFF"/>
         </a:solidFill>
         <a:effectLst/>
       </p:bgPr>
@@ -5050,40 +5920,69 @@
         </p:nvSpPr>
         <p:spPr>
           <a:xfrm>
-            <a:off x="548640" y="457200"/>
-            <a:ext cx="11094415" cy="914400"/>
-          </a:xfrm>
-          <a:prstGeom prst="rect">
-            <a:avLst/>
-          </a:prstGeom>
-          <a:noFill/>
-        </p:spPr>
-        <p:txBody>
-          <a:bodyPr wrap="square" lIns="0" rIns="0" tIns="0" bIns="0">
-            <a:spAutoFit/>
-          </a:bodyPr>
-          <a:lstStyle/>
-          <a:p>
-            <a:pPr>
-              <a:spcAft>
-                <a:spcPts val="1600"/>
-              </a:spcAft>
-            </a:pPr>
-            <a:r>
-              <a:rPr sz="3600" b="1">
-                <a:solidFill>
-                  <a:srgbClr val="FFFFFF"/>
-                </a:solidFill>
-                <a:latin typeface="Cambria"/>
+            <a:off x="502920" y="310896"/>
+            <a:ext cx="11185855" cy="640080"/>
+          </a:xfrm>
+          <a:prstGeom prst="rect">
+            <a:avLst/>
+          </a:prstGeom>
+          <a:noFill/>
+        </p:spPr>
+        <p:txBody>
+          <a:bodyPr wrap="square">
+            <a:spAutoFit/>
+          </a:bodyPr>
+          <a:lstStyle/>
+          <a:p>
+            <a:pPr algn="l"/>
+            <a:r>
+              <a:rPr sz="2600" b="1">
+                <a:solidFill>
+                  <a:srgbClr val="1F3A68"/>
+                </a:solidFill>
               </a:rPr>
               <a:t>Step 23 — Paper first</a:t>
+            </a:r>
+          </a:p>
+        </p:txBody>
+      </p:sp>
+      <p:sp>
+        <p:nvSpPr>
+          <p:cNvPr id="3" name="TextBox 2"/>
+          <p:cNvSpPr txBox="1"/>
+          <p:nvPr/>
+        </p:nvSpPr>
+        <p:spPr>
+          <a:xfrm>
+            <a:off x="502920" y="969264"/>
+            <a:ext cx="11185855" cy="566928"/>
+          </a:xfrm>
+          <a:prstGeom prst="rect">
+            <a:avLst/>
+          </a:prstGeom>
+          <a:noFill/>
+        </p:spPr>
+        <p:txBody>
+          <a:bodyPr wrap="square">
+            <a:spAutoFit/>
+          </a:bodyPr>
+          <a:lstStyle/>
+          <a:p>
+            <a:pPr algn="l"/>
+            <a:r>
+              <a:rPr sz="1300" b="0">
+                <a:solidFill>
+                  <a:srgbClr val="6B6B6B"/>
+                </a:solidFill>
+              </a:rPr>
+              <a:t>No fleet is loaded. Press Import Live Fleet.</a:t>
             </a:r>
           </a:p>
         </p:txBody>
       </p:sp>
       <p:pic>
         <p:nvPicPr>
-          <p:cNvPr id="3" name="Picture 2" descr="step-23-paper-first.png"/>
+          <p:cNvPr id="4" name="Picture 3" descr="step-23-paper-first.png"/>
           <p:cNvPicPr>
             <a:picLocks noChangeAspect="1"/>
           </p:cNvPicPr>
@@ -5097,8 +5996,8 @@
         </p:blipFill>
         <p:spPr>
           <a:xfrm>
-            <a:off x="2519210" y="1616392"/>
-            <a:ext cx="7153275" cy="3533775"/>
+            <a:off x="2208785" y="1645920"/>
+            <a:ext cx="7774124" cy="3840480"/>
           </a:xfrm>
           <a:prstGeom prst="rect">
             <a:avLst/>
@@ -5107,39 +6006,68 @@
       </p:pic>
       <p:sp>
         <p:nvSpPr>
-          <p:cNvPr id="4" name="TextBox 3"/>
-          <p:cNvSpPr txBox="1"/>
-          <p:nvPr/>
-        </p:nvSpPr>
-        <p:spPr>
-          <a:xfrm>
-            <a:off x="548640" y="5440680"/>
-            <a:ext cx="11094415" cy="914400"/>
-          </a:xfrm>
-          <a:prstGeom prst="rect">
-            <a:avLst/>
-          </a:prstGeom>
-          <a:noFill/>
-        </p:spPr>
-        <p:txBody>
-          <a:bodyPr wrap="square" lIns="0" rIns="0" tIns="0" bIns="0">
-            <a:spAutoFit/>
-          </a:bodyPr>
-          <a:lstStyle/>
-          <a:p>
-            <a:pPr>
-              <a:spcAft>
-                <a:spcPts val="1600"/>
-              </a:spcAft>
-            </a:pPr>
-            <a:r>
-              <a:rPr sz="2200" b="1">
-                <a:solidFill>
-                  <a:srgbClr val="FFB000"/>
-                </a:solidFill>
-                <a:latin typeface="Calibri"/>
+          <p:cNvPr id="5" name="TextBox 4"/>
+          <p:cNvSpPr txBox="1"/>
+          <p:nvPr/>
+        </p:nvSpPr>
+        <p:spPr>
+          <a:xfrm>
+            <a:off x="502920" y="5614416"/>
+            <a:ext cx="11185855" cy="658368"/>
+          </a:xfrm>
+          <a:prstGeom prst="rect">
+            <a:avLst/>
+          </a:prstGeom>
+          <a:noFill/>
+        </p:spPr>
+        <p:txBody>
+          <a:bodyPr wrap="square">
+            <a:spAutoFit/>
+          </a:bodyPr>
+          <a:lstStyle/>
+          <a:p>
+            <a:pPr algn="l"/>
+            <a:r>
+              <a:rPr sz="1500" b="1">
+                <a:solidFill>
+                  <a:srgbClr val="1A1A1A"/>
+                </a:solidFill>
               </a:rPr>
               <a:t>Press Import Live Fleet.</a:t>
+            </a:r>
+          </a:p>
+        </p:txBody>
+      </p:sp>
+      <p:sp>
+        <p:nvSpPr>
+          <p:cNvPr id="6" name="TextBox 5"/>
+          <p:cNvSpPr txBox="1"/>
+          <p:nvPr/>
+        </p:nvSpPr>
+        <p:spPr>
+          <a:xfrm>
+            <a:off x="502920" y="6382512"/>
+            <a:ext cx="11185855" cy="310896"/>
+          </a:xfrm>
+          <a:prstGeom prst="rect">
+            <a:avLst/>
+          </a:prstGeom>
+          <a:noFill/>
+        </p:spPr>
+        <p:txBody>
+          <a:bodyPr wrap="square">
+            <a:spAutoFit/>
+          </a:bodyPr>
+          <a:lstStyle/>
+          <a:p>
+            <a:pPr algn="r"/>
+            <a:r>
+              <a:rPr sz="900" b="0">
+                <a:solidFill>
+                  <a:srgbClr val="6B6B6B"/>
+                </a:solidFill>
+              </a:rPr>
+              <a:t>docs/new-user-procedure/23-paper-first.md</a:t>
             </a:r>
           </a:p>
         </p:txBody>
@@ -5158,7 +6086,7 @@
     <p:bg>
       <p:bgPr>
         <a:solidFill>
-          <a:srgbClr val="121216"/>
+          <a:srgbClr val="FFFFFF"/>
         </a:solidFill>
         <a:effectLst/>
       </p:bgPr>
@@ -5178,40 +6106,69 @@
         </p:nvSpPr>
         <p:spPr>
           <a:xfrm>
-            <a:off x="548640" y="457200"/>
-            <a:ext cx="11094415" cy="914400"/>
-          </a:xfrm>
-          <a:prstGeom prst="rect">
-            <a:avLst/>
-          </a:prstGeom>
-          <a:noFill/>
-        </p:spPr>
-        <p:txBody>
-          <a:bodyPr wrap="square" lIns="0" rIns="0" tIns="0" bIns="0">
-            <a:spAutoFit/>
-          </a:bodyPr>
-          <a:lstStyle/>
-          <a:p>
-            <a:pPr>
-              <a:spcAft>
-                <a:spcPts val="1600"/>
-              </a:spcAft>
-            </a:pPr>
-            <a:r>
-              <a:rPr sz="3600" b="1">
-                <a:solidFill>
-                  <a:srgbClr val="FFFFFF"/>
-                </a:solidFill>
-                <a:latin typeface="Cambria"/>
+            <a:off x="502920" y="310896"/>
+            <a:ext cx="11185855" cy="640080"/>
+          </a:xfrm>
+          <a:prstGeom prst="rect">
+            <a:avLst/>
+          </a:prstGeom>
+          <a:noFill/>
+        </p:spPr>
+        <p:txBody>
+          <a:bodyPr wrap="square">
+            <a:spAutoFit/>
+          </a:bodyPr>
+          <a:lstStyle/>
+          <a:p>
+            <a:pPr algn="l"/>
+            <a:r>
+              <a:rPr sz="2600" b="1">
+                <a:solidFill>
+                  <a:srgbClr val="1F3A68"/>
+                </a:solidFill>
               </a:rPr>
               <a:t>Step 24 — The chart</a:t>
+            </a:r>
+          </a:p>
+        </p:txBody>
+      </p:sp>
+      <p:sp>
+        <p:nvSpPr>
+          <p:cNvPr id="3" name="TextBox 2"/>
+          <p:cNvSpPr txBox="1"/>
+          <p:nvPr/>
+        </p:nvSpPr>
+        <p:spPr>
+          <a:xfrm>
+            <a:off x="502920" y="969264"/>
+            <a:ext cx="11185855" cy="566928"/>
+          </a:xfrm>
+          <a:prstGeom prst="rect">
+            <a:avLst/>
+          </a:prstGeom>
+          <a:noFill/>
+        </p:spPr>
+        <p:txBody>
+          <a:bodyPr wrap="square">
+            <a:spAutoFit/>
+          </a:bodyPr>
+          <a:lstStyle/>
+          <a:p>
+            <a:pPr algn="l"/>
+            <a:r>
+              <a:rPr sz="1300" b="0">
+                <a:solidFill>
+                  <a:srgbClr val="6B6B6B"/>
+                </a:solidFill>
+              </a:rPr>
+              <a:t>Press Charts. One panel appears per market a bot trades.</a:t>
             </a:r>
           </a:p>
         </p:txBody>
       </p:sp>
       <p:pic>
         <p:nvPicPr>
-          <p:cNvPr id="3" name="Picture 2" descr="step-24-the-chart.png"/>
+          <p:cNvPr id="4" name="Picture 3" descr="step-24-the-chart.png"/>
           <p:cNvPicPr>
             <a:picLocks noChangeAspect="1"/>
           </p:cNvPicPr>
@@ -5225,8 +6182,8 @@
         </p:blipFill>
         <p:spPr>
           <a:xfrm>
-            <a:off x="548640" y="2467991"/>
-            <a:ext cx="11094415" cy="1830578"/>
+            <a:off x="502920" y="2643327"/>
+            <a:ext cx="11185855" cy="1845666"/>
           </a:xfrm>
           <a:prstGeom prst="rect">
             <a:avLst/>
@@ -5235,39 +6192,68 @@
       </p:pic>
       <p:sp>
         <p:nvSpPr>
-          <p:cNvPr id="4" name="TextBox 3"/>
-          <p:cNvSpPr txBox="1"/>
-          <p:nvPr/>
-        </p:nvSpPr>
-        <p:spPr>
-          <a:xfrm>
-            <a:off x="548640" y="5440680"/>
-            <a:ext cx="11094415" cy="914400"/>
-          </a:xfrm>
-          <a:prstGeom prst="rect">
-            <a:avLst/>
-          </a:prstGeom>
-          <a:noFill/>
-        </p:spPr>
-        <p:txBody>
-          <a:bodyPr wrap="square" lIns="0" rIns="0" tIns="0" bIns="0">
-            <a:spAutoFit/>
-          </a:bodyPr>
-          <a:lstStyle/>
-          <a:p>
-            <a:pPr>
-              <a:spcAft>
-                <a:spcPts val="1600"/>
-              </a:spcAft>
-            </a:pPr>
-            <a:r>
-              <a:rPr sz="2200" b="1">
-                <a:solidFill>
-                  <a:srgbClr val="FFB000"/>
-                </a:solidFill>
-                <a:latin typeface="Calibri"/>
+          <p:cNvPr id="5" name="TextBox 4"/>
+          <p:cNvSpPr txBox="1"/>
+          <p:nvPr/>
+        </p:nvSpPr>
+        <p:spPr>
+          <a:xfrm>
+            <a:off x="502920" y="5614416"/>
+            <a:ext cx="11185855" cy="658368"/>
+          </a:xfrm>
+          <a:prstGeom prst="rect">
+            <a:avLst/>
+          </a:prstGeom>
+          <a:noFill/>
+        </p:spPr>
+        <p:txBody>
+          <a:bodyPr wrap="square">
+            <a:spAutoFit/>
+          </a:bodyPr>
+          <a:lstStyle/>
+          <a:p>
+            <a:pPr algn="l"/>
+            <a:r>
+              <a:rPr sz="1500" b="1">
+                <a:solidFill>
+                  <a:srgbClr val="1A1A1A"/>
+                </a:solidFill>
               </a:rPr>
               <a:t>Press Charts.</a:t>
+            </a:r>
+          </a:p>
+        </p:txBody>
+      </p:sp>
+      <p:sp>
+        <p:nvSpPr>
+          <p:cNvPr id="6" name="TextBox 5"/>
+          <p:cNvSpPr txBox="1"/>
+          <p:nvPr/>
+        </p:nvSpPr>
+        <p:spPr>
+          <a:xfrm>
+            <a:off x="502920" y="6382512"/>
+            <a:ext cx="11185855" cy="310896"/>
+          </a:xfrm>
+          <a:prstGeom prst="rect">
+            <a:avLst/>
+          </a:prstGeom>
+          <a:noFill/>
+        </p:spPr>
+        <p:txBody>
+          <a:bodyPr wrap="square">
+            <a:spAutoFit/>
+          </a:bodyPr>
+          <a:lstStyle/>
+          <a:p>
+            <a:pPr algn="r"/>
+            <a:r>
+              <a:rPr sz="900" b="0">
+                <a:solidFill>
+                  <a:srgbClr val="6B6B6B"/>
+                </a:solidFill>
+              </a:rPr>
+              <a:t>docs/new-user-procedure/24-the-chart.md</a:t>
             </a:r>
           </a:p>
         </p:txBody>
@@ -5286,7 +6272,7 @@
     <p:bg>
       <p:bgPr>
         <a:solidFill>
-          <a:srgbClr val="121216"/>
+          <a:srgbClr val="FFFFFF"/>
         </a:solidFill>
         <a:effectLst/>
       </p:bgPr>
@@ -5306,40 +6292,69 @@
         </p:nvSpPr>
         <p:spPr>
           <a:xfrm>
-            <a:off x="548640" y="457200"/>
-            <a:ext cx="11094415" cy="914400"/>
-          </a:xfrm>
-          <a:prstGeom prst="rect">
-            <a:avLst/>
-          </a:prstGeom>
-          <a:noFill/>
-        </p:spPr>
-        <p:txBody>
-          <a:bodyPr wrap="square" lIns="0" rIns="0" tIns="0" bIns="0">
-            <a:spAutoFit/>
-          </a:bodyPr>
-          <a:lstStyle/>
-          <a:p>
-            <a:pPr>
-              <a:spcAft>
-                <a:spcPts val="1600"/>
-              </a:spcAft>
-            </a:pPr>
-            <a:r>
-              <a:rPr sz="3600" b="1">
-                <a:solidFill>
-                  <a:srgbClr val="FFFFFF"/>
-                </a:solidFill>
-                <a:latin typeface="Cambria"/>
+            <a:off x="502920" y="310896"/>
+            <a:ext cx="11185855" cy="640080"/>
+          </a:xfrm>
+          <a:prstGeom prst="rect">
+            <a:avLst/>
+          </a:prstGeom>
+          <a:noFill/>
+        </p:spPr>
+        <p:txBody>
+          <a:bodyPr wrap="square">
+            <a:spAutoFit/>
+          </a:bodyPr>
+          <a:lstStyle/>
+          <a:p>
+            <a:pPr algn="l"/>
+            <a:r>
+              <a:rPr sz="2600" b="1">
+                <a:solidFill>
+                  <a:srgbClr val="1F3A68"/>
+                </a:solidFill>
               </a:rPr>
               <a:t>Step 25 — The market inspector</a:t>
+            </a:r>
+          </a:p>
+        </p:txBody>
+      </p:sp>
+      <p:sp>
+        <p:nvSpPr>
+          <p:cNvPr id="3" name="TextBox 2"/>
+          <p:cNvSpPr txBox="1"/>
+          <p:nvPr/>
+        </p:nvSpPr>
+        <p:spPr>
+          <a:xfrm>
+            <a:off x="502920" y="969264"/>
+            <a:ext cx="11185855" cy="566928"/>
+          </a:xfrm>
+          <a:prstGeom prst="rect">
+            <a:avLst/>
+          </a:prstGeom>
+          <a:noFill/>
+        </p:spPr>
+        <p:txBody>
+          <a:bodyPr wrap="square">
+            <a:spAutoFit/>
+          </a:bodyPr>
+          <a:lstStyle/>
+          <a:p>
+            <a:pPr algn="l"/>
+            <a:r>
+              <a:rPr sz="1300" b="0">
+                <a:solidFill>
+                  <a:srgbClr val="6B6B6B"/>
+                </a:solidFill>
+              </a:rPr>
+              <a:t>Press Inspector. A scan fills it.</a:t>
             </a:r>
           </a:p>
         </p:txBody>
       </p:sp>
       <p:pic>
         <p:nvPicPr>
-          <p:cNvPr id="3" name="Picture 2" descr="step-25-the-market-inspector.png"/>
+          <p:cNvPr id="4" name="Picture 3" descr="step-25-the-market-inspector.png"/>
           <p:cNvPicPr>
             <a:picLocks noChangeAspect="1"/>
           </p:cNvPicPr>
@@ -5353,8 +6368,8 @@
         </p:blipFill>
         <p:spPr>
           <a:xfrm>
-            <a:off x="548640" y="2467991"/>
-            <a:ext cx="11094415" cy="1830578"/>
+            <a:off x="502920" y="2643327"/>
+            <a:ext cx="11185855" cy="1845666"/>
           </a:xfrm>
           <a:prstGeom prst="rect">
             <a:avLst/>
@@ -5363,39 +6378,68 @@
       </p:pic>
       <p:sp>
         <p:nvSpPr>
-          <p:cNvPr id="4" name="TextBox 3"/>
-          <p:cNvSpPr txBox="1"/>
-          <p:nvPr/>
-        </p:nvSpPr>
-        <p:spPr>
-          <a:xfrm>
-            <a:off x="548640" y="5440680"/>
-            <a:ext cx="11094415" cy="914400"/>
-          </a:xfrm>
-          <a:prstGeom prst="rect">
-            <a:avLst/>
-          </a:prstGeom>
-          <a:noFill/>
-        </p:spPr>
-        <p:txBody>
-          <a:bodyPr wrap="square" lIns="0" rIns="0" tIns="0" bIns="0">
-            <a:spAutoFit/>
-          </a:bodyPr>
-          <a:lstStyle/>
-          <a:p>
-            <a:pPr>
-              <a:spcAft>
-                <a:spcPts val="1600"/>
-              </a:spcAft>
-            </a:pPr>
-            <a:r>
-              <a:rPr sz="2200" b="1">
-                <a:solidFill>
-                  <a:srgbClr val="FFB000"/>
-                </a:solidFill>
-                <a:latin typeface="Calibri"/>
+          <p:cNvPr id="5" name="TextBox 4"/>
+          <p:cNvSpPr txBox="1"/>
+          <p:nvPr/>
+        </p:nvSpPr>
+        <p:spPr>
+          <a:xfrm>
+            <a:off x="502920" y="5614416"/>
+            <a:ext cx="11185855" cy="658368"/>
+          </a:xfrm>
+          <a:prstGeom prst="rect">
+            <a:avLst/>
+          </a:prstGeom>
+          <a:noFill/>
+        </p:spPr>
+        <p:txBody>
+          <a:bodyPr wrap="square">
+            <a:spAutoFit/>
+          </a:bodyPr>
+          <a:lstStyle/>
+          <a:p>
+            <a:pPr algn="l"/>
+            <a:r>
+              <a:rPr sz="1500" b="1">
+                <a:solidFill>
+                  <a:srgbClr val="1A1A1A"/>
+                </a:solidFill>
               </a:rPr>
               <a:t>Press Inspector.</a:t>
+            </a:r>
+          </a:p>
+        </p:txBody>
+      </p:sp>
+      <p:sp>
+        <p:nvSpPr>
+          <p:cNvPr id="6" name="TextBox 5"/>
+          <p:cNvSpPr txBox="1"/>
+          <p:nvPr/>
+        </p:nvSpPr>
+        <p:spPr>
+          <a:xfrm>
+            <a:off x="502920" y="6382512"/>
+            <a:ext cx="11185855" cy="310896"/>
+          </a:xfrm>
+          <a:prstGeom prst="rect">
+            <a:avLst/>
+          </a:prstGeom>
+          <a:noFill/>
+        </p:spPr>
+        <p:txBody>
+          <a:bodyPr wrap="square">
+            <a:spAutoFit/>
+          </a:bodyPr>
+          <a:lstStyle/>
+          <a:p>
+            <a:pPr algn="r"/>
+            <a:r>
+              <a:rPr sz="900" b="0">
+                <a:solidFill>
+                  <a:srgbClr val="6B6B6B"/>
+                </a:solidFill>
+              </a:rPr>
+              <a:t>docs/new-user-procedure/25-the-market-inspector.md</a:t>
             </a:r>
           </a:p>
         </p:txBody>
@@ -5414,7 +6458,7 @@
     <p:bg>
       <p:bgPr>
         <a:solidFill>
-          <a:srgbClr val="121216"/>
+          <a:srgbClr val="FFFFFF"/>
         </a:solidFill>
         <a:effectLst/>
       </p:bgPr>
@@ -5434,40 +6478,69 @@
         </p:nvSpPr>
         <p:spPr>
           <a:xfrm>
-            <a:off x="548640" y="457200"/>
-            <a:ext cx="11094415" cy="914400"/>
-          </a:xfrm>
-          <a:prstGeom prst="rect">
-            <a:avLst/>
-          </a:prstGeom>
-          <a:noFill/>
-        </p:spPr>
-        <p:txBody>
-          <a:bodyPr wrap="square" lIns="0" rIns="0" tIns="0" bIns="0">
-            <a:spAutoFit/>
-          </a:bodyPr>
-          <a:lstStyle/>
-          <a:p>
-            <a:pPr>
-              <a:spcAft>
-                <a:spcPts val="1600"/>
-              </a:spcAft>
-            </a:pPr>
-            <a:r>
-              <a:rPr sz="3600" b="1">
-                <a:solidFill>
-                  <a:srgbClr val="FFFFFF"/>
-                </a:solidFill>
-                <a:latin typeface="Cambria"/>
+            <a:off x="502920" y="310896"/>
+            <a:ext cx="11185855" cy="640080"/>
+          </a:xfrm>
+          <a:prstGeom prst="rect">
+            <a:avLst/>
+          </a:prstGeom>
+          <a:noFill/>
+        </p:spPr>
+        <p:txBody>
+          <a:bodyPr wrap="square">
+            <a:spAutoFit/>
+          </a:bodyPr>
+          <a:lstStyle/>
+          <a:p>
+            <a:pPr algn="l"/>
+            <a:r>
+              <a:rPr sz="2600" b="1">
+                <a:solidFill>
+                  <a:srgbClr val="1F3A68"/>
+                </a:solidFill>
               </a:rPr>
               <a:t>Step 26 — The swarm</a:t>
+            </a:r>
+          </a:p>
+        </p:txBody>
+      </p:sp>
+      <p:sp>
+        <p:nvSpPr>
+          <p:cNvPr id="3" name="TextBox 2"/>
+          <p:cNvSpPr txBox="1"/>
+          <p:nvPr/>
+        </p:nvSpPr>
+        <p:spPr>
+          <a:xfrm>
+            <a:off x="502920" y="969264"/>
+            <a:ext cx="11185855" cy="566928"/>
+          </a:xfrm>
+          <a:prstGeom prst="rect">
+            <a:avLst/>
+          </a:prstGeom>
+          <a:noFill/>
+        </p:spPr>
+        <p:txBody>
+          <a:bodyPr wrap="square">
+            <a:spAutoFit/>
+          </a:bodyPr>
+          <a:lstStyle/>
+          <a:p>
+            <a:pPr algn="l"/>
+            <a:r>
+              <a:rPr sz="1300" b="0">
+                <a:solidFill>
+                  <a:srgbClr val="6B6B6B"/>
+                </a:solidFill>
+              </a:rPr>
+              <a:t>Press Swarm. Each bot joins it as one node.</a:t>
             </a:r>
           </a:p>
         </p:txBody>
       </p:sp>
       <p:pic>
         <p:nvPicPr>
-          <p:cNvPr id="3" name="Picture 2" descr="step-26-the-swarm.png"/>
+          <p:cNvPr id="4" name="Picture 3" descr="step-26-the-swarm.png"/>
           <p:cNvPicPr>
             <a:picLocks noChangeAspect="1"/>
           </p:cNvPicPr>
@@ -5481,8 +6554,8 @@
         </p:blipFill>
         <p:spPr>
           <a:xfrm>
-            <a:off x="548640" y="2467991"/>
-            <a:ext cx="11094415" cy="1830578"/>
+            <a:off x="502920" y="2643327"/>
+            <a:ext cx="11185855" cy="1845666"/>
           </a:xfrm>
           <a:prstGeom prst="rect">
             <a:avLst/>
@@ -5491,39 +6564,68 @@
       </p:pic>
       <p:sp>
         <p:nvSpPr>
-          <p:cNvPr id="4" name="TextBox 3"/>
-          <p:cNvSpPr txBox="1"/>
-          <p:nvPr/>
-        </p:nvSpPr>
-        <p:spPr>
-          <a:xfrm>
-            <a:off x="548640" y="5440680"/>
-            <a:ext cx="11094415" cy="914400"/>
-          </a:xfrm>
-          <a:prstGeom prst="rect">
-            <a:avLst/>
-          </a:prstGeom>
-          <a:noFill/>
-        </p:spPr>
-        <p:txBody>
-          <a:bodyPr wrap="square" lIns="0" rIns="0" tIns="0" bIns="0">
-            <a:spAutoFit/>
-          </a:bodyPr>
-          <a:lstStyle/>
-          <a:p>
-            <a:pPr>
-              <a:spcAft>
-                <a:spcPts val="1600"/>
-              </a:spcAft>
-            </a:pPr>
-            <a:r>
-              <a:rPr sz="2200" b="1">
-                <a:solidFill>
-                  <a:srgbClr val="FFB000"/>
-                </a:solidFill>
-                <a:latin typeface="Calibri"/>
+          <p:cNvPr id="5" name="TextBox 4"/>
+          <p:cNvSpPr txBox="1"/>
+          <p:nvPr/>
+        </p:nvSpPr>
+        <p:spPr>
+          <a:xfrm>
+            <a:off x="502920" y="5614416"/>
+            <a:ext cx="11185855" cy="658368"/>
+          </a:xfrm>
+          <a:prstGeom prst="rect">
+            <a:avLst/>
+          </a:prstGeom>
+          <a:noFill/>
+        </p:spPr>
+        <p:txBody>
+          <a:bodyPr wrap="square">
+            <a:spAutoFit/>
+          </a:bodyPr>
+          <a:lstStyle/>
+          <a:p>
+            <a:pPr algn="l"/>
+            <a:r>
+              <a:rPr sz="1500" b="1">
+                <a:solidFill>
+                  <a:srgbClr val="1A1A1A"/>
+                </a:solidFill>
               </a:rPr>
               <a:t>Press Swarm.</a:t>
+            </a:r>
+          </a:p>
+        </p:txBody>
+      </p:sp>
+      <p:sp>
+        <p:nvSpPr>
+          <p:cNvPr id="6" name="TextBox 5"/>
+          <p:cNvSpPr txBox="1"/>
+          <p:nvPr/>
+        </p:nvSpPr>
+        <p:spPr>
+          <a:xfrm>
+            <a:off x="502920" y="6382512"/>
+            <a:ext cx="11185855" cy="310896"/>
+          </a:xfrm>
+          <a:prstGeom prst="rect">
+            <a:avLst/>
+          </a:prstGeom>
+          <a:noFill/>
+        </p:spPr>
+        <p:txBody>
+          <a:bodyPr wrap="square">
+            <a:spAutoFit/>
+          </a:bodyPr>
+          <a:lstStyle/>
+          <a:p>
+            <a:pPr algn="r"/>
+            <a:r>
+              <a:rPr sz="900" b="0">
+                <a:solidFill>
+                  <a:srgbClr val="6B6B6B"/>
+                </a:solidFill>
+              </a:rPr>
+              <a:t>docs/new-user-procedure/26-the-swarm.md</a:t>
             </a:r>
           </a:p>
         </p:txBody>
@@ -5542,7 +6644,7 @@
     <p:bg>
       <p:bgPr>
         <a:solidFill>
-          <a:srgbClr val="121216"/>
+          <a:srgbClr val="FFFFFF"/>
         </a:solidFill>
         <a:effectLst/>
       </p:bgPr>
@@ -5562,40 +6664,69 @@
         </p:nvSpPr>
         <p:spPr>
           <a:xfrm>
-            <a:off x="548640" y="457200"/>
-            <a:ext cx="11094415" cy="914400"/>
-          </a:xfrm>
-          <a:prstGeom prst="rect">
-            <a:avLst/>
-          </a:prstGeom>
-          <a:noFill/>
-        </p:spPr>
-        <p:txBody>
-          <a:bodyPr wrap="square" lIns="0" rIns="0" tIns="0" bIns="0">
-            <a:spAutoFit/>
-          </a:bodyPr>
-          <a:lstStyle/>
-          <a:p>
-            <a:pPr>
-              <a:spcAft>
-                <a:spcPts val="1600"/>
-              </a:spcAft>
-            </a:pPr>
-            <a:r>
-              <a:rPr sz="3600" b="1">
-                <a:solidFill>
-                  <a:srgbClr val="FFFFFF"/>
-                </a:solidFill>
-                <a:latin typeface="Cambria"/>
+            <a:off x="502920" y="310896"/>
+            <a:ext cx="11185855" cy="640080"/>
+          </a:xfrm>
+          <a:prstGeom prst="rect">
+            <a:avLst/>
+          </a:prstGeom>
+          <a:noFill/>
+        </p:spPr>
+        <p:txBody>
+          <a:bodyPr wrap="square">
+            <a:spAutoFit/>
+          </a:bodyPr>
+          <a:lstStyle/>
+          <a:p>
+            <a:pPr algn="l"/>
+            <a:r>
+              <a:rPr sz="2600" b="1">
+                <a:solidFill>
+                  <a:srgbClr val="1F3A68"/>
+                </a:solidFill>
               </a:rPr>
               <a:t>Step 27 — What it has traded</a:t>
+            </a:r>
+          </a:p>
+        </p:txBody>
+      </p:sp>
+      <p:sp>
+        <p:nvSpPr>
+          <p:cNvPr id="3" name="TextBox 2"/>
+          <p:cNvSpPr txBox="1"/>
+          <p:nvPr/>
+        </p:nvSpPr>
+        <p:spPr>
+          <a:xfrm>
+            <a:off x="502920" y="969264"/>
+            <a:ext cx="11185855" cy="566928"/>
+          </a:xfrm>
+          <a:prstGeom prst="rect">
+            <a:avLst/>
+          </a:prstGeom>
+          <a:noFill/>
+        </p:spPr>
+        <p:txBody>
+          <a:bodyPr wrap="square">
+            <a:spAutoFit/>
+          </a:bodyPr>
+          <a:lstStyle/>
+          <a:p>
+            <a:pPr algn="l"/>
+            <a:r>
+              <a:rPr sz="1300" b="0">
+                <a:solidFill>
+                  <a:srgbClr val="6B6B6B"/>
+                </a:solidFill>
+              </a:rPr>
+              <a:t>Press History. The venue's own fills land here.</a:t>
             </a:r>
           </a:p>
         </p:txBody>
       </p:sp>
       <p:pic>
         <p:nvPicPr>
-          <p:cNvPr id="3" name="Picture 2" descr="step-27-what-it-has-traded.png"/>
+          <p:cNvPr id="4" name="Picture 3" descr="step-27-what-it-has-traded.png"/>
           <p:cNvPicPr>
             <a:picLocks noChangeAspect="1"/>
           </p:cNvPicPr>
@@ -5609,8 +6740,8 @@
         </p:blipFill>
         <p:spPr>
           <a:xfrm>
-            <a:off x="548640" y="2467991"/>
-            <a:ext cx="11094415" cy="1830578"/>
+            <a:off x="502920" y="2643327"/>
+            <a:ext cx="11185855" cy="1845666"/>
           </a:xfrm>
           <a:prstGeom prst="rect">
             <a:avLst/>
@@ -5619,39 +6750,68 @@
       </p:pic>
       <p:sp>
         <p:nvSpPr>
-          <p:cNvPr id="4" name="TextBox 3"/>
-          <p:cNvSpPr txBox="1"/>
-          <p:nvPr/>
-        </p:nvSpPr>
-        <p:spPr>
-          <a:xfrm>
-            <a:off x="548640" y="5440680"/>
-            <a:ext cx="11094415" cy="914400"/>
-          </a:xfrm>
-          <a:prstGeom prst="rect">
-            <a:avLst/>
-          </a:prstGeom>
-          <a:noFill/>
-        </p:spPr>
-        <p:txBody>
-          <a:bodyPr wrap="square" lIns="0" rIns="0" tIns="0" bIns="0">
-            <a:spAutoFit/>
-          </a:bodyPr>
-          <a:lstStyle/>
-          <a:p>
-            <a:pPr>
-              <a:spcAft>
-                <a:spcPts val="1600"/>
-              </a:spcAft>
-            </a:pPr>
-            <a:r>
-              <a:rPr sz="2200" b="1">
-                <a:solidFill>
-                  <a:srgbClr val="FFB000"/>
-                </a:solidFill>
-                <a:latin typeface="Calibri"/>
+          <p:cNvPr id="5" name="TextBox 4"/>
+          <p:cNvSpPr txBox="1"/>
+          <p:nvPr/>
+        </p:nvSpPr>
+        <p:spPr>
+          <a:xfrm>
+            <a:off x="502920" y="5614416"/>
+            <a:ext cx="11185855" cy="658368"/>
+          </a:xfrm>
+          <a:prstGeom prst="rect">
+            <a:avLst/>
+          </a:prstGeom>
+          <a:noFill/>
+        </p:spPr>
+        <p:txBody>
+          <a:bodyPr wrap="square">
+            <a:spAutoFit/>
+          </a:bodyPr>
+          <a:lstStyle/>
+          <a:p>
+            <a:pPr algn="l"/>
+            <a:r>
+              <a:rPr sz="1500" b="1">
+                <a:solidFill>
+                  <a:srgbClr val="1A1A1A"/>
+                </a:solidFill>
               </a:rPr>
               <a:t>Press History.</a:t>
+            </a:r>
+          </a:p>
+        </p:txBody>
+      </p:sp>
+      <p:sp>
+        <p:nvSpPr>
+          <p:cNvPr id="6" name="TextBox 5"/>
+          <p:cNvSpPr txBox="1"/>
+          <p:nvPr/>
+        </p:nvSpPr>
+        <p:spPr>
+          <a:xfrm>
+            <a:off x="502920" y="6382512"/>
+            <a:ext cx="11185855" cy="310896"/>
+          </a:xfrm>
+          <a:prstGeom prst="rect">
+            <a:avLst/>
+          </a:prstGeom>
+          <a:noFill/>
+        </p:spPr>
+        <p:txBody>
+          <a:bodyPr wrap="square">
+            <a:spAutoFit/>
+          </a:bodyPr>
+          <a:lstStyle/>
+          <a:p>
+            <a:pPr algn="r"/>
+            <a:r>
+              <a:rPr sz="900" b="0">
+                <a:solidFill>
+                  <a:srgbClr val="6B6B6B"/>
+                </a:solidFill>
+              </a:rPr>
+              <a:t>docs/new-user-procedure/27-what-it-has-traded.md</a:t>
             </a:r>
           </a:p>
         </p:txBody>
@@ -5670,7 +6830,7 @@
     <p:bg>
       <p:bgPr>
         <a:solidFill>
-          <a:srgbClr val="121216"/>
+          <a:srgbClr val="FFFFFF"/>
         </a:solidFill>
         <a:effectLst/>
       </p:bgPr>
@@ -5690,40 +6850,69 @@
         </p:nvSpPr>
         <p:spPr>
           <a:xfrm>
-            <a:off x="548640" y="457200"/>
-            <a:ext cx="11094415" cy="914400"/>
-          </a:xfrm>
-          <a:prstGeom prst="rect">
-            <a:avLst/>
-          </a:prstGeom>
-          <a:noFill/>
-        </p:spPr>
-        <p:txBody>
-          <a:bodyPr wrap="square" lIns="0" rIns="0" tIns="0" bIns="0">
-            <a:spAutoFit/>
-          </a:bodyPr>
-          <a:lstStyle/>
-          <a:p>
-            <a:pPr>
-              <a:spcAft>
-                <a:spcPts val="1600"/>
-              </a:spcAft>
-            </a:pPr>
-            <a:r>
-              <a:rPr sz="3600" b="1">
-                <a:solidFill>
-                  <a:srgbClr val="FFFFFF"/>
-                </a:solidFill>
-                <a:latin typeface="Cambria"/>
+            <a:off x="502920" y="310896"/>
+            <a:ext cx="11185855" cy="640080"/>
+          </a:xfrm>
+          <a:prstGeom prst="rect">
+            <a:avLst/>
+          </a:prstGeom>
+          <a:noFill/>
+        </p:spPr>
+        <p:txBody>
+          <a:bodyPr wrap="square">
+            <a:spAutoFit/>
+          </a:bodyPr>
+          <a:lstStyle/>
+          <a:p>
+            <a:pPr algn="l"/>
+            <a:r>
+              <a:rPr sz="2600" b="1">
+                <a:solidFill>
+                  <a:srgbClr val="1F3A68"/>
+                </a:solidFill>
               </a:rPr>
               <a:t>Step 3 — Pick one file</a:t>
+            </a:r>
+          </a:p>
+        </p:txBody>
+      </p:sp>
+      <p:sp>
+        <p:nvSpPr>
+          <p:cNvPr id="3" name="TextBox 2"/>
+          <p:cNvSpPr txBox="1"/>
+          <p:nvPr/>
+        </p:nvSpPr>
+        <p:spPr>
+          <a:xfrm>
+            <a:off x="502920" y="969264"/>
+            <a:ext cx="11185855" cy="566928"/>
+          </a:xfrm>
+          <a:prstGeom prst="rect">
+            <a:avLst/>
+          </a:prstGeom>
+          <a:noFill/>
+        </p:spPr>
+        <p:txBody>
+          <a:bodyPr wrap="square">
+            <a:spAutoFit/>
+          </a:bodyPr>
+          <a:lstStyle/>
+          <a:p>
+            <a:pPr algn="l"/>
+            <a:r>
+              <a:rPr sz="1300" b="0">
+                <a:solidFill>
+                  <a:srgbClr val="6B6B6B"/>
+                </a:solidFill>
+              </a:rPr>
+              <a:t>Pick one file. Choose by the middle column.</a:t>
             </a:r>
           </a:p>
         </p:txBody>
       </p:sp>
       <p:pic>
         <p:nvPicPr>
-          <p:cNvPr id="3" name="Picture 2" descr="step-3-pick-one-file.png"/>
+          <p:cNvPr id="4" name="Picture 3" descr="step-3-pick-one-file.png"/>
           <p:cNvPicPr>
             <a:picLocks noChangeAspect="1"/>
           </p:cNvPicPr>
@@ -5737,8 +6926,8 @@
         </p:blipFill>
         <p:spPr>
           <a:xfrm>
-            <a:off x="548640" y="2235083"/>
-            <a:ext cx="11094415" cy="2296393"/>
+            <a:off x="502920" y="2408500"/>
+            <a:ext cx="11185855" cy="2315320"/>
           </a:xfrm>
           <a:prstGeom prst="rect">
             <a:avLst/>
@@ -5747,39 +6936,68 @@
       </p:pic>
       <p:sp>
         <p:nvSpPr>
-          <p:cNvPr id="4" name="TextBox 3"/>
-          <p:cNvSpPr txBox="1"/>
-          <p:nvPr/>
-        </p:nvSpPr>
-        <p:spPr>
-          <a:xfrm>
-            <a:off x="548640" y="5440680"/>
-            <a:ext cx="11094415" cy="914400"/>
-          </a:xfrm>
-          <a:prstGeom prst="rect">
-            <a:avLst/>
-          </a:prstGeom>
-          <a:noFill/>
-        </p:spPr>
-        <p:txBody>
-          <a:bodyPr wrap="square" lIns="0" rIns="0" tIns="0" bIns="0">
-            <a:spAutoFit/>
-          </a:bodyPr>
-          <a:lstStyle/>
-          <a:p>
-            <a:pPr>
-              <a:spcAft>
-                <a:spcPts val="1600"/>
-              </a:spcAft>
-            </a:pPr>
-            <a:r>
-              <a:rPr sz="2200" b="1">
-                <a:solidFill>
-                  <a:srgbClr val="FFB000"/>
-                </a:solidFill>
-                <a:latin typeface="Calibri"/>
+          <p:cNvPr id="5" name="TextBox 4"/>
+          <p:cNvSpPr txBox="1"/>
+          <p:nvPr/>
+        </p:nvSpPr>
+        <p:spPr>
+          <a:xfrm>
+            <a:off x="502920" y="5614416"/>
+            <a:ext cx="11185855" cy="658368"/>
+          </a:xfrm>
+          <a:prstGeom prst="rect">
+            <a:avLst/>
+          </a:prstGeom>
+          <a:noFill/>
+        </p:spPr>
+        <p:txBody>
+          <a:bodyPr wrap="square">
+            <a:spAutoFit/>
+          </a:bodyPr>
+          <a:lstStyle/>
+          <a:p>
+            <a:pPr algn="l"/>
+            <a:r>
+              <a:rPr sz="1500" b="1">
+                <a:solidFill>
+                  <a:srgbClr val="1A1A1A"/>
+                </a:solidFill>
               </a:rPr>
               <a:t>Take the one file whose middle column names your computer.</a:t>
+            </a:r>
+          </a:p>
+        </p:txBody>
+      </p:sp>
+      <p:sp>
+        <p:nvSpPr>
+          <p:cNvPr id="6" name="TextBox 5"/>
+          <p:cNvSpPr txBox="1"/>
+          <p:nvPr/>
+        </p:nvSpPr>
+        <p:spPr>
+          <a:xfrm>
+            <a:off x="502920" y="6382512"/>
+            <a:ext cx="11185855" cy="310896"/>
+          </a:xfrm>
+          <a:prstGeom prst="rect">
+            <a:avLst/>
+          </a:prstGeom>
+          <a:noFill/>
+        </p:spPr>
+        <p:txBody>
+          <a:bodyPr wrap="square">
+            <a:spAutoFit/>
+          </a:bodyPr>
+          <a:lstStyle/>
+          <a:p>
+            <a:pPr algn="r"/>
+            <a:r>
+              <a:rPr sz="900" b="0">
+                <a:solidFill>
+                  <a:srgbClr val="6B6B6B"/>
+                </a:solidFill>
+              </a:rPr>
+              <a:t>docs/new-user-procedure/03-pick-one-file.md</a:t>
             </a:r>
           </a:p>
         </p:txBody>
@@ -5798,7 +7016,7 @@
     <p:bg>
       <p:bgPr>
         <a:solidFill>
-          <a:srgbClr val="121216"/>
+          <a:srgbClr val="FFFFFF"/>
         </a:solidFill>
         <a:effectLst/>
       </p:bgPr>
@@ -5818,40 +7036,69 @@
         </p:nvSpPr>
         <p:spPr>
           <a:xfrm>
-            <a:off x="548640" y="457200"/>
-            <a:ext cx="11094415" cy="914400"/>
-          </a:xfrm>
-          <a:prstGeom prst="rect">
-            <a:avLst/>
-          </a:prstGeom>
-          <a:noFill/>
-        </p:spPr>
-        <p:txBody>
-          <a:bodyPr wrap="square" lIns="0" rIns="0" tIns="0" bIns="0">
-            <a:spAutoFit/>
-          </a:bodyPr>
-          <a:lstStyle/>
-          <a:p>
-            <a:pPr>
-              <a:spcAft>
-                <a:spcPts val="1600"/>
-              </a:spcAft>
-            </a:pPr>
-            <a:r>
-              <a:rPr sz="3600" b="1">
-                <a:solidFill>
-                  <a:srgbClr val="FFFFFF"/>
-                </a:solidFill>
-                <a:latin typeface="Cambria"/>
+            <a:off x="502920" y="310896"/>
+            <a:ext cx="11185855" cy="640080"/>
+          </a:xfrm>
+          <a:prstGeom prst="rect">
+            <a:avLst/>
+          </a:prstGeom>
+          <a:noFill/>
+        </p:spPr>
+        <p:txBody>
+          <a:bodyPr wrap="square">
+            <a:spAutoFit/>
+          </a:bodyPr>
+          <a:lstStyle/>
+          <a:p>
+            <a:pPr algn="l"/>
+            <a:r>
+              <a:rPr sz="2600" b="1">
+                <a:solidFill>
+                  <a:srgbClr val="1F3A68"/>
+                </a:solidFill>
               </a:rPr>
               <a:t>Step 4 — On Windows</a:t>
+            </a:r>
+          </a:p>
+        </p:txBody>
+      </p:sp>
+      <p:sp>
+        <p:nvSpPr>
+          <p:cNvPr id="3" name="TextBox 2"/>
+          <p:cNvSpPr txBox="1"/>
+          <p:nvPr/>
+        </p:nvSpPr>
+        <p:spPr>
+          <a:xfrm>
+            <a:off x="502920" y="969264"/>
+            <a:ext cx="11185855" cy="566928"/>
+          </a:xfrm>
+          <a:prstGeom prst="rect">
+            <a:avLst/>
+          </a:prstGeom>
+          <a:noFill/>
+        </p:spPr>
+        <p:txBody>
+          <a:bodyPr wrap="square">
+            <a:spAutoFit/>
+          </a:bodyPr>
+          <a:lstStyle/>
+          <a:p>
+            <a:pPr algn="l"/>
+            <a:r>
+              <a:rPr sz="1300" b="0">
+                <a:solidFill>
+                  <a:srgbClr val="6B6B6B"/>
+                </a:solidFill>
+              </a:rPr>
+              <a:t>On Windows, the release page carries the steps.</a:t>
             </a:r>
           </a:p>
         </p:txBody>
       </p:sp>
       <p:pic>
         <p:nvPicPr>
-          <p:cNvPr id="3" name="Picture 2" descr="step-4-on-windows.png"/>
+          <p:cNvPr id="4" name="Picture 3" descr="step-4-on-windows.png"/>
           <p:cNvPicPr>
             <a:picLocks noChangeAspect="1"/>
           </p:cNvPicPr>
@@ -5865,8 +7112,8 @@
         </p:blipFill>
         <p:spPr>
           <a:xfrm>
-            <a:off x="548640" y="1763657"/>
-            <a:ext cx="11094415" cy="3239245"/>
+            <a:off x="502920" y="1933188"/>
+            <a:ext cx="11185855" cy="3265943"/>
           </a:xfrm>
           <a:prstGeom prst="rect">
             <a:avLst/>
@@ -5875,39 +7122,68 @@
       </p:pic>
       <p:sp>
         <p:nvSpPr>
-          <p:cNvPr id="4" name="TextBox 3"/>
-          <p:cNvSpPr txBox="1"/>
-          <p:nvPr/>
-        </p:nvSpPr>
-        <p:spPr>
-          <a:xfrm>
-            <a:off x="548640" y="5440680"/>
-            <a:ext cx="11094415" cy="914400"/>
-          </a:xfrm>
-          <a:prstGeom prst="rect">
-            <a:avLst/>
-          </a:prstGeom>
-          <a:noFill/>
-        </p:spPr>
-        <p:txBody>
-          <a:bodyPr wrap="square" lIns="0" rIns="0" tIns="0" bIns="0">
-            <a:spAutoFit/>
-          </a:bodyPr>
-          <a:lstStyle/>
-          <a:p>
-            <a:pPr>
-              <a:spcAft>
-                <a:spcPts val="1600"/>
-              </a:spcAft>
-            </a:pPr>
-            <a:r>
-              <a:rPr sz="2200" b="1">
-                <a:solidFill>
-                  <a:srgbClr val="FFB000"/>
-                </a:solidFill>
-                <a:latin typeface="Calibri"/>
+          <p:cNvPr id="5" name="TextBox 4"/>
+          <p:cNvSpPr txBox="1"/>
+          <p:nvPr/>
+        </p:nvSpPr>
+        <p:spPr>
+          <a:xfrm>
+            <a:off x="502920" y="5614416"/>
+            <a:ext cx="11185855" cy="658368"/>
+          </a:xfrm>
+          <a:prstGeom prst="rect">
+            <a:avLst/>
+          </a:prstGeom>
+          <a:noFill/>
+        </p:spPr>
+        <p:txBody>
+          <a:bodyPr wrap="square">
+            <a:spAutoFit/>
+          </a:bodyPr>
+          <a:lstStyle/>
+          <a:p>
+            <a:pPr algn="l"/>
+            <a:r>
+              <a:rPr sz="1500" b="1">
+                <a:solidFill>
+                  <a:srgbClr val="1A1A1A"/>
+                </a:solidFill>
               </a:rPr>
               <a:t>Right-click the file, choose Extract All, open the folder it makes, and double-click the program inside.</a:t>
+            </a:r>
+          </a:p>
+        </p:txBody>
+      </p:sp>
+      <p:sp>
+        <p:nvSpPr>
+          <p:cNvPr id="6" name="TextBox 5"/>
+          <p:cNvSpPr txBox="1"/>
+          <p:nvPr/>
+        </p:nvSpPr>
+        <p:spPr>
+          <a:xfrm>
+            <a:off x="502920" y="6382512"/>
+            <a:ext cx="11185855" cy="310896"/>
+          </a:xfrm>
+          <a:prstGeom prst="rect">
+            <a:avLst/>
+          </a:prstGeom>
+          <a:noFill/>
+        </p:spPr>
+        <p:txBody>
+          <a:bodyPr wrap="square">
+            <a:spAutoFit/>
+          </a:bodyPr>
+          <a:lstStyle/>
+          <a:p>
+            <a:pPr algn="r"/>
+            <a:r>
+              <a:rPr sz="900" b="0">
+                <a:solidFill>
+                  <a:srgbClr val="6B6B6B"/>
+                </a:solidFill>
+              </a:rPr>
+              <a:t>docs/new-user-procedure/04-on-windows.md</a:t>
             </a:r>
           </a:p>
         </p:txBody>
@@ -5926,7 +7202,7 @@
     <p:bg>
       <p:bgPr>
         <a:solidFill>
-          <a:srgbClr val="121216"/>
+          <a:srgbClr val="FFFFFF"/>
         </a:solidFill>
         <a:effectLst/>
       </p:bgPr>
@@ -5946,40 +7222,69 @@
         </p:nvSpPr>
         <p:spPr>
           <a:xfrm>
-            <a:off x="548640" y="457200"/>
-            <a:ext cx="11094415" cy="914400"/>
-          </a:xfrm>
-          <a:prstGeom prst="rect">
-            <a:avLst/>
-          </a:prstGeom>
-          <a:noFill/>
-        </p:spPr>
-        <p:txBody>
-          <a:bodyPr wrap="square" lIns="0" rIns="0" tIns="0" bIns="0">
-            <a:spAutoFit/>
-          </a:bodyPr>
-          <a:lstStyle/>
-          <a:p>
-            <a:pPr>
-              <a:spcAft>
-                <a:spcPts val="1600"/>
-              </a:spcAft>
-            </a:pPr>
-            <a:r>
-              <a:rPr sz="3600" b="1">
-                <a:solidFill>
-                  <a:srgbClr val="FFFFFF"/>
-                </a:solidFill>
-                <a:latin typeface="Cambria"/>
+            <a:off x="502920" y="310896"/>
+            <a:ext cx="11185855" cy="640080"/>
+          </a:xfrm>
+          <a:prstGeom prst="rect">
+            <a:avLst/>
+          </a:prstGeom>
+          <a:noFill/>
+        </p:spPr>
+        <p:txBody>
+          <a:bodyPr wrap="square">
+            <a:spAutoFit/>
+          </a:bodyPr>
+          <a:lstStyle/>
+          <a:p>
+            <a:pPr algn="l"/>
+            <a:r>
+              <a:rPr sz="2600" b="1">
+                <a:solidFill>
+                  <a:srgbClr val="1F3A68"/>
+                </a:solidFill>
               </a:rPr>
               <a:t>Step 5 — On a Mac</a:t>
+            </a:r>
+          </a:p>
+        </p:txBody>
+      </p:sp>
+      <p:sp>
+        <p:nvSpPr>
+          <p:cNvPr id="3" name="TextBox 2"/>
+          <p:cNvSpPr txBox="1"/>
+          <p:nvPr/>
+        </p:nvSpPr>
+        <p:spPr>
+          <a:xfrm>
+            <a:off x="502920" y="969264"/>
+            <a:ext cx="11185855" cy="566928"/>
+          </a:xfrm>
+          <a:prstGeom prst="rect">
+            <a:avLst/>
+          </a:prstGeom>
+          <a:noFill/>
+        </p:spPr>
+        <p:txBody>
+          <a:bodyPr wrap="square">
+            <a:spAutoFit/>
+          </a:bodyPr>
+          <a:lstStyle/>
+          <a:p>
+            <a:pPr algn="l"/>
+            <a:r>
+              <a:rPr sz="1300" b="0">
+                <a:solidFill>
+                  <a:srgbClr val="6B6B6B"/>
+                </a:solidFill>
+              </a:rPr>
+              <a:t>On a Mac, the release page carries the steps.</a:t>
             </a:r>
           </a:p>
         </p:txBody>
       </p:sp>
       <p:pic>
         <p:nvPicPr>
-          <p:cNvPr id="3" name="Picture 2" descr="step-5-on-a-mac.png"/>
+          <p:cNvPr id="4" name="Picture 3" descr="step-5-on-a-mac.png"/>
           <p:cNvPicPr>
             <a:picLocks noChangeAspect="1"/>
           </p:cNvPicPr>
@@ -5993,8 +7298,8 @@
         </p:blipFill>
         <p:spPr>
           <a:xfrm>
-            <a:off x="548640" y="2125180"/>
-            <a:ext cx="11094415" cy="2516199"/>
+            <a:off x="502920" y="2297691"/>
+            <a:ext cx="11185855" cy="2536938"/>
           </a:xfrm>
           <a:prstGeom prst="rect">
             <a:avLst/>
@@ -6003,39 +7308,68 @@
       </p:pic>
       <p:sp>
         <p:nvSpPr>
-          <p:cNvPr id="4" name="TextBox 3"/>
-          <p:cNvSpPr txBox="1"/>
-          <p:nvPr/>
-        </p:nvSpPr>
-        <p:spPr>
-          <a:xfrm>
-            <a:off x="548640" y="5440680"/>
-            <a:ext cx="11094415" cy="914400"/>
-          </a:xfrm>
-          <a:prstGeom prst="rect">
-            <a:avLst/>
-          </a:prstGeom>
-          <a:noFill/>
-        </p:spPr>
-        <p:txBody>
-          <a:bodyPr wrap="square" lIns="0" rIns="0" tIns="0" bIns="0">
-            <a:spAutoFit/>
-          </a:bodyPr>
-          <a:lstStyle/>
-          <a:p>
-            <a:pPr>
-              <a:spcAft>
-                <a:spcPts val="1600"/>
-              </a:spcAft>
-            </a:pPr>
-            <a:r>
-              <a:rPr sz="2200" b="1">
-                <a:solidFill>
-                  <a:srgbClr val="FFB000"/>
-                </a:solidFill>
-                <a:latin typeface="Calibri"/>
+          <p:cNvPr id="5" name="TextBox 4"/>
+          <p:cNvSpPr txBox="1"/>
+          <p:nvPr/>
+        </p:nvSpPr>
+        <p:spPr>
+          <a:xfrm>
+            <a:off x="502920" y="5614416"/>
+            <a:ext cx="11185855" cy="658368"/>
+          </a:xfrm>
+          <a:prstGeom prst="rect">
+            <a:avLst/>
+          </a:prstGeom>
+          <a:noFill/>
+        </p:spPr>
+        <p:txBody>
+          <a:bodyPr wrap="square">
+            <a:spAutoFit/>
+          </a:bodyPr>
+          <a:lstStyle/>
+          <a:p>
+            <a:pPr algn="l"/>
+            <a:r>
+              <a:rPr sz="1500" b="1">
+                <a:solidFill>
+                  <a:srgbClr val="1A1A1A"/>
+                </a:solidFill>
               </a:rPr>
               <a:t>Double-click the file, then drag Acervator to the Applications folder.</a:t>
+            </a:r>
+          </a:p>
+        </p:txBody>
+      </p:sp>
+      <p:sp>
+        <p:nvSpPr>
+          <p:cNvPr id="6" name="TextBox 5"/>
+          <p:cNvSpPr txBox="1"/>
+          <p:nvPr/>
+        </p:nvSpPr>
+        <p:spPr>
+          <a:xfrm>
+            <a:off x="502920" y="6382512"/>
+            <a:ext cx="11185855" cy="310896"/>
+          </a:xfrm>
+          <a:prstGeom prst="rect">
+            <a:avLst/>
+          </a:prstGeom>
+          <a:noFill/>
+        </p:spPr>
+        <p:txBody>
+          <a:bodyPr wrap="square">
+            <a:spAutoFit/>
+          </a:bodyPr>
+          <a:lstStyle/>
+          <a:p>
+            <a:pPr algn="r"/>
+            <a:r>
+              <a:rPr sz="900" b="0">
+                <a:solidFill>
+                  <a:srgbClr val="6B6B6B"/>
+                </a:solidFill>
+              </a:rPr>
+              <a:t>docs/new-user-procedure/05-on-a-mac.md</a:t>
             </a:r>
           </a:p>
         </p:txBody>
@@ -6054,7 +7388,7 @@
     <p:bg>
       <p:bgPr>
         <a:solidFill>
-          <a:srgbClr val="121216"/>
+          <a:srgbClr val="FFFFFF"/>
         </a:solidFill>
         <a:effectLst/>
       </p:bgPr>
@@ -6074,40 +7408,69 @@
         </p:nvSpPr>
         <p:spPr>
           <a:xfrm>
-            <a:off x="548640" y="457200"/>
-            <a:ext cx="11094415" cy="914400"/>
-          </a:xfrm>
-          <a:prstGeom prst="rect">
-            <a:avLst/>
-          </a:prstGeom>
-          <a:noFill/>
-        </p:spPr>
-        <p:txBody>
-          <a:bodyPr wrap="square" lIns="0" rIns="0" tIns="0" bIns="0">
-            <a:spAutoFit/>
-          </a:bodyPr>
-          <a:lstStyle/>
-          <a:p>
-            <a:pPr>
-              <a:spcAft>
-                <a:spcPts val="1600"/>
-              </a:spcAft>
-            </a:pPr>
-            <a:r>
-              <a:rPr sz="3600" b="1">
-                <a:solidFill>
-                  <a:srgbClr val="FFFFFF"/>
-                </a:solidFill>
-                <a:latin typeface="Cambria"/>
+            <a:off x="502920" y="310896"/>
+            <a:ext cx="11185855" cy="640080"/>
+          </a:xfrm>
+          <a:prstGeom prst="rect">
+            <a:avLst/>
+          </a:prstGeom>
+          <a:noFill/>
+        </p:spPr>
+        <p:txBody>
+          <a:bodyPr wrap="square">
+            <a:spAutoFit/>
+          </a:bodyPr>
+          <a:lstStyle/>
+          <a:p>
+            <a:pPr algn="l"/>
+            <a:r>
+              <a:rPr sz="2600" b="1">
+                <a:solidFill>
+                  <a:srgbClr val="1F3A68"/>
+                </a:solidFill>
               </a:rPr>
               <a:t>Step 6 — The window opens</a:t>
+            </a:r>
+          </a:p>
+        </p:txBody>
+      </p:sp>
+      <p:sp>
+        <p:nvSpPr>
+          <p:cNvPr id="3" name="TextBox 2"/>
+          <p:cNvSpPr txBox="1"/>
+          <p:nvPr/>
+        </p:nvSpPr>
+        <p:spPr>
+          <a:xfrm>
+            <a:off x="502920" y="969264"/>
+            <a:ext cx="11185855" cy="566928"/>
+          </a:xfrm>
+          <a:prstGeom prst="rect">
+            <a:avLst/>
+          </a:prstGeom>
+          <a:noFill/>
+        </p:spPr>
+        <p:txBody>
+          <a:bodyPr wrap="square">
+            <a:spAutoFit/>
+          </a:bodyPr>
+          <a:lstStyle/>
+          <a:p>
+            <a:pPr algn="l"/>
+            <a:r>
+              <a:rPr sz="1300" b="0">
+                <a:solidFill>
+                  <a:srgbClr val="6B6B6B"/>
+                </a:solidFill>
+              </a:rPr>
+              <a:t>Acervator opens on Status. Press Live.</a:t>
             </a:r>
           </a:p>
         </p:txBody>
       </p:sp>
       <p:pic>
         <p:nvPicPr>
-          <p:cNvPr id="3" name="Picture 2" descr="step-6-window-opens.png"/>
+          <p:cNvPr id="4" name="Picture 3" descr="step-6-window-opens.png"/>
           <p:cNvPicPr>
             <a:picLocks noChangeAspect="1"/>
           </p:cNvPicPr>
@@ -6121,8 +7484,8 @@
         </p:blipFill>
         <p:spPr>
           <a:xfrm>
-            <a:off x="548640" y="2773087"/>
-            <a:ext cx="11094415" cy="1220385"/>
+            <a:off x="502920" y="2950938"/>
+            <a:ext cx="11185855" cy="1230444"/>
           </a:xfrm>
           <a:prstGeom prst="rect">
             <a:avLst/>
@@ -6131,39 +7494,68 @@
       </p:pic>
       <p:sp>
         <p:nvSpPr>
-          <p:cNvPr id="4" name="TextBox 3"/>
-          <p:cNvSpPr txBox="1"/>
-          <p:nvPr/>
-        </p:nvSpPr>
-        <p:spPr>
-          <a:xfrm>
-            <a:off x="548640" y="5440680"/>
-            <a:ext cx="11094415" cy="914400"/>
-          </a:xfrm>
-          <a:prstGeom prst="rect">
-            <a:avLst/>
-          </a:prstGeom>
-          <a:noFill/>
-        </p:spPr>
-        <p:txBody>
-          <a:bodyPr wrap="square" lIns="0" rIns="0" tIns="0" bIns="0">
-            <a:spAutoFit/>
-          </a:bodyPr>
-          <a:lstStyle/>
-          <a:p>
-            <a:pPr>
-              <a:spcAft>
-                <a:spcPts val="1600"/>
-              </a:spcAft>
-            </a:pPr>
-            <a:r>
-              <a:rPr sz="2200" b="1">
-                <a:solidFill>
-                  <a:srgbClr val="FFB000"/>
-                </a:solidFill>
-                <a:latin typeface="Calibri"/>
+          <p:cNvPr id="5" name="TextBox 4"/>
+          <p:cNvSpPr txBox="1"/>
+          <p:nvPr/>
+        </p:nvSpPr>
+        <p:spPr>
+          <a:xfrm>
+            <a:off x="502920" y="5614416"/>
+            <a:ext cx="11185855" cy="658368"/>
+          </a:xfrm>
+          <a:prstGeom prst="rect">
+            <a:avLst/>
+          </a:prstGeom>
+          <a:noFill/>
+        </p:spPr>
+        <p:txBody>
+          <a:bodyPr wrap="square">
+            <a:spAutoFit/>
+          </a:bodyPr>
+          <a:lstStyle/>
+          <a:p>
+            <a:pPr algn="l"/>
+            <a:r>
+              <a:rPr sz="1500" b="1">
+                <a:solidFill>
+                  <a:srgbClr val="1A1A1A"/>
+                </a:solidFill>
               </a:rPr>
               <a:t>Acervator opens on Status. Press Live.</a:t>
+            </a:r>
+          </a:p>
+        </p:txBody>
+      </p:sp>
+      <p:sp>
+        <p:nvSpPr>
+          <p:cNvPr id="6" name="TextBox 5"/>
+          <p:cNvSpPr txBox="1"/>
+          <p:nvPr/>
+        </p:nvSpPr>
+        <p:spPr>
+          <a:xfrm>
+            <a:off x="502920" y="6382512"/>
+            <a:ext cx="11185855" cy="310896"/>
+          </a:xfrm>
+          <a:prstGeom prst="rect">
+            <a:avLst/>
+          </a:prstGeom>
+          <a:noFill/>
+        </p:spPr>
+        <p:txBody>
+          <a:bodyPr wrap="square">
+            <a:spAutoFit/>
+          </a:bodyPr>
+          <a:lstStyle/>
+          <a:p>
+            <a:pPr algn="r"/>
+            <a:r>
+              <a:rPr sz="900" b="0">
+                <a:solidFill>
+                  <a:srgbClr val="6B6B6B"/>
+                </a:solidFill>
+              </a:rPr>
+              <a:t>docs/new-user-procedure/06-the-window-opens.md</a:t>
             </a:r>
           </a:p>
         </p:txBody>
@@ -6182,7 +7574,7 @@
     <p:bg>
       <p:bgPr>
         <a:solidFill>
-          <a:srgbClr val="121216"/>
+          <a:srgbClr val="FFFFFF"/>
         </a:solidFill>
         <a:effectLst/>
       </p:bgPr>
@@ -6202,40 +7594,69 @@
         </p:nvSpPr>
         <p:spPr>
           <a:xfrm>
-            <a:off x="548640" y="457200"/>
-            <a:ext cx="11094415" cy="914400"/>
-          </a:xfrm>
-          <a:prstGeom prst="rect">
-            <a:avLst/>
-          </a:prstGeom>
-          <a:noFill/>
-        </p:spPr>
-        <p:txBody>
-          <a:bodyPr wrap="square" lIns="0" rIns="0" tIns="0" bIns="0">
-            <a:spAutoFit/>
-          </a:bodyPr>
-          <a:lstStyle/>
-          <a:p>
-            <a:pPr>
-              <a:spcAft>
-                <a:spcPts val="1600"/>
-              </a:spcAft>
-            </a:pPr>
-            <a:r>
-              <a:rPr sz="3600" b="1">
-                <a:solidFill>
-                  <a:srgbClr val="FFFFFF"/>
-                </a:solidFill>
-                <a:latin typeface="Cambria"/>
+            <a:off x="502920" y="310896"/>
+            <a:ext cx="11185855" cy="640080"/>
+          </a:xfrm>
+          <a:prstGeom prst="rect">
+            <a:avLst/>
+          </a:prstGeom>
+          <a:noFill/>
+        </p:spPr>
+        <p:txBody>
+          <a:bodyPr wrap="square">
+            <a:spAutoFit/>
+          </a:bodyPr>
+          <a:lstStyle/>
+          <a:p>
+            <a:pPr algn="l"/>
+            <a:r>
+              <a:rPr sz="2600" b="1">
+                <a:solidFill>
+                  <a:srgbClr val="1F3A68"/>
+                </a:solidFill>
               </a:rPr>
               <a:t>Step 7 — Live has no venue</a:t>
+            </a:r>
+          </a:p>
+        </p:txBody>
+      </p:sp>
+      <p:sp>
+        <p:nvSpPr>
+          <p:cNvPr id="3" name="TextBox 2"/>
+          <p:cNvSpPr txBox="1"/>
+          <p:nvPr/>
+        </p:nvSpPr>
+        <p:spPr>
+          <a:xfrm>
+            <a:off x="502920" y="969264"/>
+            <a:ext cx="11185855" cy="566928"/>
+          </a:xfrm>
+          <a:prstGeom prst="rect">
+            <a:avLst/>
+          </a:prstGeom>
+          <a:noFill/>
+        </p:spPr>
+        <p:txBody>
+          <a:bodyPr wrap="square">
+            <a:spAutoFit/>
+          </a:bodyPr>
+          <a:lstStyle/>
+          <a:p>
+            <a:pPr algn="l"/>
+            <a:r>
+              <a:rPr sz="1300" b="0">
+                <a:solidFill>
+                  <a:srgbClr val="6B6B6B"/>
+                </a:solidFill>
+              </a:rPr>
+              <a:t>No venue is stored. Press Add Crypto Exchange.</a:t>
             </a:r>
           </a:p>
         </p:txBody>
       </p:sp>
       <p:pic>
         <p:nvPicPr>
-          <p:cNvPr id="3" name="Picture 2" descr="step-7-live-has-no-venue.png"/>
+          <p:cNvPr id="4" name="Picture 3" descr="step-7-live-has-no-venue.png"/>
           <p:cNvPicPr>
             <a:picLocks noChangeAspect="1"/>
           </p:cNvPicPr>
@@ -6249,8 +7670,8 @@
         </p:blipFill>
         <p:spPr>
           <a:xfrm>
-            <a:off x="2519210" y="2087880"/>
-            <a:ext cx="7153275" cy="2590800"/>
+            <a:off x="794008" y="1645920"/>
+            <a:ext cx="10603678" cy="3840480"/>
           </a:xfrm>
           <a:prstGeom prst="rect">
             <a:avLst/>
@@ -6259,39 +7680,68 @@
       </p:pic>
       <p:sp>
         <p:nvSpPr>
-          <p:cNvPr id="4" name="TextBox 3"/>
-          <p:cNvSpPr txBox="1"/>
-          <p:nvPr/>
-        </p:nvSpPr>
-        <p:spPr>
-          <a:xfrm>
-            <a:off x="548640" y="5440680"/>
-            <a:ext cx="11094415" cy="914400"/>
-          </a:xfrm>
-          <a:prstGeom prst="rect">
-            <a:avLst/>
-          </a:prstGeom>
-          <a:noFill/>
-        </p:spPr>
-        <p:txBody>
-          <a:bodyPr wrap="square" lIns="0" rIns="0" tIns="0" bIns="0">
-            <a:spAutoFit/>
-          </a:bodyPr>
-          <a:lstStyle/>
-          <a:p>
-            <a:pPr>
-              <a:spcAft>
-                <a:spcPts val="1600"/>
-              </a:spcAft>
-            </a:pPr>
-            <a:r>
-              <a:rPr sz="2200" b="1">
-                <a:solidFill>
-                  <a:srgbClr val="FFB000"/>
-                </a:solidFill>
-                <a:latin typeface="Calibri"/>
+          <p:cNvPr id="5" name="TextBox 4"/>
+          <p:cNvSpPr txBox="1"/>
+          <p:nvPr/>
+        </p:nvSpPr>
+        <p:spPr>
+          <a:xfrm>
+            <a:off x="502920" y="5614416"/>
+            <a:ext cx="11185855" cy="658368"/>
+          </a:xfrm>
+          <a:prstGeom prst="rect">
+            <a:avLst/>
+          </a:prstGeom>
+          <a:noFill/>
+        </p:spPr>
+        <p:txBody>
+          <a:bodyPr wrap="square">
+            <a:spAutoFit/>
+          </a:bodyPr>
+          <a:lstStyle/>
+          <a:p>
+            <a:pPr algn="l"/>
+            <a:r>
+              <a:rPr sz="1500" b="1">
+                <a:solidFill>
+                  <a:srgbClr val="1A1A1A"/>
+                </a:solidFill>
               </a:rPr>
               <a:t>No venue is stored. Press Add Crypto Exchange.</a:t>
+            </a:r>
+          </a:p>
+        </p:txBody>
+      </p:sp>
+      <p:sp>
+        <p:nvSpPr>
+          <p:cNvPr id="6" name="TextBox 5"/>
+          <p:cNvSpPr txBox="1"/>
+          <p:nvPr/>
+        </p:nvSpPr>
+        <p:spPr>
+          <a:xfrm>
+            <a:off x="502920" y="6382512"/>
+            <a:ext cx="11185855" cy="310896"/>
+          </a:xfrm>
+          <a:prstGeom prst="rect">
+            <a:avLst/>
+          </a:prstGeom>
+          <a:noFill/>
+        </p:spPr>
+        <p:txBody>
+          <a:bodyPr wrap="square">
+            <a:spAutoFit/>
+          </a:bodyPr>
+          <a:lstStyle/>
+          <a:p>
+            <a:pPr algn="r"/>
+            <a:r>
+              <a:rPr sz="900" b="0">
+                <a:solidFill>
+                  <a:srgbClr val="6B6B6B"/>
+                </a:solidFill>
+              </a:rPr>
+              <a:t>docs/new-user-procedure/07-live-has-no-venue.md</a:t>
             </a:r>
           </a:p>
         </p:txBody>
@@ -6310,7 +7760,7 @@
     <p:bg>
       <p:bgPr>
         <a:solidFill>
-          <a:srgbClr val="121216"/>
+          <a:srgbClr val="FFFFFF"/>
         </a:solidFill>
         <a:effectLst/>
       </p:bgPr>
@@ -6330,40 +7780,69 @@
         </p:nvSpPr>
         <p:spPr>
           <a:xfrm>
-            <a:off x="548640" y="457200"/>
-            <a:ext cx="11094415" cy="914400"/>
-          </a:xfrm>
-          <a:prstGeom prst="rect">
-            <a:avLst/>
-          </a:prstGeom>
-          <a:noFill/>
-        </p:spPr>
-        <p:txBody>
-          <a:bodyPr wrap="square" lIns="0" rIns="0" tIns="0" bIns="0">
-            <a:spAutoFit/>
-          </a:bodyPr>
-          <a:lstStyle/>
-          <a:p>
-            <a:pPr>
-              <a:spcAft>
-                <a:spcPts val="1600"/>
-              </a:spcAft>
-            </a:pPr>
-            <a:r>
-              <a:rPr sz="3600" b="1">
-                <a:solidFill>
-                  <a:srgbClr val="FFFFFF"/>
-                </a:solidFill>
-                <a:latin typeface="Cambria"/>
+            <a:off x="502920" y="310896"/>
+            <a:ext cx="11185855" cy="640080"/>
+          </a:xfrm>
+          <a:prstGeom prst="rect">
+            <a:avLst/>
+          </a:prstGeom>
+          <a:noFill/>
+        </p:spPr>
+        <p:txBody>
+          <a:bodyPr wrap="square">
+            <a:spAutoFit/>
+          </a:bodyPr>
+          <a:lstStyle/>
+          <a:p>
+            <a:pPr algn="l"/>
+            <a:r>
+              <a:rPr sz="2600" b="1">
+                <a:solidFill>
+                  <a:srgbClr val="1F3A68"/>
+                </a:solidFill>
               </a:rPr>
               <a:t>Step 8 — Enter the venue keys</a:t>
+            </a:r>
+          </a:p>
+        </p:txBody>
+      </p:sp>
+      <p:sp>
+        <p:nvSpPr>
+          <p:cNvPr id="3" name="TextBox 2"/>
+          <p:cNvSpPr txBox="1"/>
+          <p:nvPr/>
+        </p:nvSpPr>
+        <p:spPr>
+          <a:xfrm>
+            <a:off x="502920" y="969264"/>
+            <a:ext cx="11185855" cy="566928"/>
+          </a:xfrm>
+          <a:prstGeom prst="rect">
+            <a:avLst/>
+          </a:prstGeom>
+          <a:noFill/>
+        </p:spPr>
+        <p:txBody>
+          <a:bodyPr wrap="square">
+            <a:spAutoFit/>
+          </a:bodyPr>
+          <a:lstStyle/>
+          <a:p>
+            <a:pPr algn="l"/>
+            <a:r>
+              <a:rPr sz="1300" b="0">
+                <a:solidFill>
+                  <a:srgbClr val="6B6B6B"/>
+                </a:solidFill>
+              </a:rPr>
+              <a:t>Type the key and the secret. Press Test and Add Exchange.</a:t>
             </a:r>
           </a:p>
         </p:txBody>
       </p:sp>
       <p:pic>
         <p:nvPicPr>
-          <p:cNvPr id="3" name="Picture 2" descr="step-8-enter-the-venue-keys.png"/>
+          <p:cNvPr id="4" name="Picture 3" descr="step-8-enter-the-venue-keys.png"/>
           <p:cNvPicPr>
             <a:picLocks noChangeAspect="1"/>
           </p:cNvPicPr>
@@ -6377,8 +7856,8 @@
         </p:blipFill>
         <p:spPr>
           <a:xfrm>
-            <a:off x="2734083" y="1554480"/>
-            <a:ext cx="6723529" cy="3657600"/>
+            <a:off x="2565994" y="1645920"/>
+            <a:ext cx="7059706" cy="3840480"/>
           </a:xfrm>
           <a:prstGeom prst="rect">
             <a:avLst/>
@@ -6387,39 +7866,68 @@
       </p:pic>
       <p:sp>
         <p:nvSpPr>
-          <p:cNvPr id="4" name="TextBox 3"/>
-          <p:cNvSpPr txBox="1"/>
-          <p:nvPr/>
-        </p:nvSpPr>
-        <p:spPr>
-          <a:xfrm>
-            <a:off x="548640" y="5440680"/>
-            <a:ext cx="11094415" cy="914400"/>
-          </a:xfrm>
-          <a:prstGeom prst="rect">
-            <a:avLst/>
-          </a:prstGeom>
-          <a:noFill/>
-        </p:spPr>
-        <p:txBody>
-          <a:bodyPr wrap="square" lIns="0" rIns="0" tIns="0" bIns="0">
-            <a:spAutoFit/>
-          </a:bodyPr>
-          <a:lstStyle/>
-          <a:p>
-            <a:pPr>
-              <a:spcAft>
-                <a:spcPts val="1600"/>
-              </a:spcAft>
-            </a:pPr>
-            <a:r>
-              <a:rPr sz="2200" b="1">
-                <a:solidFill>
-                  <a:srgbClr val="FFB000"/>
-                </a:solidFill>
-                <a:latin typeface="Calibri"/>
+          <p:cNvPr id="5" name="TextBox 4"/>
+          <p:cNvSpPr txBox="1"/>
+          <p:nvPr/>
+        </p:nvSpPr>
+        <p:spPr>
+          <a:xfrm>
+            <a:off x="502920" y="5614416"/>
+            <a:ext cx="11185855" cy="658368"/>
+          </a:xfrm>
+          <a:prstGeom prst="rect">
+            <a:avLst/>
+          </a:prstGeom>
+          <a:noFill/>
+        </p:spPr>
+        <p:txBody>
+          <a:bodyPr wrap="square">
+            <a:spAutoFit/>
+          </a:bodyPr>
+          <a:lstStyle/>
+          <a:p>
+            <a:pPr algn="l"/>
+            <a:r>
+              <a:rPr sz="1500" b="1">
+                <a:solidFill>
+                  <a:srgbClr val="1A1A1A"/>
+                </a:solidFill>
               </a:rPr>
               <a:t>Type the key and the secret. Press Test and Add Exchange.</a:t>
+            </a:r>
+          </a:p>
+        </p:txBody>
+      </p:sp>
+      <p:sp>
+        <p:nvSpPr>
+          <p:cNvPr id="6" name="TextBox 5"/>
+          <p:cNvSpPr txBox="1"/>
+          <p:nvPr/>
+        </p:nvSpPr>
+        <p:spPr>
+          <a:xfrm>
+            <a:off x="502920" y="6382512"/>
+            <a:ext cx="11185855" cy="310896"/>
+          </a:xfrm>
+          <a:prstGeom prst="rect">
+            <a:avLst/>
+          </a:prstGeom>
+          <a:noFill/>
+        </p:spPr>
+        <p:txBody>
+          <a:bodyPr wrap="square">
+            <a:spAutoFit/>
+          </a:bodyPr>
+          <a:lstStyle/>
+          <a:p>
+            <a:pPr algn="r"/>
+            <a:r>
+              <a:rPr sz="900" b="0">
+                <a:solidFill>
+                  <a:srgbClr val="6B6B6B"/>
+                </a:solidFill>
+              </a:rPr>
+              <a:t>docs/new-user-procedure/08-enter-the-venue-keys.md</a:t>
             </a:r>
           </a:p>
         </p:txBody>
@@ -6438,7 +7946,7 @@
     <p:bg>
       <p:bgPr>
         <a:solidFill>
-          <a:srgbClr val="121216"/>
+          <a:srgbClr val="FFFFFF"/>
         </a:solidFill>
         <a:effectLst/>
       </p:bgPr>
@@ -6458,40 +7966,69 @@
         </p:nvSpPr>
         <p:spPr>
           <a:xfrm>
-            <a:off x="548640" y="457200"/>
-            <a:ext cx="11094415" cy="914400"/>
-          </a:xfrm>
-          <a:prstGeom prst="rect">
-            <a:avLst/>
-          </a:prstGeom>
-          <a:noFill/>
-        </p:spPr>
-        <p:txBody>
-          <a:bodyPr wrap="square" lIns="0" rIns="0" tIns="0" bIns="0">
-            <a:spAutoFit/>
-          </a:bodyPr>
-          <a:lstStyle/>
-          <a:p>
-            <a:pPr>
-              <a:spcAft>
-                <a:spcPts val="1600"/>
-              </a:spcAft>
-            </a:pPr>
-            <a:r>
-              <a:rPr sz="3600" b="1">
-                <a:solidFill>
-                  <a:srgbClr val="FFFFFF"/>
-                </a:solidFill>
-                <a:latin typeface="Cambria"/>
+            <a:off x="502920" y="310896"/>
+            <a:ext cx="11185855" cy="640080"/>
+          </a:xfrm>
+          <a:prstGeom prst="rect">
+            <a:avLst/>
+          </a:prstGeom>
+          <a:noFill/>
+        </p:spPr>
+        <p:txBody>
+          <a:bodyPr wrap="square">
+            <a:spAutoFit/>
+          </a:bodyPr>
+          <a:lstStyle/>
+          <a:p>
+            <a:pPr algn="l"/>
+            <a:r>
+              <a:rPr sz="2600" b="1">
+                <a:solidFill>
+                  <a:srgbClr val="1F3A68"/>
+                </a:solidFill>
               </a:rPr>
               <a:t>Step 9 — Choose the engine</a:t>
+            </a:r>
+          </a:p>
+        </p:txBody>
+      </p:sp>
+      <p:sp>
+        <p:nvSpPr>
+          <p:cNvPr id="3" name="TextBox 2"/>
+          <p:cNvSpPr txBox="1"/>
+          <p:nvPr/>
+        </p:nvSpPr>
+        <p:spPr>
+          <a:xfrm>
+            <a:off x="502920" y="969264"/>
+            <a:ext cx="11185855" cy="566928"/>
+          </a:xfrm>
+          <a:prstGeom prst="rect">
+            <a:avLst/>
+          </a:prstGeom>
+          <a:noFill/>
+        </p:spPr>
+        <p:txBody>
+          <a:bodyPr wrap="square">
+            <a:spAutoFit/>
+          </a:bodyPr>
+          <a:lstStyle/>
+          <a:p>
+            <a:pPr algn="l"/>
+            <a:r>
+              <a:rPr sz="1300" b="0">
+                <a:solidFill>
+                  <a:srgbClr val="6B6B6B"/>
+                </a:solidFill>
+              </a:rPr>
+              <a:t>Press Accumulation Trading, then Next. The wizard opens Select Asset Pair.</a:t>
             </a:r>
           </a:p>
         </p:txBody>
       </p:sp>
       <p:pic>
         <p:nvPicPr>
-          <p:cNvPr id="3" name="Picture 2" descr="step-9-choose-the-engine.png"/>
+          <p:cNvPr id="4" name="Picture 3" descr="step-9-choose-the-engine.png"/>
           <p:cNvPicPr>
             <a:picLocks noChangeAspect="1"/>
           </p:cNvPicPr>
@@ -6505,8 +8042,8 @@
         </p:blipFill>
         <p:spPr>
           <a:xfrm>
-            <a:off x="2529039" y="1554480"/>
-            <a:ext cx="7133617" cy="3657600"/>
+            <a:off x="2350699" y="1645920"/>
+            <a:ext cx="7490297" cy="3840480"/>
           </a:xfrm>
           <a:prstGeom prst="rect">
             <a:avLst/>
@@ -6515,39 +8052,68 @@
       </p:pic>
       <p:sp>
         <p:nvSpPr>
-          <p:cNvPr id="4" name="TextBox 3"/>
-          <p:cNvSpPr txBox="1"/>
-          <p:nvPr/>
-        </p:nvSpPr>
-        <p:spPr>
-          <a:xfrm>
-            <a:off x="548640" y="5440680"/>
-            <a:ext cx="11094415" cy="914400"/>
-          </a:xfrm>
-          <a:prstGeom prst="rect">
-            <a:avLst/>
-          </a:prstGeom>
-          <a:noFill/>
-        </p:spPr>
-        <p:txBody>
-          <a:bodyPr wrap="square" lIns="0" rIns="0" tIns="0" bIns="0">
-            <a:spAutoFit/>
-          </a:bodyPr>
-          <a:lstStyle/>
-          <a:p>
-            <a:pPr>
-              <a:spcAft>
-                <a:spcPts val="1600"/>
-              </a:spcAft>
-            </a:pPr>
-            <a:r>
-              <a:rPr sz="2200" b="1">
-                <a:solidFill>
-                  <a:srgbClr val="FFB000"/>
-                </a:solidFill>
-                <a:latin typeface="Calibri"/>
+          <p:cNvPr id="5" name="TextBox 4"/>
+          <p:cNvSpPr txBox="1"/>
+          <p:nvPr/>
+        </p:nvSpPr>
+        <p:spPr>
+          <a:xfrm>
+            <a:off x="502920" y="5614416"/>
+            <a:ext cx="11185855" cy="658368"/>
+          </a:xfrm>
+          <a:prstGeom prst="rect">
+            <a:avLst/>
+          </a:prstGeom>
+          <a:noFill/>
+        </p:spPr>
+        <p:txBody>
+          <a:bodyPr wrap="square">
+            <a:spAutoFit/>
+          </a:bodyPr>
+          <a:lstStyle/>
+          <a:p>
+            <a:pPr algn="l"/>
+            <a:r>
+              <a:rPr sz="1500" b="1">
+                <a:solidFill>
+                  <a:srgbClr val="1A1A1A"/>
+                </a:solidFill>
               </a:rPr>
               <a:t>Press Accumulation Trading (Scrumming), then Next.</a:t>
+            </a:r>
+          </a:p>
+        </p:txBody>
+      </p:sp>
+      <p:sp>
+        <p:nvSpPr>
+          <p:cNvPr id="6" name="TextBox 5"/>
+          <p:cNvSpPr txBox="1"/>
+          <p:nvPr/>
+        </p:nvSpPr>
+        <p:spPr>
+          <a:xfrm>
+            <a:off x="502920" y="6382512"/>
+            <a:ext cx="11185855" cy="310896"/>
+          </a:xfrm>
+          <a:prstGeom prst="rect">
+            <a:avLst/>
+          </a:prstGeom>
+          <a:noFill/>
+        </p:spPr>
+        <p:txBody>
+          <a:bodyPr wrap="square">
+            <a:spAutoFit/>
+          </a:bodyPr>
+          <a:lstStyle/>
+          <a:p>
+            <a:pPr algn="r"/>
+            <a:r>
+              <a:rPr sz="900" b="0">
+                <a:solidFill>
+                  <a:srgbClr val="6B6B6B"/>
+                </a:solidFill>
+              </a:rPr>
+              <a:t>docs/new-user-procedure/09-choose-the-engine.md</a:t>
             </a:r>
           </a:p>
         </p:txBody>
